--- a/diapositivas/bloque5.pptx
+++ b/diapositivas/bloque5.pptx
@@ -4,6 +4,9 @@
   <p:sldMasterIdLst>
     <p:sldMasterId id="2147483648" r:id="rId1"/>
   </p:sldMasterIdLst>
+  <p:notesMasterIdLst>
+    <p:notesMasterId r:id="rId15"/>
+  </p:notesMasterIdLst>
   <p:sldIdLst>
     <p:sldId id="256" r:id="rId2"/>
     <p:sldId id="257" r:id="rId3"/>
@@ -15,15 +18,10 @@
     <p:sldId id="263" r:id="rId9"/>
     <p:sldId id="264" r:id="rId10"/>
     <p:sldId id="265" r:id="rId11"/>
-    <p:sldId id="266" r:id="rId12"/>
-    <p:sldId id="267" r:id="rId13"/>
-    <p:sldId id="268" r:id="rId14"/>
-    <p:sldId id="269" r:id="rId15"/>
-    <p:sldId id="270" r:id="rId16"/>
+    <p:sldId id="268" r:id="rId12"/>
+    <p:sldId id="269" r:id="rId13"/>
+    <p:sldId id="270" r:id="rId14"/>
   </p:sldIdLst>
-  <p:notesMasterIdLst>
-    <p:notesMasterId r:id="rId17"/>
-  </p:notesMasterIdLst>
   <p:sldSz cx="12192000" cy="6858000"/>
   <p:notesSz cx="6858000" cy="12192000"/>
   <p:defaultTextStyle>
@@ -121,39 +119,37 @@
   <p:extLst>
     <p:ext uri="{521415D9-36F7-43E2-AB2F-B90AF26B5E84}">
       <p14:sectionLst xmlns:p14="http://schemas.microsoft.com/office/powerpoint/2010/main">
-        <p14:section name="Bloque 5" id="{ce388a4d-6f73-6e2b-3b6f-69f0f707a0c8}">
+        <p14:section name="Bloque 5" id="{CE388A4D-6F73-6E2B-3B6F-69F0F707A0C8}">
           <p14:sldIdLst>
             <p14:sldId id="256"/>
             <p14:sldId id="257"/>
           </p14:sldIdLst>
         </p14:section>
-        <p14:section name="Defender una idea" id="{3c6a5ef5-6b58-a273-7855-7404180bab09}">
+        <p14:section name="Defender una idea" id="{3C6A5EF5-6B58-A273-7855-7404180BAB09}">
           <p14:sldIdLst>
             <p14:sldId id="258"/>
             <p14:sldId id="259"/>
             <p14:sldId id="260"/>
           </p14:sldIdLst>
         </p14:section>
-        <p14:section name="Presentaciones" id="{ff4ba565-ca63-9d3d-591f-15060dcadb00}">
+        <p14:section name="Presentaciones" id="{FF4BA565-CA63-9D3D-591F-15060DCADB00}">
           <p14:sldIdLst>
             <p14:sldId id="261"/>
             <p14:sldId id="262"/>
           </p14:sldIdLst>
         </p14:section>
-        <p14:section name="IA evaluadora" id="{dda7b211-10f8-c2bc-1664-cf951f1bd64d}">
+        <p14:section name="IA evaluadora" id="{DDA7B211-10F8-C2BC-1664-CF951F1BD64D}">
           <p14:sldIdLst>
             <p14:sldId id="263"/>
             <p14:sldId id="264"/>
           </p14:sldIdLst>
         </p14:section>
-        <p14:section name="Empleo" id="{0ab61e27-b9a3-bca5-db6e-194663072e15}">
+        <p14:section name="Empleo" id="{0AB61E27-B9A3-BCA5-DB6E-194663072E15}">
           <p14:sldIdLst>
             <p14:sldId id="265"/>
-            <p14:sldId id="266"/>
-            <p14:sldId id="267"/>
           </p14:sldIdLst>
         </p14:section>
-        <p14:section name="Cierre" id="{feadb4f5-bc38-2379-edcb-2c48c4462ddf}">
+        <p14:section name="Cierre" id="{FEADB4F5-BC38-2379-EDCB-2C48C4462DDF}">
           <p14:sldIdLst>
             <p14:sldId id="268"/>
             <p14:sldId id="269"/>
@@ -191,234 +187,10 @@
           <a:chExt cx="0" cy="0"/>
         </a:xfrm>
       </p:grpSpPr>
-      <p:sp>
-        <p:nvSpPr>
-          <p:cNvPr id="2" name="Header Placeholder 1"/>
-          <p:cNvSpPr>
-            <a:spLocks noGrp="1"/>
-          </p:cNvSpPr>
-          <p:nvPr>
-            <p:ph type="hdr" sz="quarter"/>
-          </p:nvPr>
-        </p:nvSpPr>
-        <p:spPr>
-          <a:xfrm>
-            <a:off x="0" y="0"/>
-            <a:ext cx="2971800" cy="458788"/>
-          </a:xfrm>
-          <a:prstGeom prst="rect">
-            <a:avLst/>
-          </a:prstGeom>
-        </p:spPr>
-        <p:txBody>
-          <a:bodyPr vert="horz" lIns="91440" tIns="45720" rIns="91440" bIns="45720" rtlCol="0"/>
-          <a:lstStyle>
-            <a:lvl1pPr algn="l">
-              <a:defRPr sz="1200"/>
-            </a:lvl1pPr>
-          </a:lstStyle>
-          <a:p>
-            <a:endParaRPr lang="en-US"/>
-          </a:p>
-        </p:txBody>
-      </p:sp>
-      <p:sp>
-        <p:nvSpPr>
-          <p:cNvPr id="3" name="Date Placeholder 2"/>
-          <p:cNvSpPr>
-            <a:spLocks noGrp="1"/>
-          </p:cNvSpPr>
-          <p:nvPr>
-            <p:ph type="dt" idx="1"/>
-          </p:nvPr>
-        </p:nvSpPr>
-        <p:spPr>
-          <a:xfrm>
-            <a:off x="3884613" y="0"/>
-            <a:ext cx="2971800" cy="458788"/>
-          </a:xfrm>
-          <a:prstGeom prst="rect">
-            <a:avLst/>
-          </a:prstGeom>
-        </p:spPr>
-        <p:txBody>
-          <a:bodyPr vert="horz" lIns="91440" tIns="45720" rIns="91440" bIns="45720" rtlCol="0"/>
-          <a:lstStyle>
-            <a:lvl1pPr algn="r">
-              <a:defRPr sz="1200"/>
-            </a:lvl1pPr>
-          </a:lstStyle>
-          <a:p>
-            <a:fld id="{5282F153-3F37-0F45-9E97-73ACFA13230C}" type="datetimeFigureOut">
-              <a:rPr lang="en-US"/>
-              <a:t>7/23/19</a:t>
-            </a:fld>
-            <a:endParaRPr lang="en-US"/>
-          </a:p>
-        </p:txBody>
-      </p:sp>
-      <p:sp>
-        <p:nvSpPr>
-          <p:cNvPr id="4" name="Slide Image Placeholder 3"/>
-          <p:cNvSpPr>
-            <a:spLocks noGrp="1" noRot="1" noChangeAspect="1"/>
-          </p:cNvSpPr>
-          <p:nvPr>
-            <p:ph type="sldImg" idx="2"/>
-          </p:nvPr>
-        </p:nvSpPr>
-        <p:spPr>
-          <a:xfrm>
-            <a:off x="685800" y="1143000"/>
-            <a:ext cx="5486400" cy="3086100"/>
-          </a:xfrm>
-          <a:prstGeom prst="rect">
-            <a:avLst/>
-          </a:prstGeom>
-          <a:noFill/>
-          <a:ln w="12700">
-            <a:solidFill>
-              <a:prstClr val="black"/>
-            </a:solidFill>
-          </a:ln>
-        </p:spPr>
-        <p:txBody>
-          <a:bodyPr vert="horz" lIns="91440" tIns="45720" rIns="91440" bIns="45720" rtlCol="0" anchor="ctr"/>
-          <a:lstStyle/>
-          <a:p>
-            <a:endParaRPr lang="en-US"/>
-          </a:p>
-        </p:txBody>
-      </p:sp>
-      <p:sp>
-        <p:nvSpPr>
-          <p:cNvPr id="5" name="Notes Placeholder 4"/>
-          <p:cNvSpPr>
-            <a:spLocks noGrp="1"/>
-          </p:cNvSpPr>
-          <p:nvPr>
-            <p:ph type="body" sz="quarter" idx="3"/>
-          </p:nvPr>
-        </p:nvSpPr>
-        <p:spPr>
-          <a:xfrm>
-            <a:off x="685800" y="4400550"/>
-            <a:ext cx="5486400" cy="3600450"/>
-          </a:xfrm>
-          <a:prstGeom prst="rect">
-            <a:avLst/>
-          </a:prstGeom>
-        </p:spPr>
-        <p:txBody>
-          <a:bodyPr vert="horz" lIns="91440" tIns="45720" rIns="91440" bIns="45720" rtlCol="0"/>
-          <a:lstStyle/>
-          <a:p>
-            <a:pPr lvl="0"/>
-            <a:r>
-              <a:rPr lang="en-US"/>
-              <a:t>Click to edit Master text styles</a:t>
-            </a:r>
-          </a:p>
-          <a:p>
-            <a:pPr lvl="1"/>
-            <a:r>
-              <a:rPr lang="en-US"/>
-              <a:t>Second level</a:t>
-            </a:r>
-          </a:p>
-          <a:p>
-            <a:pPr lvl="2"/>
-            <a:r>
-              <a:rPr lang="en-US"/>
-              <a:t>Third level</a:t>
-            </a:r>
-          </a:p>
-          <a:p>
-            <a:pPr lvl="3"/>
-            <a:r>
-              <a:rPr lang="en-US"/>
-              <a:t>Fourth level</a:t>
-            </a:r>
-          </a:p>
-          <a:p>
-            <a:pPr lvl="4"/>
-            <a:r>
-              <a:rPr lang="en-US"/>
-              <a:t>Fifth level</a:t>
-            </a:r>
-          </a:p>
-        </p:txBody>
-      </p:sp>
-      <p:sp>
-        <p:nvSpPr>
-          <p:cNvPr id="6" name="Footer Placeholder 5"/>
-          <p:cNvSpPr>
-            <a:spLocks noGrp="1"/>
-          </p:cNvSpPr>
-          <p:nvPr>
-            <p:ph type="ftr" sz="quarter" idx="4"/>
-          </p:nvPr>
-        </p:nvSpPr>
-        <p:spPr>
-          <a:xfrm>
-            <a:off x="0" y="8685213"/>
-            <a:ext cx="2971800" cy="458787"/>
-          </a:xfrm>
-          <a:prstGeom prst="rect">
-            <a:avLst/>
-          </a:prstGeom>
-        </p:spPr>
-        <p:txBody>
-          <a:bodyPr vert="horz" lIns="91440" tIns="45720" rIns="91440" bIns="45720" rtlCol="0" anchor="b"/>
-          <a:lstStyle>
-            <a:lvl1pPr algn="l">
-              <a:defRPr sz="1200"/>
-            </a:lvl1pPr>
-          </a:lstStyle>
-          <a:p>
-            <a:endParaRPr lang="en-US"/>
-          </a:p>
-        </p:txBody>
-      </p:sp>
-      <p:sp>
-        <p:nvSpPr>
-          <p:cNvPr id="7" name="Slide Number Placeholder 6"/>
-          <p:cNvSpPr>
-            <a:spLocks noGrp="1"/>
-          </p:cNvSpPr>
-          <p:nvPr>
-            <p:ph type="sldNum" sz="quarter" idx="5"/>
-          </p:nvPr>
-        </p:nvSpPr>
-        <p:spPr>
-          <a:xfrm>
-            <a:off x="3884613" y="8685213"/>
-            <a:ext cx="2971800" cy="458787"/>
-          </a:xfrm>
-          <a:prstGeom prst="rect">
-            <a:avLst/>
-          </a:prstGeom>
-        </p:spPr>
-        <p:txBody>
-          <a:bodyPr vert="horz" lIns="91440" tIns="45720" rIns="91440" bIns="45720" rtlCol="0" anchor="b"/>
-          <a:lstStyle>
-            <a:lvl1pPr algn="r">
-              <a:defRPr sz="1200"/>
-            </a:lvl1pPr>
-          </a:lstStyle>
-          <a:p>
-            <a:fld id="{CE5E9CC1-C706-0F49-92D6-E571CC5EEA8F}" type="slidenum">
-              <a:rPr lang="en-US"/>
-              <a:t>‹#›</a:t>
-            </a:fld>
-            <a:endParaRPr lang="en-US"/>
-          </a:p>
-        </p:txBody>
-      </p:sp>
     </p:spTree>
     <p:extLst>
       <p:ext uri="{BB962C8B-B14F-4D97-AF65-F5344CB8AC3E}">
-        <p14:creationId xmlns:p14="http://schemas.microsoft.com/office/powerpoint/2010/main" val="1024086991"/>
+        <p14:creationId xmlns:p14="http://schemas.microsoft.com/office/powerpoint/2010/main" val="946757932"/>
       </p:ext>
     </p:extLst>
   </p:cSld>
@@ -566,7 +338,6 @@
               <a:rPr lang="en-US" dirty="0"/>
               <a:t>Objetivo del bloque: defender una propuesta, aceptar críticas constructivas y traducir la experiencia en evidencias profesionales.</a:t>
             </a:r>
-            <a:endParaRPr lang="en-US" dirty="0"/>
           </a:p>
         </p:txBody>
       </p:sp>
@@ -654,7 +425,6 @@
               <a:rPr lang="en-US" dirty="0"/>
               <a:t>Minutos 285–295. Explicar que el trabajo realizado permite demostrar identificación de problemas, análisis, creatividad, dominio digital y comunicación.</a:t>
             </a:r>
-            <a:endParaRPr lang="en-US" dirty="0"/>
           </a:p>
         </p:txBody>
       </p:sp>
@@ -740,9 +510,8 @@
           <a:p>
             <a:r>
               <a:rPr lang="en-US" dirty="0"/>
-              <a:t>Aclarar que debe presentarse como simulación formativa, no como mejora realmente implantada en una empresa.</a:t>
-            </a:r>
-            <a:endParaRPr lang="en-US" dirty="0"/>
+              <a:t>Minutos 295–300. Preguntar oralmente.</a:t>
+            </a:r>
           </a:p>
         </p:txBody>
       </p:sp>
@@ -828,9 +597,8 @@
           <a:p>
             <a:r>
               <a:rPr lang="en-US" dirty="0"/>
-              <a:t>Cada persona escribe su relato en 5 minutos. Después, tres o cuatro voluntarios lo leen en voz alta y el grupo propone una mejora para cada uno. Comprobar que nadie presenta la simulación como un logro real.</a:t>
-            </a:r>
-            <a:endParaRPr lang="en-US" dirty="0"/>
+              <a:t>Pedir a cada participante una técnica que quiera aplicar en un futuro empleo.</a:t>
+            </a:r>
           </a:p>
         </p:txBody>
       </p:sp>
@@ -916,9 +684,8 @@
           <a:p>
             <a:r>
               <a:rPr lang="en-US" dirty="0"/>
-              <a:t>Minutos 295–300. Preguntar oralmente.</a:t>
-            </a:r>
-            <a:endParaRPr lang="en-US" dirty="0"/>
+              <a:t>Mensaje central para cerrar el taller (sección de orientaciones metodológicas del guion).</a:t>
+            </a:r>
           </a:p>
         </p:txBody>
       </p:sp>
@@ -940,182 +707,6 @@
             <a:fld id="{F7021451-1387-4CA6-816F-3879F97B5CBC}" type="slidenum">
               <a:rPr lang="en-US"/>
               <a:t>13</a:t>
-            </a:fld>
-            <a:endParaRPr lang="en-US"/>
-          </a:p>
-        </p:txBody>
-      </p:sp>
-    </p:spTree>
-    <p:extLst>
-      <p:ext uri="{BB962C8B-B14F-4D97-AF65-F5344CB8AC3E}">
-        <p14:creationId xmlns:p14="http://schemas.microsoft.com/office/powerpoint/2010/main" val="1024086991"/>
-      </p:ext>
-    </p:extLst>
-  </p:cSld>
-  <p:clrMapOvr>
-    <a:masterClrMapping/>
-  </p:clrMapOvr>
-</p:notes>
-</file>
-
-<file path=ppt/notesSlides/notesSlide14.xml><?xml version="1.0" encoding="utf-8"?>
-<p:notes xmlns:a="http://schemas.openxmlformats.org/drawingml/2006/main" xmlns:r="http://schemas.openxmlformats.org/officeDocument/2006/relationships" xmlns:p="http://schemas.openxmlformats.org/presentationml/2006/main">
-  <p:cSld>
-    <p:spTree>
-      <p:nvGrpSpPr>
-        <p:cNvPr id="1" name=""/>
-        <p:cNvGrpSpPr/>
-        <p:nvPr/>
-      </p:nvGrpSpPr>
-      <p:grpSpPr>
-        <a:xfrm>
-          <a:off x="0" y="0"/>
-          <a:ext cx="0" cy="0"/>
-          <a:chOff x="0" y="0"/>
-          <a:chExt cx="0" cy="0"/>
-        </a:xfrm>
-      </p:grpSpPr>
-      <p:sp>
-        <p:nvSpPr>
-          <p:cNvPr id="2" name="Slide Image Placeholder 1"/>
-          <p:cNvSpPr>
-            <a:spLocks noGrp="1" noRot="1" noChangeAspect="1"/>
-          </p:cNvSpPr>
-          <p:nvPr>
-            <p:ph type="sldImg"/>
-          </p:nvPr>
-        </p:nvSpPr>
-        <p:spPr/>
-      </p:sp>
-      <p:sp>
-        <p:nvSpPr>
-          <p:cNvPr id="3" name="Notes Placeholder 2"/>
-          <p:cNvSpPr>
-            <a:spLocks noGrp="1"/>
-          </p:cNvSpPr>
-          <p:nvPr>
-            <p:ph type="body" idx="1"/>
-          </p:nvPr>
-        </p:nvSpPr>
-        <p:spPr/>
-        <p:txBody>
-          <a:bodyPr/>
-          <a:lstStyle/>
-          <a:p>
-            <a:r>
-              <a:rPr lang="en-US" dirty="0"/>
-              <a:t>Pedir a cada participante una técnica que quiera aplicar en un futuro empleo.</a:t>
-            </a:r>
-            <a:endParaRPr lang="en-US" dirty="0"/>
-          </a:p>
-        </p:txBody>
-      </p:sp>
-      <p:sp>
-        <p:nvSpPr>
-          <p:cNvPr id="4" name="Slide Number Placeholder 3"/>
-          <p:cNvSpPr>
-            <a:spLocks noGrp="1"/>
-          </p:cNvSpPr>
-          <p:nvPr>
-            <p:ph type="sldNum" sz="quarter" idx="10"/>
-          </p:nvPr>
-        </p:nvSpPr>
-        <p:spPr/>
-        <p:txBody>
-          <a:bodyPr/>
-          <a:lstStyle/>
-          <a:p>
-            <a:fld id="{F7021451-1387-4CA6-816F-3879F97B5CBC}" type="slidenum">
-              <a:rPr lang="en-US"/>
-              <a:t>14</a:t>
-            </a:fld>
-            <a:endParaRPr lang="en-US"/>
-          </a:p>
-        </p:txBody>
-      </p:sp>
-    </p:spTree>
-    <p:extLst>
-      <p:ext uri="{BB962C8B-B14F-4D97-AF65-F5344CB8AC3E}">
-        <p14:creationId xmlns:p14="http://schemas.microsoft.com/office/powerpoint/2010/main" val="1024086991"/>
-      </p:ext>
-    </p:extLst>
-  </p:cSld>
-  <p:clrMapOvr>
-    <a:masterClrMapping/>
-  </p:clrMapOvr>
-</p:notes>
-</file>
-
-<file path=ppt/notesSlides/notesSlide15.xml><?xml version="1.0" encoding="utf-8"?>
-<p:notes xmlns:a="http://schemas.openxmlformats.org/drawingml/2006/main" xmlns:r="http://schemas.openxmlformats.org/officeDocument/2006/relationships" xmlns:p="http://schemas.openxmlformats.org/presentationml/2006/main">
-  <p:cSld>
-    <p:spTree>
-      <p:nvGrpSpPr>
-        <p:cNvPr id="1" name=""/>
-        <p:cNvGrpSpPr/>
-        <p:nvPr/>
-      </p:nvGrpSpPr>
-      <p:grpSpPr>
-        <a:xfrm>
-          <a:off x="0" y="0"/>
-          <a:ext cx="0" cy="0"/>
-          <a:chOff x="0" y="0"/>
-          <a:chExt cx="0" cy="0"/>
-        </a:xfrm>
-      </p:grpSpPr>
-      <p:sp>
-        <p:nvSpPr>
-          <p:cNvPr id="2" name="Slide Image Placeholder 1"/>
-          <p:cNvSpPr>
-            <a:spLocks noGrp="1" noRot="1" noChangeAspect="1"/>
-          </p:cNvSpPr>
-          <p:nvPr>
-            <p:ph type="sldImg"/>
-          </p:nvPr>
-        </p:nvSpPr>
-        <p:spPr/>
-      </p:sp>
-      <p:sp>
-        <p:nvSpPr>
-          <p:cNvPr id="3" name="Notes Placeholder 2"/>
-          <p:cNvSpPr>
-            <a:spLocks noGrp="1"/>
-          </p:cNvSpPr>
-          <p:nvPr>
-            <p:ph type="body" idx="1"/>
-          </p:nvPr>
-        </p:nvSpPr>
-        <p:spPr/>
-        <p:txBody>
-          <a:bodyPr/>
-          <a:lstStyle/>
-          <a:p>
-            <a:r>
-              <a:rPr lang="en-US" dirty="0"/>
-              <a:t>Mensaje central para cerrar el taller (sección de orientaciones metodológicas del guion).</a:t>
-            </a:r>
-            <a:endParaRPr lang="en-US" dirty="0"/>
-          </a:p>
-        </p:txBody>
-      </p:sp>
-      <p:sp>
-        <p:nvSpPr>
-          <p:cNvPr id="4" name="Slide Number Placeholder 3"/>
-          <p:cNvSpPr>
-            <a:spLocks noGrp="1"/>
-          </p:cNvSpPr>
-          <p:nvPr>
-            <p:ph type="sldNum" sz="quarter" idx="10"/>
-          </p:nvPr>
-        </p:nvSpPr>
-        <p:spPr/>
-        <p:txBody>
-          <a:bodyPr/>
-          <a:lstStyle/>
-          <a:p>
-            <a:fld id="{F7021451-1387-4CA6-816F-3879F97B5CBC}" type="slidenum">
-              <a:rPr lang="en-US"/>
-              <a:t>15</a:t>
             </a:fld>
             <a:endParaRPr lang="en-US"/>
           </a:p>
@@ -1182,7 +773,6 @@
               <a:rPr lang="en-US" dirty="0"/>
               <a:t>Recorrido del bloque: cada pareja defiende su propuesta ganadora ante el grupo y ante la IA, y después se traslada lo aprendido a la búsqueda de empleo.</a:t>
             </a:r>
-            <a:endParaRPr lang="en-US" dirty="0"/>
           </a:p>
         </p:txBody>
       </p:sp>
@@ -1270,7 +860,6 @@
               <a:rPr lang="en-US" dirty="0"/>
               <a:t>Minutos 240–244. Leer las dos versiones de la misma propuesta y preguntar al grupo cuál aprobaría y por qué.</a:t>
             </a:r>
-            <a:endParaRPr lang="en-US" dirty="0"/>
           </a:p>
         </p:txBody>
       </p:sp>
@@ -1358,7 +947,6 @@
               <a:rPr lang="en-US" dirty="0"/>
               <a:t>La versión A habla de herramientas y hace afirmaciones sin justificar; la B parte del problema, explica la solución y dice cómo se medirá. De ahí sale la estructura de la defensa.</a:t>
             </a:r>
-            <a:endParaRPr lang="en-US" dirty="0"/>
           </a:p>
         </p:txBody>
       </p:sp>
@@ -1446,7 +1034,6 @@
               <a:rPr lang="en-US" dirty="0"/>
               <a:t>Minutos 244–250. Cada pareja prepara y ensaya en voz baja la primera frase de su presentación: el problema en 20 segundos.</a:t>
             </a:r>
-            <a:endParaRPr lang="en-US" dirty="0"/>
           </a:p>
         </p:txBody>
       </p:sp>
@@ -1534,7 +1121,6 @@
               <a:rPr lang="en-US" dirty="0"/>
               <a:t>Minutos 250–275. Con 16 personas organizadas en ocho parejas, reservar alrededor de dos minutos de presentación y uno de preguntas por equipo. Con grupos más numerosos, organizar mesas paralelas de evaluación.</a:t>
             </a:r>
-            <a:endParaRPr lang="en-US" dirty="0"/>
           </a:p>
         </p:txBody>
       </p:sp>
@@ -1622,7 +1208,6 @@
               <a:rPr lang="en-US" dirty="0"/>
               <a:t>Los observadores comentan claridad, originalidad, viabilidad y posibles riesgos, con al menos una propuesta de mejora.</a:t>
             </a:r>
-            <a:endParaRPr lang="en-US" dirty="0"/>
           </a:p>
         </p:txBody>
       </p:sp>
@@ -1710,7 +1295,6 @@
               <a:rPr lang="en-US" dirty="0"/>
               <a:t>Minutos 275–285. El prompt está en el guion para copiarlo. Recordar: sin información sensible en el resumen.</a:t>
             </a:r>
-            <a:endParaRPr lang="en-US" dirty="0"/>
           </a:p>
         </p:txBody>
       </p:sp>
@@ -1798,7 +1382,6 @@
               <a:rPr lang="en-US" dirty="0"/>
               <a:t>Cada equipo explica cuál de las críticas de la IA acepta y qué modificaría. Recordar que una respuesta de IA también puede contener errores.</a:t>
             </a:r>
-            <a:endParaRPr lang="en-US" dirty="0"/>
           </a:p>
         </p:txBody>
       </p:sp>
@@ -1876,6 +1459,7 @@
         <a:solidFill>
           <a:schemeClr val="tx1"/>
         </a:solidFill>
+        <a:effectLst/>
       </p:bgPr>
     </p:bg>
     <p:spTree>
@@ -1895,9 +1479,11 @@
       <p:sp>
         <p:nvSpPr>
           <p:cNvPr id="2" name="Text 0"/>
-          <p:cNvSpPr/>
+          <p:cNvSpPr>
+            <a:spLocks noGrp="1"/>
+          </p:cNvSpPr>
           <p:nvPr>
-            <p:ph idx="100" type="title" hasCustomPrompt="1"/>
+            <p:ph type="title" idx="100" hasCustomPrompt="1"/>
           </p:nvPr>
         </p:nvSpPr>
         <p:spPr>
@@ -1914,7 +1500,7 @@
         <p:txBody>
           <a:bodyPr wrap="square" rtlCol="0"/>
           <a:lstStyle>
-            <a:lvl1pPr algn="l" indent="0" marL="0">
+            <a:lvl1pPr marL="0" indent="0" algn="l">
               <a:buNone/>
               <a:defRPr lang="en-US" sz="4400" b="1" dirty="0">
                 <a:solidFill>
@@ -1924,7 +1510,7 @@
             </a:lvl1pPr>
           </a:lstStyle>
           <a:p>
-            <a:pPr algn="l" indent="0" marL="0">
+            <a:pPr marL="0" indent="0" algn="l">
               <a:buNone/>
             </a:pPr>
             <a:endParaRPr lang="en-US" sz="4400" dirty="0"/>
@@ -1934,9 +1520,11 @@
       <p:sp>
         <p:nvSpPr>
           <p:cNvPr id="3" name="Text 0"/>
-          <p:cNvSpPr/>
+          <p:cNvSpPr>
+            <a:spLocks noGrp="1"/>
+          </p:cNvSpPr>
           <p:nvPr>
-            <p:ph idx="101" type="body" hasCustomPrompt="1"/>
+            <p:ph type="body" idx="101" hasCustomPrompt="1"/>
           </p:nvPr>
         </p:nvSpPr>
         <p:spPr>
@@ -1953,7 +1541,7 @@
         <p:txBody>
           <a:bodyPr wrap="square" rtlCol="0"/>
           <a:lstStyle>
-            <a:lvl1pPr indent="0" marL="0">
+            <a:lvl1pPr marL="0" indent="0">
               <a:buNone/>
               <a:defRPr lang="en-US" sz="2000" dirty="0">
                 <a:solidFill>
@@ -1963,7 +1551,7 @@
             </a:lvl1pPr>
           </a:lstStyle>
           <a:p>
-            <a:pPr indent="0" marL="0">
+            <a:pPr marL="0" indent="0">
               <a:buNone/>
             </a:pPr>
             <a:endParaRPr lang="en-US" sz="2000" dirty="0"/>
@@ -1986,6 +1574,7 @@
         <a:solidFill>
           <a:schemeClr val="tx1"/>
         </a:solidFill>
+        <a:effectLst/>
       </p:bgPr>
     </p:bg>
     <p:spTree>
@@ -2005,9 +1594,11 @@
       <p:sp>
         <p:nvSpPr>
           <p:cNvPr id="2" name="Text 0"/>
-          <p:cNvSpPr/>
+          <p:cNvSpPr>
+            <a:spLocks noGrp="1"/>
+          </p:cNvSpPr>
           <p:nvPr>
-            <p:ph idx="100" type="title" hasCustomPrompt="1"/>
+            <p:ph type="title" idx="100" hasCustomPrompt="1"/>
           </p:nvPr>
         </p:nvSpPr>
         <p:spPr>
@@ -2024,7 +1615,7 @@
         <p:txBody>
           <a:bodyPr wrap="square" rtlCol="0"/>
           <a:lstStyle>
-            <a:lvl1pPr algn="l" indent="0" marL="0">
+            <a:lvl1pPr marL="0" indent="0" algn="l">
               <a:buNone/>
               <a:defRPr lang="en-US" sz="4000" b="1" dirty="0">
                 <a:solidFill>
@@ -2034,7 +1625,7 @@
             </a:lvl1pPr>
           </a:lstStyle>
           <a:p>
-            <a:pPr algn="l" indent="0" marL="0">
+            <a:pPr marL="0" indent="0" algn="l">
               <a:buNone/>
             </a:pPr>
             <a:endParaRPr lang="en-US" sz="4000" dirty="0"/>
@@ -2044,9 +1635,11 @@
       <p:sp>
         <p:nvSpPr>
           <p:cNvPr id="3" name="Text 0"/>
-          <p:cNvSpPr/>
+          <p:cNvSpPr>
+            <a:spLocks noGrp="1"/>
+          </p:cNvSpPr>
           <p:nvPr>
-            <p:ph idx="101" type="body" hasCustomPrompt="1"/>
+            <p:ph type="body" idx="101" hasCustomPrompt="1"/>
           </p:nvPr>
         </p:nvSpPr>
         <p:spPr>
@@ -2063,7 +1656,7 @@
         <p:txBody>
           <a:bodyPr wrap="square" rtlCol="0"/>
           <a:lstStyle>
-            <a:lvl1pPr indent="0" marL="0">
+            <a:lvl1pPr marL="0" indent="0">
               <a:buNone/>
               <a:defRPr lang="en-US" sz="2200" dirty="0">
                 <a:solidFill>
@@ -2073,7 +1666,7 @@
             </a:lvl1pPr>
           </a:lstStyle>
           <a:p>
-            <a:pPr indent="0" marL="0">
+            <a:pPr marL="0" indent="0">
               <a:buNone/>
             </a:pPr>
             <a:endParaRPr lang="en-US" sz="2200" dirty="0"/>
@@ -2096,6 +1689,7 @@
         <a:solidFill>
           <a:schemeClr val="bg1"/>
         </a:solidFill>
+        <a:effectLst/>
       </p:bgPr>
     </p:bg>
     <p:spTree>
@@ -2115,9 +1709,11 @@
       <p:sp>
         <p:nvSpPr>
           <p:cNvPr id="2" name="Text 0"/>
-          <p:cNvSpPr/>
+          <p:cNvSpPr>
+            <a:spLocks noGrp="1"/>
+          </p:cNvSpPr>
           <p:nvPr>
-            <p:ph idx="100" type="title" hasCustomPrompt="1"/>
+            <p:ph type="title" idx="100" hasCustomPrompt="1"/>
           </p:nvPr>
         </p:nvSpPr>
         <p:spPr>
@@ -2134,7 +1730,7 @@
         <p:txBody>
           <a:bodyPr wrap="square" rtlCol="0"/>
           <a:lstStyle>
-            <a:lvl1pPr algn="l" indent="0" marL="0">
+            <a:lvl1pPr marL="0" indent="0" algn="l">
               <a:buNone/>
               <a:defRPr lang="en-US" sz="3200" b="1" dirty="0">
                 <a:solidFill>
@@ -2144,7 +1740,7 @@
             </a:lvl1pPr>
           </a:lstStyle>
           <a:p>
-            <a:pPr algn="l" indent="0" marL="0">
+            <a:pPr marL="0" indent="0" algn="l">
               <a:buNone/>
             </a:pPr>
             <a:endParaRPr lang="en-US" sz="3200" dirty="0"/>
@@ -2172,7 +1768,7 @@
           <a:bodyPr wrap="square" lIns="0" tIns="0" rIns="0" bIns="0" rtlCol="0" anchor="ctr"/>
           <a:lstStyle/>
           <a:p>
-            <a:pPr indent="0" marL="0">
+            <a:pPr marL="0" indent="0">
               <a:buNone/>
             </a:pPr>
             <a:r>
@@ -2207,7 +1803,7 @@
           </a:prstGeom>
           <a:extLst>
             <a:ext uri="{C572A759-6A51-4108-AA02-DFA0A04FC94B}">
-              <ma14:wrappingTextBoxFlag xmlns:ma14="http://schemas.microsoft.com/office/mac/drawingml/2011/main" val="0"/>
+              <ma14:wrappingTextBoxFlag xmlns:ma14="http://schemas.microsoft.com/office/mac/drawingml/2011/main" xmlns="" val="0"/>
             </a:ext>
           </a:extLst>
         </p:spPr>
@@ -2225,8 +1821,8 @@
           <a:p>
             <a:pPr algn="r"/>
             <a:fld id="{F7021451-1387-4CA6-816F-3879F97B5CBC}" type="slidenum">
-              <a:rPr b="0" lang="en-US"/>
-              <a:t>1004</a:t>
+              <a:rPr lang="en-US" b="0"/>
+              <a:t>‹Nº›</a:t>
             </a:fld>
             <a:endParaRPr lang="en-US"/>
           </a:p>
@@ -2248,6 +1844,7 @@
         <a:solidFill>
           <a:schemeClr val="tx1"/>
         </a:solidFill>
+        <a:effectLst/>
       </p:bgPr>
     </p:bg>
     <p:spTree>
@@ -2267,9 +1864,11 @@
       <p:sp>
         <p:nvSpPr>
           <p:cNvPr id="2" name="Text 0"/>
-          <p:cNvSpPr/>
+          <p:cNvSpPr>
+            <a:spLocks noGrp="1"/>
+          </p:cNvSpPr>
           <p:nvPr>
-            <p:ph idx="100" type="body" hasCustomPrompt="1"/>
+            <p:ph type="body" idx="100" hasCustomPrompt="1"/>
           </p:nvPr>
         </p:nvSpPr>
         <p:spPr>
@@ -2286,7 +1885,7 @@
         <p:txBody>
           <a:bodyPr wrap="square" rtlCol="0"/>
           <a:lstStyle>
-            <a:lvl1pPr indent="0" marL="0">
+            <a:lvl1pPr marL="0" indent="0">
               <a:buNone/>
               <a:defRPr lang="en-US" sz="3400" dirty="0">
                 <a:solidFill>
@@ -2296,7 +1895,7 @@
             </a:lvl1pPr>
           </a:lstStyle>
           <a:p>
-            <a:pPr indent="0" marL="0">
+            <a:pPr marL="0" indent="0">
               <a:buNone/>
             </a:pPr>
             <a:endParaRPr lang="en-US" sz="3400" dirty="0"/>
@@ -2324,7 +1923,7 @@
           <a:bodyPr wrap="square" lIns="0" tIns="0" rIns="0" bIns="0" rtlCol="0" anchor="ctr"/>
           <a:lstStyle/>
           <a:p>
-            <a:pPr indent="0" marL="0">
+            <a:pPr marL="0" indent="0">
               <a:buNone/>
             </a:pPr>
             <a:r>
@@ -2359,7 +1958,7 @@
           </a:prstGeom>
           <a:extLst>
             <a:ext uri="{C572A759-6A51-4108-AA02-DFA0A04FC94B}">
-              <ma14:wrappingTextBoxFlag xmlns:ma14="http://schemas.microsoft.com/office/mac/drawingml/2011/main" val="0"/>
+              <ma14:wrappingTextBoxFlag xmlns:ma14="http://schemas.microsoft.com/office/mac/drawingml/2011/main" xmlns="" val="0"/>
             </a:ext>
           </a:extLst>
         </p:spPr>
@@ -2377,8 +1976,8 @@
           <a:p>
             <a:pPr algn="r"/>
             <a:fld id="{F7021451-1387-4CA6-816F-3879F97B5CBC}" type="slidenum">
-              <a:rPr b="0" lang="en-US"/>
-              <a:t>1005</a:t>
+              <a:rPr lang="en-US" b="0"/>
+              <a:t>‹Nº›</a:t>
             </a:fld>
             <a:endParaRPr lang="en-US"/>
           </a:p>
@@ -2395,6 +1994,11 @@
 <file path=ppt/slideMasters/slideMaster1.xml><?xml version="1.0" encoding="utf-8"?>
 <p:sldMaster xmlns:a="http://schemas.openxmlformats.org/drawingml/2006/main" xmlns:r="http://schemas.openxmlformats.org/officeDocument/2006/relationships" xmlns:p="http://schemas.openxmlformats.org/presentationml/2006/main">
   <p:cSld>
+    <p:bg>
+      <p:bgRef idx="1001">
+        <a:schemeClr val="bg1"/>
+      </p:bgRef>
+    </p:bg>
     <p:spTree>
       <p:nvGrpSpPr>
         <p:cNvPr id="1" name=""/>
@@ -2429,7 +2033,7 @@
           </a:prstGeom>
           <a:extLst>
             <a:ext uri="{C572A759-6A51-4108-AA02-DFA0A04FC94B}">
-              <ma14:wrappingTextBoxFlag xmlns:ma14="http://schemas.microsoft.com/office/mac/drawingml/2011/main" val="0"/>
+              <ma14:wrappingTextBoxFlag xmlns:ma14="http://schemas.microsoft.com/office/mac/drawingml/2011/main" xmlns="" val="0"/>
             </a:ext>
           </a:extLst>
         </p:spPr>
@@ -2447,8 +2051,8 @@
           <a:p>
             <a:pPr algn="r"/>
             <a:fld id="{F7021451-1387-4CA6-816F-3879F97B5CBC}" type="slidenum">
-              <a:rPr b="0" lang="en-US"/>
-              <a:t>null</a:t>
+              <a:rPr lang="en-US" b="0"/>
+              <a:t>‹Nº›</a:t>
             </a:fld>
             <a:endParaRPr lang="en-US"/>
           </a:p>
@@ -2756,7 +2360,7 @@
           <a:bodyPr wrap="square" lIns="0" tIns="0" rIns="0" bIns="0" rtlCol="0" anchor="ctr"/>
           <a:lstStyle/>
           <a:p>
-            <a:pPr algn="ctr" indent="0" marL="0">
+            <a:pPr marL="0" indent="0" algn="ctr">
               <a:buNone/>
             </a:pPr>
             <a:r>
@@ -2777,9 +2381,11 @@
       <p:sp>
         <p:nvSpPr>
           <p:cNvPr id="3" name="Text 0"/>
-          <p:cNvSpPr/>
+          <p:cNvSpPr>
+            <a:spLocks noGrp="1"/>
+          </p:cNvSpPr>
           <p:nvPr>
-            <p:ph idx="100" type="title" hasCustomPrompt="1"/>
+            <p:ph type="title" idx="100" hasCustomPrompt="1"/>
           </p:nvPr>
         </p:nvSpPr>
         <p:spPr>
@@ -2797,7 +2403,7 @@
           <a:bodyPr wrap="square" lIns="0" tIns="0" rIns="0" bIns="0" rtlCol="0" anchor="b"/>
           <a:lstStyle/>
           <a:p>
-            <a:pPr algn="l" indent="0" marL="0">
+            <a:pPr marL="0" indent="0" algn="l">
               <a:buNone/>
             </a:pPr>
             <a:r>
@@ -2815,9 +2421,11 @@
       <p:sp>
         <p:nvSpPr>
           <p:cNvPr id="4" name="Text 0"/>
-          <p:cNvSpPr/>
+          <p:cNvSpPr>
+            <a:spLocks noGrp="1"/>
+          </p:cNvSpPr>
           <p:nvPr>
-            <p:ph idx="101" type="body" hasCustomPrompt="1"/>
+            <p:ph type="body" idx="101" hasCustomPrompt="1"/>
           </p:nvPr>
         </p:nvSpPr>
         <p:spPr>
@@ -2835,7 +2443,7 @@
           <a:bodyPr wrap="square" lIns="0" tIns="0" rIns="0" bIns="0" rtlCol="0" anchor="t"/>
           <a:lstStyle/>
           <a:p>
-            <a:pPr indent="0" marL="0">
+            <a:pPr marL="0" indent="0">
               <a:buNone/>
             </a:pPr>
             <a:r>
@@ -2878,9 +2486,11 @@
       <p:sp>
         <p:nvSpPr>
           <p:cNvPr id="2" name="Text 0"/>
-          <p:cNvSpPr/>
+          <p:cNvSpPr>
+            <a:spLocks noGrp="1"/>
+          </p:cNvSpPr>
           <p:nvPr>
-            <p:ph idx="100" type="title" hasCustomPrompt="1"/>
+            <p:ph type="title" idx="100" hasCustomPrompt="1"/>
           </p:nvPr>
         </p:nvSpPr>
         <p:spPr>
@@ -2898,7 +2508,7 @@
           <a:bodyPr wrap="square" lIns="0" tIns="0" rIns="0" bIns="0" rtlCol="0" anchor="ctr"/>
           <a:lstStyle/>
           <a:p>
-            <a:pPr algn="l" indent="0" marL="0">
+            <a:pPr marL="0" indent="0" algn="l">
               <a:buNone/>
             </a:pPr>
             <a:r>
@@ -2956,7 +2566,7 @@
           <a:bodyPr wrap="square" lIns="0" tIns="0" rIns="0" bIns="0" rtlCol="0" anchor="ctr"/>
           <a:lstStyle/>
           <a:p>
-            <a:pPr algn="ctr" indent="0" marL="0">
+            <a:pPr marL="0" indent="0" algn="ctr">
               <a:buNone/>
             </a:pPr>
             <a:r>
@@ -3015,211 +2625,7 @@
       </p:sp>
       <p:pic>
         <p:nvPicPr>
-          <p:cNvPr id="7" name="Image 0" descr="Identificar problemas">    </p:cNvPr>
-          <p:cNvPicPr>
-            <a:picLocks noChangeAspect="1"/>
-          </p:cNvPicPr>
-          <p:nvPr/>
-        </p:nvPicPr>
-        <p:blipFill>
-          <a:blip r:embed="rId1"/>
-          <a:stretch>
-            <a:fillRect/>
-          </a:stretch>
-        </p:blipFill>
-        <p:spPr>
-          <a:xfrm>
-            <a:off x="1239286" y="2251253"/>
-            <a:ext cx="618134" cy="618134"/>
-          </a:xfrm>
-          <a:prstGeom prst="rect">
-            <a:avLst/>
-          </a:prstGeom>
-        </p:spPr>
-      </p:pic>
-      <p:sp>
-        <p:nvSpPr>
-          <p:cNvPr id="8" name="Text 5"/>
-          <p:cNvSpPr txBox="1"/>
-          <p:nvPr/>
-        </p:nvSpPr>
-        <p:spPr>
-          <a:xfrm>
-            <a:off x="685800" y="3337560"/>
-            <a:ext cx="1725107" cy="822960"/>
-          </a:xfrm>
-          <a:prstGeom prst="rect">
-            <a:avLst/>
-          </a:prstGeom>
-          <a:noFill/>
-          <a:ln/>
-        </p:spPr>
-        <p:txBody>
-          <a:bodyPr wrap="square" lIns="0" tIns="0" rIns="0" bIns="0" rtlCol="0" anchor="ctr"/>
-          <a:lstStyle/>
-          <a:p>
-            <a:pPr algn="ctr" indent="0" marL="0">
-              <a:buNone/>
-            </a:pPr>
-            <a:r>
-              <a:rPr lang="en-US" sz="1900" b="1" dirty="0">
-                <a:solidFill>
-                  <a:schemeClr val="tx1"/>
-                </a:solidFill>
-              </a:rPr>
-              <a:t>Identificar problemas</a:t>
-            </a:r>
-            <a:endParaRPr lang="en-US" sz="1900" dirty="0"/>
-          </a:p>
-        </p:txBody>
-      </p:sp>
-      <p:sp>
-        <p:nvSpPr>
-          <p:cNvPr id="9" name="Tarjeta"/>
-          <p:cNvSpPr/>
-          <p:nvPr/>
-        </p:nvSpPr>
-        <p:spPr>
-          <a:xfrm>
-            <a:off x="2822387" y="1645920"/>
-            <a:ext cx="1999427" cy="2743200"/>
-          </a:xfrm>
-          <a:prstGeom prst="roundRect">
-            <a:avLst>
-              <a:gd name="adj" fmla="val 6860"/>
-            </a:avLst>
-          </a:prstGeom>
-          <a:solidFill>
-            <a:schemeClr val="bg2"/>
-          </a:solidFill>
-          <a:ln/>
-        </p:spPr>
-      </p:sp>
-      <p:sp>
-        <p:nvSpPr>
-          <p:cNvPr id="10" name="Análisis"/>
-          <p:cNvSpPr/>
-          <p:nvPr/>
-        </p:nvSpPr>
-        <p:spPr>
-          <a:xfrm>
-            <a:off x="3227741" y="1965960"/>
-            <a:ext cx="1188720" cy="1188720"/>
-          </a:xfrm>
-          <a:prstGeom prst="ellipse">
-            <a:avLst/>
-          </a:prstGeom>
-          <a:solidFill>
-            <a:schemeClr val="accent1"/>
-          </a:solidFill>
-          <a:ln/>
-        </p:spPr>
-      </p:sp>
-      <p:pic>
-        <p:nvPicPr>
-          <p:cNvPr id="11" name="Image 1" descr="Análisis">    </p:cNvPr>
-          <p:cNvPicPr>
-            <a:picLocks noChangeAspect="1"/>
-          </p:cNvPicPr>
-          <p:nvPr/>
-        </p:nvPicPr>
-        <p:blipFill>
-          <a:blip r:embed="rId2"/>
-          <a:stretch>
-            <a:fillRect/>
-          </a:stretch>
-        </p:blipFill>
-        <p:spPr>
-          <a:xfrm>
-            <a:off x="3513033" y="2251253"/>
-            <a:ext cx="618134" cy="618134"/>
-          </a:xfrm>
-          <a:prstGeom prst="rect">
-            <a:avLst/>
-          </a:prstGeom>
-        </p:spPr>
-      </p:pic>
-      <p:sp>
-        <p:nvSpPr>
-          <p:cNvPr id="12" name="Text 8"/>
-          <p:cNvSpPr txBox="1"/>
-          <p:nvPr/>
-        </p:nvSpPr>
-        <p:spPr>
-          <a:xfrm>
-            <a:off x="2959547" y="3337560"/>
-            <a:ext cx="1725107" cy="822960"/>
-          </a:xfrm>
-          <a:prstGeom prst="rect">
-            <a:avLst/>
-          </a:prstGeom>
-          <a:noFill/>
-          <a:ln/>
-        </p:spPr>
-        <p:txBody>
-          <a:bodyPr wrap="square" lIns="0" tIns="0" rIns="0" bIns="0" rtlCol="0" anchor="ctr"/>
-          <a:lstStyle/>
-          <a:p>
-            <a:pPr algn="ctr" indent="0" marL="0">
-              <a:buNone/>
-            </a:pPr>
-            <a:r>
-              <a:rPr lang="en-US" sz="1900" b="1" dirty="0">
-                <a:solidFill>
-                  <a:schemeClr val="tx1"/>
-                </a:solidFill>
-              </a:rPr>
-              <a:t>Análisis</a:t>
-            </a:r>
-            <a:endParaRPr lang="en-US" sz="1900" dirty="0"/>
-          </a:p>
-        </p:txBody>
-      </p:sp>
-      <p:sp>
-        <p:nvSpPr>
-          <p:cNvPr id="13" name="Tarjeta"/>
-          <p:cNvSpPr/>
-          <p:nvPr/>
-        </p:nvSpPr>
-        <p:spPr>
-          <a:xfrm>
-            <a:off x="5096134" y="1645920"/>
-            <a:ext cx="1999427" cy="2743200"/>
-          </a:xfrm>
-          <a:prstGeom prst="roundRect">
-            <a:avLst>
-              <a:gd name="adj" fmla="val 6860"/>
-            </a:avLst>
-          </a:prstGeom>
-          <a:solidFill>
-            <a:schemeClr val="bg2"/>
-          </a:solidFill>
-          <a:ln/>
-        </p:spPr>
-      </p:sp>
-      <p:sp>
-        <p:nvSpPr>
-          <p:cNvPr id="14" name="Creatividad"/>
-          <p:cNvSpPr/>
-          <p:nvPr/>
-        </p:nvSpPr>
-        <p:spPr>
-          <a:xfrm>
-            <a:off x="5501488" y="1965960"/>
-            <a:ext cx="1188720" cy="1188720"/>
-          </a:xfrm>
-          <a:prstGeom prst="ellipse">
-            <a:avLst/>
-          </a:prstGeom>
-          <a:solidFill>
-            <a:schemeClr val="accent1"/>
-          </a:solidFill>
-          <a:ln/>
-        </p:spPr>
-      </p:sp>
-      <p:pic>
-        <p:nvPicPr>
-          <p:cNvPr id="15" name="Image 2" descr="Creatividad">    </p:cNvPr>
+          <p:cNvPr id="7" name="Image 0" descr="Identificar problemas"/>
           <p:cNvPicPr>
             <a:picLocks noChangeAspect="1"/>
           </p:cNvPicPr>
@@ -3233,7 +2639,7 @@
         </p:blipFill>
         <p:spPr>
           <a:xfrm>
-            <a:off x="5786780" y="2251253"/>
+            <a:off x="1239286" y="2251253"/>
             <a:ext cx="618134" cy="618134"/>
           </a:xfrm>
           <a:prstGeom prst="rect">
@@ -3243,13 +2649,13 @@
       </p:pic>
       <p:sp>
         <p:nvSpPr>
-          <p:cNvPr id="16" name="Text 11"/>
+          <p:cNvPr id="8" name="Text 5"/>
           <p:cNvSpPr txBox="1"/>
           <p:nvPr/>
         </p:nvSpPr>
         <p:spPr>
           <a:xfrm>
-            <a:off x="5233294" y="3337560"/>
+            <a:off x="685800" y="3337560"/>
             <a:ext cx="1725107" cy="822960"/>
           </a:xfrm>
           <a:prstGeom prst="rect">
@@ -3262,7 +2668,7 @@
           <a:bodyPr wrap="square" lIns="0" tIns="0" rIns="0" bIns="0" rtlCol="0" anchor="ctr"/>
           <a:lstStyle/>
           <a:p>
-            <a:pPr algn="ctr" indent="0" marL="0">
+            <a:pPr marL="0" indent="0" algn="ctr">
               <a:buNone/>
             </a:pPr>
             <a:r>
@@ -3271,7 +2677,7 @@
                   <a:schemeClr val="tx1"/>
                 </a:solidFill>
               </a:rPr>
-              <a:t>Creatividad</a:t>
+              <a:t>Identificar problemas</a:t>
             </a:r>
             <a:endParaRPr lang="en-US" sz="1900" dirty="0"/>
           </a:p>
@@ -3279,13 +2685,13 @@
       </p:sp>
       <p:sp>
         <p:nvSpPr>
-          <p:cNvPr id="17" name="Tarjeta"/>
+          <p:cNvPr id="9" name="Tarjeta"/>
           <p:cNvSpPr/>
           <p:nvPr/>
         </p:nvSpPr>
         <p:spPr>
           <a:xfrm>
-            <a:off x="7369881" y="1645920"/>
+            <a:off x="2822387" y="1645920"/>
             <a:ext cx="1999427" cy="2743200"/>
           </a:xfrm>
           <a:prstGeom prst="roundRect">
@@ -3301,13 +2707,13 @@
       </p:sp>
       <p:sp>
         <p:nvSpPr>
-          <p:cNvPr id="18" name="Dominio digital"/>
+          <p:cNvPr id="10" name="Análisis"/>
           <p:cNvSpPr/>
           <p:nvPr/>
         </p:nvSpPr>
         <p:spPr>
           <a:xfrm>
-            <a:off x="7775235" y="1965960"/>
+            <a:off x="3227741" y="1965960"/>
             <a:ext cx="1188720" cy="1188720"/>
           </a:xfrm>
           <a:prstGeom prst="ellipse">
@@ -3321,7 +2727,7 @@
       </p:sp>
       <p:pic>
         <p:nvPicPr>
-          <p:cNvPr id="19" name="Image 3" descr="Dominio digital">    </p:cNvPr>
+          <p:cNvPr id="11" name="Image 1" descr="Análisis"/>
           <p:cNvPicPr>
             <a:picLocks noChangeAspect="1"/>
           </p:cNvPicPr>
@@ -3335,7 +2741,7 @@
         </p:blipFill>
         <p:spPr>
           <a:xfrm>
-            <a:off x="8060527" y="2251253"/>
+            <a:off x="3513033" y="2251253"/>
             <a:ext cx="618134" cy="618134"/>
           </a:xfrm>
           <a:prstGeom prst="rect">
@@ -3345,13 +2751,13 @@
       </p:pic>
       <p:sp>
         <p:nvSpPr>
-          <p:cNvPr id="20" name="Text 14"/>
+          <p:cNvPr id="12" name="Text 8"/>
           <p:cNvSpPr txBox="1"/>
           <p:nvPr/>
         </p:nvSpPr>
         <p:spPr>
           <a:xfrm>
-            <a:off x="7507041" y="3337560"/>
+            <a:off x="2959547" y="3337560"/>
             <a:ext cx="1725107" cy="822960"/>
           </a:xfrm>
           <a:prstGeom prst="rect">
@@ -3364,7 +2770,7 @@
           <a:bodyPr wrap="square" lIns="0" tIns="0" rIns="0" bIns="0" rtlCol="0" anchor="ctr"/>
           <a:lstStyle/>
           <a:p>
-            <a:pPr algn="ctr" indent="0" marL="0">
+            <a:pPr marL="0" indent="0" algn="ctr">
               <a:buNone/>
             </a:pPr>
             <a:r>
@@ -3373,7 +2779,7 @@
                   <a:schemeClr val="tx1"/>
                 </a:solidFill>
               </a:rPr>
-              <a:t>Dominio digital</a:t>
+              <a:t>Análisis</a:t>
             </a:r>
             <a:endParaRPr lang="en-US" sz="1900" dirty="0"/>
           </a:p>
@@ -3381,13 +2787,13 @@
       </p:sp>
       <p:sp>
         <p:nvSpPr>
-          <p:cNvPr id="21" name="Tarjeta"/>
+          <p:cNvPr id="13" name="Tarjeta"/>
           <p:cNvSpPr/>
           <p:nvPr/>
         </p:nvSpPr>
         <p:spPr>
           <a:xfrm>
-            <a:off x="9643628" y="1645920"/>
+            <a:off x="5096134" y="1645920"/>
             <a:ext cx="1999427" cy="2743200"/>
           </a:xfrm>
           <a:prstGeom prst="roundRect">
@@ -3403,13 +2809,13 @@
       </p:sp>
       <p:sp>
         <p:nvSpPr>
-          <p:cNvPr id="22" name="Comunicación"/>
+          <p:cNvPr id="14" name="Creatividad"/>
           <p:cNvSpPr/>
           <p:nvPr/>
         </p:nvSpPr>
         <p:spPr>
           <a:xfrm>
-            <a:off x="10048982" y="1965960"/>
+            <a:off x="5501488" y="1965960"/>
             <a:ext cx="1188720" cy="1188720"/>
           </a:xfrm>
           <a:prstGeom prst="ellipse">
@@ -3423,7 +2829,7 @@
       </p:sp>
       <p:pic>
         <p:nvPicPr>
-          <p:cNvPr id="23" name="Image 4" descr="Comunicación">    </p:cNvPr>
+          <p:cNvPr id="15" name="Image 2" descr="Creatividad"/>
           <p:cNvPicPr>
             <a:picLocks noChangeAspect="1"/>
           </p:cNvPicPr>
@@ -3437,6 +2843,210 @@
         </p:blipFill>
         <p:spPr>
           <a:xfrm>
+            <a:off x="5786780" y="2251253"/>
+            <a:ext cx="618134" cy="618134"/>
+          </a:xfrm>
+          <a:prstGeom prst="rect">
+            <a:avLst/>
+          </a:prstGeom>
+        </p:spPr>
+      </p:pic>
+      <p:sp>
+        <p:nvSpPr>
+          <p:cNvPr id="16" name="Text 11"/>
+          <p:cNvSpPr txBox="1"/>
+          <p:nvPr/>
+        </p:nvSpPr>
+        <p:spPr>
+          <a:xfrm>
+            <a:off x="5233294" y="3337560"/>
+            <a:ext cx="1725107" cy="822960"/>
+          </a:xfrm>
+          <a:prstGeom prst="rect">
+            <a:avLst/>
+          </a:prstGeom>
+          <a:noFill/>
+          <a:ln/>
+        </p:spPr>
+        <p:txBody>
+          <a:bodyPr wrap="square" lIns="0" tIns="0" rIns="0" bIns="0" rtlCol="0" anchor="ctr"/>
+          <a:lstStyle/>
+          <a:p>
+            <a:pPr marL="0" indent="0" algn="ctr">
+              <a:buNone/>
+            </a:pPr>
+            <a:r>
+              <a:rPr lang="en-US" sz="1900" b="1" dirty="0">
+                <a:solidFill>
+                  <a:schemeClr val="tx1"/>
+                </a:solidFill>
+              </a:rPr>
+              <a:t>Creatividad</a:t>
+            </a:r>
+            <a:endParaRPr lang="en-US" sz="1900" dirty="0"/>
+          </a:p>
+        </p:txBody>
+      </p:sp>
+      <p:sp>
+        <p:nvSpPr>
+          <p:cNvPr id="17" name="Tarjeta"/>
+          <p:cNvSpPr/>
+          <p:nvPr/>
+        </p:nvSpPr>
+        <p:spPr>
+          <a:xfrm>
+            <a:off x="7369881" y="1645920"/>
+            <a:ext cx="1999427" cy="2743200"/>
+          </a:xfrm>
+          <a:prstGeom prst="roundRect">
+            <a:avLst>
+              <a:gd name="adj" fmla="val 6860"/>
+            </a:avLst>
+          </a:prstGeom>
+          <a:solidFill>
+            <a:schemeClr val="bg2"/>
+          </a:solidFill>
+          <a:ln/>
+        </p:spPr>
+      </p:sp>
+      <p:sp>
+        <p:nvSpPr>
+          <p:cNvPr id="18" name="Dominio digital"/>
+          <p:cNvSpPr/>
+          <p:nvPr/>
+        </p:nvSpPr>
+        <p:spPr>
+          <a:xfrm>
+            <a:off x="7775235" y="1965960"/>
+            <a:ext cx="1188720" cy="1188720"/>
+          </a:xfrm>
+          <a:prstGeom prst="ellipse">
+            <a:avLst/>
+          </a:prstGeom>
+          <a:solidFill>
+            <a:schemeClr val="accent1"/>
+          </a:solidFill>
+          <a:ln/>
+        </p:spPr>
+      </p:sp>
+      <p:pic>
+        <p:nvPicPr>
+          <p:cNvPr id="19" name="Image 3" descr="Dominio digital"/>
+          <p:cNvPicPr>
+            <a:picLocks noChangeAspect="1"/>
+          </p:cNvPicPr>
+          <p:nvPr/>
+        </p:nvPicPr>
+        <p:blipFill>
+          <a:blip r:embed="rId6"/>
+          <a:stretch>
+            <a:fillRect/>
+          </a:stretch>
+        </p:blipFill>
+        <p:spPr>
+          <a:xfrm>
+            <a:off x="8060527" y="2251253"/>
+            <a:ext cx="618134" cy="618134"/>
+          </a:xfrm>
+          <a:prstGeom prst="rect">
+            <a:avLst/>
+          </a:prstGeom>
+        </p:spPr>
+      </p:pic>
+      <p:sp>
+        <p:nvSpPr>
+          <p:cNvPr id="20" name="Text 14"/>
+          <p:cNvSpPr txBox="1"/>
+          <p:nvPr/>
+        </p:nvSpPr>
+        <p:spPr>
+          <a:xfrm>
+            <a:off x="7507041" y="3337560"/>
+            <a:ext cx="1725107" cy="822960"/>
+          </a:xfrm>
+          <a:prstGeom prst="rect">
+            <a:avLst/>
+          </a:prstGeom>
+          <a:noFill/>
+          <a:ln/>
+        </p:spPr>
+        <p:txBody>
+          <a:bodyPr wrap="square" lIns="0" tIns="0" rIns="0" bIns="0" rtlCol="0" anchor="ctr"/>
+          <a:lstStyle/>
+          <a:p>
+            <a:pPr marL="0" indent="0" algn="ctr">
+              <a:buNone/>
+            </a:pPr>
+            <a:r>
+              <a:rPr lang="en-US" sz="1900" b="1" dirty="0">
+                <a:solidFill>
+                  <a:schemeClr val="tx1"/>
+                </a:solidFill>
+              </a:rPr>
+              <a:t>Dominio digital</a:t>
+            </a:r>
+            <a:endParaRPr lang="en-US" sz="1900" dirty="0"/>
+          </a:p>
+        </p:txBody>
+      </p:sp>
+      <p:sp>
+        <p:nvSpPr>
+          <p:cNvPr id="21" name="Tarjeta"/>
+          <p:cNvSpPr/>
+          <p:nvPr/>
+        </p:nvSpPr>
+        <p:spPr>
+          <a:xfrm>
+            <a:off x="9643628" y="1645920"/>
+            <a:ext cx="1999427" cy="2743200"/>
+          </a:xfrm>
+          <a:prstGeom prst="roundRect">
+            <a:avLst>
+              <a:gd name="adj" fmla="val 6860"/>
+            </a:avLst>
+          </a:prstGeom>
+          <a:solidFill>
+            <a:schemeClr val="bg2"/>
+          </a:solidFill>
+          <a:ln/>
+        </p:spPr>
+      </p:sp>
+      <p:sp>
+        <p:nvSpPr>
+          <p:cNvPr id="22" name="Comunicación"/>
+          <p:cNvSpPr/>
+          <p:nvPr/>
+        </p:nvSpPr>
+        <p:spPr>
+          <a:xfrm>
+            <a:off x="10048982" y="1965960"/>
+            <a:ext cx="1188720" cy="1188720"/>
+          </a:xfrm>
+          <a:prstGeom prst="ellipse">
+            <a:avLst/>
+          </a:prstGeom>
+          <a:solidFill>
+            <a:schemeClr val="accent1"/>
+          </a:solidFill>
+          <a:ln/>
+        </p:spPr>
+      </p:sp>
+      <p:pic>
+        <p:nvPicPr>
+          <p:cNvPr id="23" name="Image 4" descr="Comunicación"/>
+          <p:cNvPicPr>
+            <a:picLocks noChangeAspect="1"/>
+          </p:cNvPicPr>
+          <p:nvPr/>
+        </p:nvPicPr>
+        <p:blipFill>
+          <a:blip r:embed="rId7"/>
+          <a:stretch>
+            <a:fillRect/>
+          </a:stretch>
+        </p:blipFill>
+        <p:spPr>
+          <a:xfrm>
             <a:off x="10334274" y="2251253"/>
             <a:ext cx="618134" cy="618134"/>
           </a:xfrm>
@@ -3466,7 +3076,7 @@
           <a:bodyPr wrap="square" lIns="0" tIns="0" rIns="0" bIns="0" rtlCol="0" anchor="ctr"/>
           <a:lstStyle/>
           <a:p>
-            <a:pPr algn="ctr" indent="0" marL="0">
+            <a:pPr marL="0" indent="0" algn="ctr">
               <a:buNone/>
             </a:pPr>
             <a:r>
@@ -3502,7 +3112,7 @@
           <a:bodyPr wrap="square" lIns="0" tIns="0" rIns="0" bIns="0" rtlCol="0" anchor="ctr"/>
           <a:lstStyle/>
           <a:p>
-            <a:pPr indent="0" marL="0">
+            <a:pPr marL="0" indent="0">
               <a:buNone/>
             </a:pPr>
             <a:r>
@@ -3511,7 +3121,103 @@
                   <a:schemeClr val="tx2"/>
                 </a:solidFill>
               </a:rPr>
-              <a:t>Competencias que podéis contar en una entrevista de trabajo.</a:t>
+              <a:t>Competencias que </a:t>
+            </a:r>
+            <a:r>
+              <a:rPr lang="en-US" sz="2100" b="1" dirty="0" err="1">
+                <a:solidFill>
+                  <a:schemeClr val="tx2"/>
+                </a:solidFill>
+              </a:rPr>
+              <a:t>podéis</a:t>
+            </a:r>
+            <a:r>
+              <a:rPr lang="en-US" sz="2100" b="1" dirty="0">
+                <a:solidFill>
+                  <a:schemeClr val="tx2"/>
+                </a:solidFill>
+              </a:rPr>
+              <a:t> </a:t>
+            </a:r>
+            <a:r>
+              <a:rPr lang="en-US" sz="2100" b="1" dirty="0" err="1">
+                <a:solidFill>
+                  <a:schemeClr val="tx2"/>
+                </a:solidFill>
+              </a:rPr>
+              <a:t>aplicar</a:t>
+            </a:r>
+            <a:r>
+              <a:rPr lang="en-US" sz="2100" b="1" dirty="0">
+                <a:solidFill>
+                  <a:schemeClr val="tx2"/>
+                </a:solidFill>
+              </a:rPr>
+              <a:t> </a:t>
+            </a:r>
+            <a:r>
+              <a:rPr lang="en-US" sz="2100" b="1" dirty="0" err="1">
+                <a:solidFill>
+                  <a:schemeClr val="tx2"/>
+                </a:solidFill>
+              </a:rPr>
+              <a:t>en</a:t>
+            </a:r>
+            <a:r>
+              <a:rPr lang="en-US" sz="2100" b="1" dirty="0">
+                <a:solidFill>
+                  <a:schemeClr val="tx2"/>
+                </a:solidFill>
+              </a:rPr>
+              <a:t> el día a día o </a:t>
+            </a:r>
+            <a:r>
+              <a:rPr lang="en-US" sz="2100" b="1" dirty="0" err="1">
+                <a:solidFill>
+                  <a:schemeClr val="tx2"/>
+                </a:solidFill>
+              </a:rPr>
+              <a:t>en</a:t>
+            </a:r>
+            <a:r>
+              <a:rPr lang="en-US" sz="2100" b="1" dirty="0">
+                <a:solidFill>
+                  <a:schemeClr val="tx2"/>
+                </a:solidFill>
+              </a:rPr>
+              <a:t> </a:t>
+            </a:r>
+            <a:r>
+              <a:rPr lang="en-US" sz="2100" b="1" dirty="0" err="1">
+                <a:solidFill>
+                  <a:schemeClr val="tx2"/>
+                </a:solidFill>
+              </a:rPr>
+              <a:t>futuros</a:t>
+            </a:r>
+            <a:r>
+              <a:rPr lang="en-US" sz="2100" b="1" dirty="0">
+                <a:solidFill>
+                  <a:schemeClr val="tx2"/>
+                </a:solidFill>
+              </a:rPr>
+              <a:t> </a:t>
+            </a:r>
+            <a:r>
+              <a:rPr lang="en-US" sz="2100" b="1" dirty="0" err="1">
+                <a:solidFill>
+                  <a:schemeClr val="tx2"/>
+                </a:solidFill>
+              </a:rPr>
+              <a:t>trabajos</a:t>
+            </a:r>
+            <a:r>
+              <a:rPr lang="en-US" sz="2100" b="1" dirty="0">
+                <a:solidFill>
+                  <a:schemeClr val="tx2"/>
+                </a:solidFill>
+              </a:rPr>
+              <a:t>.</a:t>
             </a:r>
             <a:endParaRPr lang="en-US" sz="2100" dirty="0"/>
           </a:p>
@@ -3519,7 +3225,7 @@
       </p:sp>
       <p:sp>
         <p:nvSpPr>
-          <p:cNvPr id="25" name="Slide Number Placeholder 0"/>
+          <p:cNvPr id="26" name="Slide Number Placeholder 0"/>
           <p:cNvSpPr>
             <a:spLocks noGrp="1"/>
           </p:cNvSpPr>
@@ -3537,7 +3243,7 @@
           </a:prstGeom>
           <a:extLst>
             <a:ext uri="{C572A759-6A51-4108-AA02-DFA0A04FC94B}">
-              <ma14:wrappingTextBoxFlag xmlns:ma14="http://schemas.microsoft.com/office/mac/drawingml/2011/main" val="0"/>
+              <ma14:wrappingTextBoxFlag xmlns:ma14="http://schemas.microsoft.com/office/mac/drawingml/2011/main" xmlns="" val="0"/>
             </a:ext>
           </a:extLst>
         </p:spPr>
@@ -3555,7 +3261,7 @@
           <a:p>
             <a:pPr algn="r"/>
             <a:fld id="{F7021451-1387-4CA6-816F-3879F97B5CBC}" type="slidenum">
-              <a:rPr b="0" lang="en-US"/>
+              <a:rPr lang="en-US" b="0"/>
               <a:t>10</a:t>
             </a:fld>
             <a:endParaRPr lang="en-US"/>
@@ -3571,892 +3277,6 @@
 </file>
 
 <file path=ppt/slides/slide11.xml><?xml version="1.0" encoding="utf-8"?>
-<p:sld xmlns:a="http://schemas.openxmlformats.org/drawingml/2006/main" xmlns:r="http://schemas.openxmlformats.org/officeDocument/2006/relationships" xmlns:p="http://schemas.openxmlformats.org/presentationml/2006/main">
-  <p:cSld name="Slide 11">
-    <p:spTree>
-      <p:nvGrpSpPr>
-        <p:cNvPr id="1" name=""/>
-        <p:cNvGrpSpPr/>
-        <p:nvPr/>
-      </p:nvGrpSpPr>
-      <p:grpSpPr>
-        <a:xfrm>
-          <a:off x="0" y="0"/>
-          <a:ext cx="0" cy="0"/>
-          <a:chOff x="0" y="0"/>
-          <a:chExt cx="0" cy="0"/>
-        </a:xfrm>
-      </p:grpSpPr>
-      <p:sp>
-        <p:nvSpPr>
-          <p:cNvPr id="2" name="Text 0"/>
-          <p:cNvSpPr/>
-          <p:nvPr>
-            <p:ph idx="100" type="title" hasCustomPrompt="1"/>
-          </p:nvPr>
-        </p:nvSpPr>
-        <p:spPr>
-          <a:xfrm>
-            <a:off x="548640" y="411480"/>
-            <a:ext cx="11094415" cy="777240"/>
-          </a:xfrm>
-          <a:prstGeom prst="rect">
-            <a:avLst/>
-          </a:prstGeom>
-          <a:noFill/>
-          <a:ln/>
-        </p:spPr>
-        <p:txBody>
-          <a:bodyPr wrap="square" lIns="0" tIns="0" rIns="0" bIns="0" rtlCol="0" anchor="ctr"/>
-          <a:lstStyle/>
-          <a:p>
-            <a:pPr algn="l" indent="0" marL="0">
-              <a:buNone/>
-            </a:pPr>
-            <a:r>
-              <a:rPr lang="en-US" sz="3200" b="1" dirty="0">
-                <a:solidFill>
-                  <a:schemeClr val="tx1"/>
-                </a:solidFill>
-              </a:rPr>
-              <a:t>Cómo contarlo en una entrevista</a:t>
-            </a:r>
-            <a:endParaRPr lang="en-US" sz="3200" dirty="0"/>
-          </a:p>
-        </p:txBody>
-      </p:sp>
-      <p:sp>
-        <p:nvSpPr>
-          <p:cNvPr id="3" name="Etiqueta de tiempo"/>
-          <p:cNvSpPr/>
-          <p:nvPr/>
-        </p:nvSpPr>
-        <p:spPr>
-          <a:xfrm>
-            <a:off x="9923983" y="548640"/>
-            <a:ext cx="1719072" cy="457200"/>
-          </a:xfrm>
-          <a:prstGeom prst="roundRect">
-            <a:avLst>
-              <a:gd name="adj" fmla="val 50000"/>
-            </a:avLst>
-          </a:prstGeom>
-          <a:solidFill>
-            <a:schemeClr val="bg2"/>
-          </a:solidFill>
-          <a:ln/>
-        </p:spPr>
-      </p:sp>
-      <p:sp>
-        <p:nvSpPr>
-          <p:cNvPr id="4" name="Text 2"/>
-          <p:cNvSpPr txBox="1"/>
-          <p:nvPr/>
-        </p:nvSpPr>
-        <p:spPr>
-          <a:xfrm>
-            <a:off x="9923983" y="548640"/>
-            <a:ext cx="1719072" cy="457200"/>
-          </a:xfrm>
-          <a:prstGeom prst="rect">
-            <a:avLst/>
-          </a:prstGeom>
-          <a:noFill/>
-          <a:ln/>
-        </p:spPr>
-        <p:txBody>
-          <a:bodyPr wrap="square" lIns="0" tIns="0" rIns="0" bIns="0" rtlCol="0" anchor="ctr"/>
-          <a:lstStyle/>
-          <a:p>
-            <a:pPr algn="ctr" indent="0" marL="0">
-              <a:buNone/>
-            </a:pPr>
-            <a:r>
-              <a:rPr lang="en-US" sz="1400" b="1" dirty="0">
-                <a:solidFill>
-                  <a:schemeClr val="tx1"/>
-                </a:solidFill>
-              </a:rPr>
-              <a:t>Min. 285–295</a:t>
-            </a:r>
-            <a:endParaRPr lang="en-US" sz="1400" dirty="0"/>
-          </a:p>
-        </p:txBody>
-      </p:sp>
-      <p:sp>
-        <p:nvSpPr>
-          <p:cNvPr id="5" name="Ejemplo"/>
-          <p:cNvSpPr/>
-          <p:nvPr/>
-        </p:nvSpPr>
-        <p:spPr>
-          <a:xfrm>
-            <a:off x="548640" y="1463040"/>
-            <a:ext cx="11094415" cy="2377440"/>
-          </a:xfrm>
-          <a:prstGeom prst="roundRect">
-            <a:avLst>
-              <a:gd name="adj" fmla="val 5769"/>
-            </a:avLst>
-          </a:prstGeom>
-          <a:solidFill>
-            <a:schemeClr val="tx1"/>
-          </a:solidFill>
-          <a:ln/>
-        </p:spPr>
-      </p:sp>
-      <p:sp>
-        <p:nvSpPr>
-          <p:cNvPr id="6" name="Ejemplo"/>
-          <p:cNvSpPr/>
-          <p:nvPr/>
-        </p:nvSpPr>
-        <p:spPr>
-          <a:xfrm>
-            <a:off x="868680" y="1691640"/>
-            <a:ext cx="731520" cy="731520"/>
-          </a:xfrm>
-          <a:prstGeom prst="ellipse">
-            <a:avLst/>
-          </a:prstGeom>
-          <a:solidFill>
-            <a:schemeClr val="accent1"/>
-          </a:solidFill>
-          <a:ln/>
-        </p:spPr>
-      </p:sp>
-      <p:pic>
-        <p:nvPicPr>
-          <p:cNvPr id="7" name="Image 0" descr="Ejemplo">    </p:cNvPr>
-          <p:cNvPicPr>
-            <a:picLocks noChangeAspect="1"/>
-          </p:cNvPicPr>
-          <p:nvPr/>
-        </p:nvPicPr>
-        <p:blipFill>
-          <a:blip r:embed="rId1"/>
-          <a:stretch>
-            <a:fillRect/>
-          </a:stretch>
-        </p:blipFill>
-        <p:spPr>
-          <a:xfrm>
-            <a:off x="1044245" y="1867205"/>
-            <a:ext cx="380390" cy="380390"/>
-          </a:xfrm>
-          <a:prstGeom prst="rect">
-            <a:avLst/>
-          </a:prstGeom>
-        </p:spPr>
-      </p:pic>
-      <p:sp>
-        <p:nvSpPr>
-          <p:cNvPr id="8" name="Text 5"/>
-          <p:cNvSpPr txBox="1"/>
-          <p:nvPr/>
-        </p:nvSpPr>
-        <p:spPr>
-          <a:xfrm>
-            <a:off x="1828800" y="1691640"/>
-            <a:ext cx="5486400" cy="731520"/>
-          </a:xfrm>
-          <a:prstGeom prst="rect">
-            <a:avLst/>
-          </a:prstGeom>
-          <a:noFill/>
-          <a:ln/>
-        </p:spPr>
-        <p:txBody>
-          <a:bodyPr wrap="square" lIns="0" tIns="0" rIns="0" bIns="0" rtlCol="0" anchor="ctr"/>
-          <a:lstStyle/>
-          <a:p>
-            <a:pPr indent="0" marL="0">
-              <a:buNone/>
-            </a:pPr>
-            <a:r>
-              <a:rPr lang="en-US" sz="1800" b="1" dirty="0">
-                <a:solidFill>
-                  <a:schemeClr val="accent1"/>
-                </a:solidFill>
-              </a:rPr>
-              <a:t>Ejemplo de relato</a:t>
-            </a:r>
-            <a:endParaRPr lang="en-US" sz="1800" dirty="0"/>
-          </a:p>
-        </p:txBody>
-      </p:sp>
-      <p:sp>
-        <p:nvSpPr>
-          <p:cNvPr id="9" name="Text 6"/>
-          <p:cNvSpPr txBox="1"/>
-          <p:nvPr/>
-        </p:nvSpPr>
-        <p:spPr>
-          <a:xfrm>
-            <a:off x="868680" y="2514600"/>
-            <a:ext cx="10454335" cy="1234440"/>
-          </a:xfrm>
-          <a:prstGeom prst="rect">
-            <a:avLst/>
-          </a:prstGeom>
-          <a:noFill/>
-          <a:ln/>
-        </p:spPr>
-        <p:txBody>
-          <a:bodyPr wrap="square" lIns="0" tIns="0" rIns="0" bIns="0" rtlCol="0" anchor="t"/>
-          <a:lstStyle/>
-          <a:p>
-            <a:pPr indent="0" marL="0">
-              <a:buNone/>
-            </a:pPr>
-            <a:r>
-              <a:rPr lang="en-US" sz="1900" i="1" dirty="0">
-                <a:solidFill>
-                  <a:schemeClr val="bg1"/>
-                </a:solidFill>
-              </a:rPr>
-              <a:t>«En una actividad de innovación digital analicé un proceso administrativo, utilicé técnicas creativas e inteligencia artificial para generar alternativas y elaboré una matriz en Excel para evaluarlas. Después documenté una solución y preparé una presentación para defenderla».</a:t>
-            </a:r>
-            <a:endParaRPr lang="en-US" sz="1900" dirty="0"/>
-          </a:p>
-        </p:txBody>
-      </p:sp>
-      <p:sp>
-        <p:nvSpPr>
-          <p:cNvPr id="10" name="Tarjeta"/>
-          <p:cNvSpPr/>
-          <p:nvPr/>
-        </p:nvSpPr>
-        <p:spPr>
-          <a:xfrm>
-            <a:off x="548640" y="4160520"/>
-            <a:ext cx="11094415" cy="1280160"/>
-          </a:xfrm>
-          <a:prstGeom prst="roundRect">
-            <a:avLst>
-              <a:gd name="adj" fmla="val 10714"/>
-            </a:avLst>
-          </a:prstGeom>
-          <a:solidFill>
-            <a:schemeClr val="bg2"/>
-          </a:solidFill>
-          <a:ln/>
-        </p:spPr>
-      </p:sp>
-      <p:sp>
-        <p:nvSpPr>
-          <p:cNvPr id="11" name="Aviso"/>
-          <p:cNvSpPr/>
-          <p:nvPr/>
-        </p:nvSpPr>
-        <p:spPr>
-          <a:xfrm>
-            <a:off x="868680" y="4389120"/>
-            <a:ext cx="822960" cy="822960"/>
-          </a:xfrm>
-          <a:prstGeom prst="ellipse">
-            <a:avLst/>
-          </a:prstGeom>
-          <a:solidFill>
-            <a:schemeClr val="accent3"/>
-          </a:solidFill>
-          <a:ln/>
-        </p:spPr>
-      </p:sp>
-      <p:pic>
-        <p:nvPicPr>
-          <p:cNvPr id="12" name="Image 1" descr="Aviso">    </p:cNvPr>
-          <p:cNvPicPr>
-            <a:picLocks noChangeAspect="1"/>
-          </p:cNvPicPr>
-          <p:nvPr/>
-        </p:nvPicPr>
-        <p:blipFill>
-          <a:blip r:embed="rId2"/>
-          <a:stretch>
-            <a:fillRect/>
-          </a:stretch>
-        </p:blipFill>
-        <p:spPr>
-          <a:xfrm>
-            <a:off x="1066190" y="4586630"/>
-            <a:ext cx="427939" cy="427939"/>
-          </a:xfrm>
-          <a:prstGeom prst="rect">
-            <a:avLst/>
-          </a:prstGeom>
-        </p:spPr>
-      </p:pic>
-      <p:sp>
-        <p:nvSpPr>
-          <p:cNvPr id="13" name="Text 9"/>
-          <p:cNvSpPr txBox="1"/>
-          <p:nvPr/>
-        </p:nvSpPr>
-        <p:spPr>
-          <a:xfrm>
-            <a:off x="1965960" y="4160520"/>
-            <a:ext cx="9402775" cy="1280160"/>
-          </a:xfrm>
-          <a:prstGeom prst="rect">
-            <a:avLst/>
-          </a:prstGeom>
-          <a:noFill/>
-          <a:ln/>
-        </p:spPr>
-        <p:txBody>
-          <a:bodyPr wrap="square" lIns="0" tIns="0" rIns="0" bIns="0" rtlCol="0" anchor="ctr"/>
-          <a:lstStyle/>
-          <a:p>
-            <a:pPr indent="0" marL="0">
-              <a:buNone/>
-            </a:pPr>
-            <a:r>
-              <a:rPr lang="en-US" sz="2100" b="1" dirty="0">
-                <a:solidFill>
-                  <a:schemeClr val="tx1"/>
-                </a:solidFill>
-              </a:rPr>
-              <a:t>Siempre como simulación formativa, </a:t>
-            </a:r>
-            <a:pPr indent="0" marL="0">
-              <a:buNone/>
-            </a:pPr>
-            <a:r>
-              <a:rPr lang="en-US" sz="2100" dirty="0">
-                <a:solidFill>
-                  <a:schemeClr val="tx1"/>
-                </a:solidFill>
-              </a:rPr>
-              <a:t>no como una mejora implantada de verdad en una empresa.</a:t>
-            </a:r>
-            <a:endParaRPr lang="en-US" sz="2100" dirty="0"/>
-          </a:p>
-        </p:txBody>
-      </p:sp>
-      <p:sp>
-        <p:nvSpPr>
-          <p:cNvPr id="25" name="Slide Number Placeholder 0"/>
-          <p:cNvSpPr>
-            <a:spLocks noGrp="1"/>
-          </p:cNvSpPr>
-          <p:nvPr>
-            <p:ph type="sldNum" sz="quarter" idx="4294967295"/>
-          </p:nvPr>
-        </p:nvSpPr>
-        <p:spPr>
-          <a:xfrm>
-            <a:off x="11091672" y="6355080"/>
-            <a:ext cx="548640" cy="320040"/>
-          </a:xfrm>
-          <a:prstGeom prst="rect">
-            <a:avLst/>
-          </a:prstGeom>
-          <a:extLst>
-            <a:ext uri="{C572A759-6A51-4108-AA02-DFA0A04FC94B}">
-              <ma14:wrappingTextBoxFlag xmlns:ma14="http://schemas.microsoft.com/office/mac/drawingml/2011/main" val="0"/>
-            </a:ext>
-          </a:extLst>
-        </p:spPr>
-        <p:txBody>
-          <a:bodyPr/>
-          <a:lstStyle>
-            <a:lvl1pPr>
-              <a:defRPr sz="1100">
-                <a:solidFill>
-                  <a:srgbClr val="8A94A6"/>
-                </a:solidFill>
-              </a:defRPr>
-            </a:lvl1pPr>
-          </a:lstStyle>
-          <a:p>
-            <a:pPr algn="r"/>
-            <a:fld id="{F7021451-1387-4CA6-816F-3879F97B5CBC}" type="slidenum">
-              <a:rPr b="0" lang="en-US"/>
-              <a:t>11</a:t>
-            </a:fld>
-            <a:endParaRPr lang="en-US"/>
-          </a:p>
-        </p:txBody>
-      </p:sp>
-    </p:spTree>
-  </p:cSld>
-  <p:clrMapOvr>
-    <a:masterClrMapping/>
-  </p:clrMapOvr>
-</p:sld>
-</file>
-
-<file path=ppt/slides/slide12.xml><?xml version="1.0" encoding="utf-8"?>
-<p:sld xmlns:a="http://schemas.openxmlformats.org/drawingml/2006/main" xmlns:r="http://schemas.openxmlformats.org/officeDocument/2006/relationships" xmlns:p="http://schemas.openxmlformats.org/presentationml/2006/main">
-  <p:cSld name="Slide 12">
-    <p:spTree>
-      <p:nvGrpSpPr>
-        <p:cNvPr id="1" name=""/>
-        <p:cNvGrpSpPr/>
-        <p:nvPr/>
-      </p:nvGrpSpPr>
-      <p:grpSpPr>
-        <a:xfrm>
-          <a:off x="0" y="0"/>
-          <a:ext cx="0" cy="0"/>
-          <a:chOff x="0" y="0"/>
-          <a:chExt cx="0" cy="0"/>
-        </a:xfrm>
-      </p:grpSpPr>
-      <p:sp>
-        <p:nvSpPr>
-          <p:cNvPr id="2" name="Text 0"/>
-          <p:cNvSpPr/>
-          <p:nvPr>
-            <p:ph idx="100" type="title" hasCustomPrompt="1"/>
-          </p:nvPr>
-        </p:nvSpPr>
-        <p:spPr>
-          <a:xfrm>
-            <a:off x="548640" y="411480"/>
-            <a:ext cx="11094415" cy="777240"/>
-          </a:xfrm>
-          <a:prstGeom prst="rect">
-            <a:avLst/>
-          </a:prstGeom>
-          <a:noFill/>
-          <a:ln/>
-        </p:spPr>
-        <p:txBody>
-          <a:bodyPr wrap="square" lIns="0" tIns="0" rIns="0" bIns="0" rtlCol="0" anchor="ctr"/>
-          <a:lstStyle/>
-          <a:p>
-            <a:pPr algn="l" indent="0" marL="0">
-              <a:buNone/>
-            </a:pPr>
-            <a:r>
-              <a:rPr lang="en-US" sz="3200" b="1" dirty="0">
-                <a:solidFill>
-                  <a:schemeClr val="tx1"/>
-                </a:solidFill>
-              </a:rPr>
-              <a:t>Actividad: mi relato</a:t>
-            </a:r>
-            <a:endParaRPr lang="en-US" sz="3200" dirty="0"/>
-          </a:p>
-        </p:txBody>
-      </p:sp>
-      <p:sp>
-        <p:nvSpPr>
-          <p:cNvPr id="3" name="Etiqueta de tiempo"/>
-          <p:cNvSpPr/>
-          <p:nvPr/>
-        </p:nvSpPr>
-        <p:spPr>
-          <a:xfrm>
-            <a:off x="8556955" y="548640"/>
-            <a:ext cx="3086100" cy="457200"/>
-          </a:xfrm>
-          <a:prstGeom prst="roundRect">
-            <a:avLst>
-              <a:gd name="adj" fmla="val 50000"/>
-            </a:avLst>
-          </a:prstGeom>
-          <a:solidFill>
-            <a:schemeClr val="accent1"/>
-          </a:solidFill>
-          <a:ln/>
-        </p:spPr>
-      </p:sp>
-      <p:sp>
-        <p:nvSpPr>
-          <p:cNvPr id="4" name="Text 2"/>
-          <p:cNvSpPr txBox="1"/>
-          <p:nvPr/>
-        </p:nvSpPr>
-        <p:spPr>
-          <a:xfrm>
-            <a:off x="8556955" y="548640"/>
-            <a:ext cx="3086100" cy="457200"/>
-          </a:xfrm>
-          <a:prstGeom prst="rect">
-            <a:avLst/>
-          </a:prstGeom>
-          <a:noFill/>
-          <a:ln/>
-        </p:spPr>
-        <p:txBody>
-          <a:bodyPr wrap="square" lIns="0" tIns="0" rIns="0" bIns="0" rtlCol="0" anchor="ctr"/>
-          <a:lstStyle/>
-          <a:p>
-            <a:pPr algn="ctr" indent="0" marL="0">
-              <a:buNone/>
-            </a:pPr>
-            <a:r>
-              <a:rPr lang="en-US" sz="1400" b="1" dirty="0">
-                <a:solidFill>
-                  <a:schemeClr val="tx1"/>
-                </a:solidFill>
-              </a:rPr>
-              <a:t>Min. 285–295 · Individual</a:t>
-            </a:r>
-            <a:endParaRPr lang="en-US" sz="1400" dirty="0"/>
-          </a:p>
-        </p:txBody>
-      </p:sp>
-      <p:sp>
-        <p:nvSpPr>
-          <p:cNvPr id="5" name="Text 3"/>
-          <p:cNvSpPr txBox="1"/>
-          <p:nvPr/>
-        </p:nvSpPr>
-        <p:spPr>
-          <a:xfrm>
-            <a:off x="548640" y="1325880"/>
-            <a:ext cx="11094415" cy="457200"/>
-          </a:xfrm>
-          <a:prstGeom prst="rect">
-            <a:avLst/>
-          </a:prstGeom>
-          <a:noFill/>
-          <a:ln/>
-        </p:spPr>
-        <p:txBody>
-          <a:bodyPr wrap="square" lIns="0" tIns="0" rIns="0" bIns="0" rtlCol="0" anchor="ctr"/>
-          <a:lstStyle/>
-          <a:p>
-            <a:pPr indent="0" marL="0">
-              <a:buNone/>
-            </a:pPr>
-            <a:r>
-              <a:rPr lang="en-US" sz="1900" dirty="0">
-                <a:solidFill>
-                  <a:schemeClr val="tx2"/>
-                </a:solidFill>
-              </a:rPr>
-              <a:t>Escribid vuestro propio relato, de tres o cuatro líneas, adaptado a:</a:t>
-            </a:r>
-            <a:endParaRPr lang="en-US" sz="1900" dirty="0"/>
-          </a:p>
-        </p:txBody>
-      </p:sp>
-      <p:sp>
-        <p:nvSpPr>
-          <p:cNvPr id="6" name="El trabajo que ha hecho vuestra pareja"/>
-          <p:cNvSpPr/>
-          <p:nvPr/>
-        </p:nvSpPr>
-        <p:spPr>
-          <a:xfrm>
-            <a:off x="548640" y="1920240"/>
-            <a:ext cx="685800" cy="685800"/>
-          </a:xfrm>
-          <a:prstGeom prst="ellipse">
-            <a:avLst/>
-          </a:prstGeom>
-          <a:solidFill>
-            <a:schemeClr val="accent1"/>
-          </a:solidFill>
-          <a:ln/>
-        </p:spPr>
-      </p:sp>
-      <p:pic>
-        <p:nvPicPr>
-          <p:cNvPr id="7" name="Image 0" descr="El trabajo que ha hecho vuestra pareja">    </p:cNvPr>
-          <p:cNvPicPr>
-            <a:picLocks noChangeAspect="1"/>
-          </p:cNvPicPr>
-          <p:nvPr/>
-        </p:nvPicPr>
-        <p:blipFill>
-          <a:blip r:embed="rId1"/>
-          <a:stretch>
-            <a:fillRect/>
-          </a:stretch>
-        </p:blipFill>
-        <p:spPr>
-          <a:xfrm>
-            <a:off x="713232" y="2084832"/>
-            <a:ext cx="356616" cy="356616"/>
-          </a:xfrm>
-          <a:prstGeom prst="rect">
-            <a:avLst/>
-          </a:prstGeom>
-        </p:spPr>
-      </p:pic>
-      <p:sp>
-        <p:nvSpPr>
-          <p:cNvPr id="8" name="Text 5"/>
-          <p:cNvSpPr txBox="1"/>
-          <p:nvPr/>
-        </p:nvSpPr>
-        <p:spPr>
-          <a:xfrm>
-            <a:off x="1417320" y="1920240"/>
-            <a:ext cx="4572000" cy="685800"/>
-          </a:xfrm>
-          <a:prstGeom prst="rect">
-            <a:avLst/>
-          </a:prstGeom>
-          <a:noFill/>
-          <a:ln/>
-        </p:spPr>
-        <p:txBody>
-          <a:bodyPr wrap="square" lIns="0" tIns="0" rIns="0" bIns="0" rtlCol="0" anchor="ctr"/>
-          <a:lstStyle/>
-          <a:p>
-            <a:pPr indent="0" marL="0">
-              <a:buNone/>
-            </a:pPr>
-            <a:r>
-              <a:rPr lang="en-US" sz="1900" b="1" dirty="0">
-                <a:solidFill>
-                  <a:schemeClr val="tx1"/>
-                </a:solidFill>
-              </a:rPr>
-              <a:t>El trabajo que ha hecho vuestra pareja</a:t>
-            </a:r>
-            <a:endParaRPr lang="en-US" sz="1900" dirty="0"/>
-          </a:p>
-        </p:txBody>
-      </p:sp>
-      <p:sp>
-        <p:nvSpPr>
-          <p:cNvPr id="9" name="El puesto al que aspiráis"/>
-          <p:cNvSpPr/>
-          <p:nvPr/>
-        </p:nvSpPr>
-        <p:spPr>
-          <a:xfrm>
-            <a:off x="6217920" y="1920240"/>
-            <a:ext cx="685800" cy="685800"/>
-          </a:xfrm>
-          <a:prstGeom prst="ellipse">
-            <a:avLst/>
-          </a:prstGeom>
-          <a:solidFill>
-            <a:schemeClr val="accent1"/>
-          </a:solidFill>
-          <a:ln/>
-        </p:spPr>
-      </p:sp>
-      <p:pic>
-        <p:nvPicPr>
-          <p:cNvPr id="10" name="Image 1" descr="El puesto al que aspiráis">    </p:cNvPr>
-          <p:cNvPicPr>
-            <a:picLocks noChangeAspect="1"/>
-          </p:cNvPicPr>
-          <p:nvPr/>
-        </p:nvPicPr>
-        <p:blipFill>
-          <a:blip r:embed="rId2"/>
-          <a:stretch>
-            <a:fillRect/>
-          </a:stretch>
-        </p:blipFill>
-        <p:spPr>
-          <a:xfrm>
-            <a:off x="6382512" y="2084832"/>
-            <a:ext cx="356616" cy="356616"/>
-          </a:xfrm>
-          <a:prstGeom prst="rect">
-            <a:avLst/>
-          </a:prstGeom>
-        </p:spPr>
-      </p:pic>
-      <p:sp>
-        <p:nvSpPr>
-          <p:cNvPr id="11" name="Text 7"/>
-          <p:cNvSpPr txBox="1"/>
-          <p:nvPr/>
-        </p:nvSpPr>
-        <p:spPr>
-          <a:xfrm>
-            <a:off x="7086600" y="1920240"/>
-            <a:ext cx="4572000" cy="685800"/>
-          </a:xfrm>
-          <a:prstGeom prst="rect">
-            <a:avLst/>
-          </a:prstGeom>
-          <a:noFill/>
-          <a:ln/>
-        </p:spPr>
-        <p:txBody>
-          <a:bodyPr wrap="square" lIns="0" tIns="0" rIns="0" bIns="0" rtlCol="0" anchor="ctr"/>
-          <a:lstStyle/>
-          <a:p>
-            <a:pPr indent="0" marL="0">
-              <a:buNone/>
-            </a:pPr>
-            <a:r>
-              <a:rPr lang="en-US" sz="1900" b="1" dirty="0">
-                <a:solidFill>
-                  <a:schemeClr val="tx1"/>
-                </a:solidFill>
-              </a:rPr>
-              <a:t>El puesto al que aspiráis</a:t>
-            </a:r>
-            <a:endParaRPr lang="en-US" sz="1900" dirty="0"/>
-          </a:p>
-        </p:txBody>
-      </p:sp>
-      <p:sp>
-        <p:nvSpPr>
-          <p:cNvPr id="12" name="Hueco"/>
-          <p:cNvSpPr/>
-          <p:nvPr/>
-        </p:nvSpPr>
-        <p:spPr>
-          <a:xfrm>
-            <a:off x="548640" y="2880360"/>
-            <a:ext cx="11094415" cy="2194560"/>
-          </a:xfrm>
-          <a:prstGeom prst="roundRect">
-            <a:avLst>
-              <a:gd name="adj" fmla="val 4167"/>
-            </a:avLst>
-          </a:prstGeom>
-          <a:solidFill>
-            <a:schemeClr val="bg2"/>
-          </a:solidFill>
-          <a:ln w="12700">
-            <a:solidFill>
-              <a:srgbClr val="8A94A6"/>
-            </a:solidFill>
-            <a:prstDash val="dash"/>
-          </a:ln>
-        </p:spPr>
-      </p:sp>
-      <p:sp>
-        <p:nvSpPr>
-          <p:cNvPr id="13" name="Lectura"/>
-          <p:cNvSpPr/>
-          <p:nvPr/>
-        </p:nvSpPr>
-        <p:spPr>
-          <a:xfrm>
-            <a:off x="548640" y="5349240"/>
-            <a:ext cx="594360" cy="594360"/>
-          </a:xfrm>
-          <a:prstGeom prst="ellipse">
-            <a:avLst/>
-          </a:prstGeom>
-          <a:solidFill>
-            <a:schemeClr val="tx2"/>
-          </a:solidFill>
-          <a:ln/>
-        </p:spPr>
-      </p:sp>
-      <p:pic>
-        <p:nvPicPr>
-          <p:cNvPr id="14" name="Image 2" descr="Lectura">    </p:cNvPr>
-          <p:cNvPicPr>
-            <a:picLocks noChangeAspect="1"/>
-          </p:cNvPicPr>
-          <p:nvPr/>
-        </p:nvPicPr>
-        <p:blipFill>
-          <a:blip r:embed="rId3"/>
-          <a:stretch>
-            <a:fillRect/>
-          </a:stretch>
-        </p:blipFill>
-        <p:spPr>
-          <a:xfrm>
-            <a:off x="691286" y="5491886"/>
-            <a:ext cx="309067" cy="309067"/>
-          </a:xfrm>
-          <a:prstGeom prst="rect">
-            <a:avLst/>
-          </a:prstGeom>
-        </p:spPr>
-      </p:pic>
-      <p:sp>
-        <p:nvSpPr>
-          <p:cNvPr id="15" name="Text 10"/>
-          <p:cNvSpPr txBox="1"/>
-          <p:nvPr/>
-        </p:nvSpPr>
-        <p:spPr>
-          <a:xfrm>
-            <a:off x="1371600" y="5349240"/>
-            <a:ext cx="10271455" cy="594360"/>
-          </a:xfrm>
-          <a:prstGeom prst="rect">
-            <a:avLst/>
-          </a:prstGeom>
-          <a:noFill/>
-          <a:ln/>
-        </p:spPr>
-        <p:txBody>
-          <a:bodyPr wrap="square" lIns="0" tIns="0" rIns="0" bIns="0" rtlCol="0" anchor="ctr"/>
-          <a:lstStyle/>
-          <a:p>
-            <a:pPr indent="0" marL="0">
-              <a:buNone/>
-            </a:pPr>
-            <a:r>
-              <a:rPr lang="en-US" sz="1800" dirty="0">
-                <a:solidFill>
-                  <a:schemeClr val="tx1"/>
-                </a:solidFill>
-              </a:rPr>
-              <a:t>Después, tres o cuatro voluntarios lo leen y el grupo propone una mejora para cada uno.</a:t>
-            </a:r>
-            <a:endParaRPr lang="en-US" sz="1800" dirty="0"/>
-          </a:p>
-        </p:txBody>
-      </p:sp>
-      <p:sp>
-        <p:nvSpPr>
-          <p:cNvPr id="25" name="Slide Number Placeholder 0"/>
-          <p:cNvSpPr>
-            <a:spLocks noGrp="1"/>
-          </p:cNvSpPr>
-          <p:nvPr>
-            <p:ph type="sldNum" sz="quarter" idx="4294967295"/>
-          </p:nvPr>
-        </p:nvSpPr>
-        <p:spPr>
-          <a:xfrm>
-            <a:off x="11091672" y="6355080"/>
-            <a:ext cx="548640" cy="320040"/>
-          </a:xfrm>
-          <a:prstGeom prst="rect">
-            <a:avLst/>
-          </a:prstGeom>
-          <a:extLst>
-            <a:ext uri="{C572A759-6A51-4108-AA02-DFA0A04FC94B}">
-              <ma14:wrappingTextBoxFlag xmlns:ma14="http://schemas.microsoft.com/office/mac/drawingml/2011/main" val="0"/>
-            </a:ext>
-          </a:extLst>
-        </p:spPr>
-        <p:txBody>
-          <a:bodyPr/>
-          <a:lstStyle>
-            <a:lvl1pPr>
-              <a:defRPr sz="1100">
-                <a:solidFill>
-                  <a:srgbClr val="8A94A6"/>
-                </a:solidFill>
-              </a:defRPr>
-            </a:lvl1pPr>
-          </a:lstStyle>
-          <a:p>
-            <a:pPr algn="r"/>
-            <a:fld id="{F7021451-1387-4CA6-816F-3879F97B5CBC}" type="slidenum">
-              <a:rPr b="0" lang="en-US"/>
-              <a:t>12</a:t>
-            </a:fld>
-            <a:endParaRPr lang="en-US"/>
-          </a:p>
-        </p:txBody>
-      </p:sp>
-    </p:spTree>
-  </p:cSld>
-  <p:clrMapOvr>
-    <a:masterClrMapping/>
-  </p:clrMapOvr>
-</p:sld>
-</file>
-
-<file path=ppt/slides/slide13.xml><?xml version="1.0" encoding="utf-8"?>
 <p:sld xmlns:a="http://schemas.openxmlformats.org/drawingml/2006/main" xmlns:r="http://schemas.openxmlformats.org/officeDocument/2006/relationships" xmlns:p="http://schemas.openxmlformats.org/presentationml/2006/main">
   <p:cSld name="Slide 13">
     <p:spTree>
@@ -4476,9 +3296,11 @@
       <p:sp>
         <p:nvSpPr>
           <p:cNvPr id="2" name="Text 0"/>
-          <p:cNvSpPr/>
+          <p:cNvSpPr>
+            <a:spLocks noGrp="1"/>
+          </p:cNvSpPr>
           <p:nvPr>
-            <p:ph idx="100" type="title" hasCustomPrompt="1"/>
+            <p:ph type="title" idx="100" hasCustomPrompt="1"/>
           </p:nvPr>
         </p:nvSpPr>
         <p:spPr>
@@ -4496,7 +3318,7 @@
           <a:bodyPr wrap="square" lIns="0" tIns="0" rIns="0" bIns="0" rtlCol="0" anchor="ctr"/>
           <a:lstStyle/>
           <a:p>
-            <a:pPr algn="l" indent="0" marL="0">
+            <a:pPr marL="0" indent="0" algn="l">
               <a:buNone/>
             </a:pPr>
             <a:r>
@@ -4554,7 +3376,7 @@
           <a:bodyPr wrap="square" lIns="0" tIns="0" rIns="0" bIns="0" rtlCol="0" anchor="ctr"/>
           <a:lstStyle/>
           <a:p>
-            <a:pPr algn="ctr" indent="0" marL="0">
+            <a:pPr marL="0" indent="0" algn="ctr">
               <a:buNone/>
             </a:pPr>
             <a:r>
@@ -4610,7 +3432,7 @@
           <a:bodyPr wrap="square" lIns="0" tIns="0" rIns="0" bIns="0" rtlCol="0" anchor="ctr"/>
           <a:lstStyle/>
           <a:p>
-            <a:pPr algn="ctr" indent="0" marL="0">
+            <a:pPr marL="0" indent="0" algn="ctr">
               <a:buNone/>
             </a:pPr>
             <a:r>
@@ -4646,7 +3468,7 @@
           <a:bodyPr wrap="square" lIns="0" tIns="0" rIns="0" bIns="0" rtlCol="0" anchor="ctr"/>
           <a:lstStyle/>
           <a:p>
-            <a:pPr indent="0" marL="0">
+            <a:pPr marL="0" indent="0">
               <a:buNone/>
             </a:pPr>
             <a:r>
@@ -4702,7 +3524,7 @@
           <a:bodyPr wrap="square" lIns="0" tIns="0" rIns="0" bIns="0" rtlCol="0" anchor="ctr"/>
           <a:lstStyle/>
           <a:p>
-            <a:pPr algn="ctr" indent="0" marL="0">
+            <a:pPr marL="0" indent="0" algn="ctr">
               <a:buNone/>
             </a:pPr>
             <a:r>
@@ -4738,7 +3560,7 @@
           <a:bodyPr wrap="square" lIns="0" tIns="0" rIns="0" bIns="0" rtlCol="0" anchor="ctr"/>
           <a:lstStyle/>
           <a:p>
-            <a:pPr indent="0" marL="0">
+            <a:pPr marL="0" indent="0">
               <a:buNone/>
             </a:pPr>
             <a:r>
@@ -4794,7 +3616,7 @@
           <a:bodyPr wrap="square" lIns="0" tIns="0" rIns="0" bIns="0" rtlCol="0" anchor="ctr"/>
           <a:lstStyle/>
           <a:p>
-            <a:pPr algn="ctr" indent="0" marL="0">
+            <a:pPr marL="0" indent="0" algn="ctr">
               <a:buNone/>
             </a:pPr>
             <a:r>
@@ -4830,7 +3652,7 @@
           <a:bodyPr wrap="square" lIns="0" tIns="0" rIns="0" bIns="0" rtlCol="0" anchor="ctr"/>
           <a:lstStyle/>
           <a:p>
-            <a:pPr indent="0" marL="0">
+            <a:pPr marL="0" indent="0">
               <a:buNone/>
             </a:pPr>
             <a:r>
@@ -4886,7 +3708,7 @@
           <a:bodyPr wrap="square" lIns="0" tIns="0" rIns="0" bIns="0" rtlCol="0" anchor="ctr"/>
           <a:lstStyle/>
           <a:p>
-            <a:pPr algn="ctr" indent="0" marL="0">
+            <a:pPr marL="0" indent="0" algn="ctr">
               <a:buNone/>
             </a:pPr>
             <a:r>
@@ -4922,7 +3744,7 @@
           <a:bodyPr wrap="square" lIns="0" tIns="0" rIns="0" bIns="0" rtlCol="0" anchor="ctr"/>
           <a:lstStyle/>
           <a:p>
-            <a:pPr indent="0" marL="0">
+            <a:pPr marL="0" indent="0">
               <a:buNone/>
             </a:pPr>
             <a:r>
@@ -4978,7 +3800,7 @@
           <a:bodyPr wrap="square" lIns="0" tIns="0" rIns="0" bIns="0" rtlCol="0" anchor="ctr"/>
           <a:lstStyle/>
           <a:p>
-            <a:pPr algn="ctr" indent="0" marL="0">
+            <a:pPr marL="0" indent="0" algn="ctr">
               <a:buNone/>
             </a:pPr>
             <a:r>
@@ -5014,7 +3836,7 @@
           <a:bodyPr wrap="square" lIns="0" tIns="0" rIns="0" bIns="0" rtlCol="0" anchor="ctr"/>
           <a:lstStyle/>
           <a:p>
-            <a:pPr indent="0" marL="0">
+            <a:pPr marL="0" indent="0">
               <a:buNone/>
             </a:pPr>
             <a:r>
@@ -5049,7 +3871,7 @@
           </a:prstGeom>
           <a:extLst>
             <a:ext uri="{C572A759-6A51-4108-AA02-DFA0A04FC94B}">
-              <ma14:wrappingTextBoxFlag xmlns:ma14="http://schemas.microsoft.com/office/mac/drawingml/2011/main" val="0"/>
+              <ma14:wrappingTextBoxFlag xmlns:ma14="http://schemas.microsoft.com/office/mac/drawingml/2011/main" xmlns="" val="0"/>
             </a:ext>
           </a:extLst>
         </p:spPr>
@@ -5067,8 +3889,8 @@
           <a:p>
             <a:pPr algn="r"/>
             <a:fld id="{F7021451-1387-4CA6-816F-3879F97B5CBC}" type="slidenum">
-              <a:rPr b="0" lang="en-US"/>
-              <a:t>13</a:t>
+              <a:rPr lang="en-US" b="0"/>
+              <a:t>11</a:t>
             </a:fld>
             <a:endParaRPr lang="en-US"/>
           </a:p>
@@ -5082,7 +3904,7 @@
 </p:sld>
 </file>
 
-<file path=ppt/slides/slide14.xml><?xml version="1.0" encoding="utf-8"?>
+<file path=ppt/slides/slide12.xml><?xml version="1.0" encoding="utf-8"?>
 <p:sld xmlns:a="http://schemas.openxmlformats.org/drawingml/2006/main" xmlns:r="http://schemas.openxmlformats.org/officeDocument/2006/relationships" xmlns:p="http://schemas.openxmlformats.org/presentationml/2006/main">
   <p:cSld name="Slide 14">
     <p:spTree>
@@ -5120,7 +3942,7 @@
           <a:bodyPr wrap="square" lIns="0" tIns="0" rIns="0" bIns="0" rtlCol="0" anchor="ctr"/>
           <a:lstStyle/>
           <a:p>
-            <a:pPr indent="0" marL="0">
+            <a:pPr marL="0" indent="0">
               <a:buNone/>
             </a:pPr>
             <a:r>
@@ -5138,9 +3960,11 @@
       <p:sp>
         <p:nvSpPr>
           <p:cNvPr id="3" name="Text 0"/>
-          <p:cNvSpPr/>
+          <p:cNvSpPr>
+            <a:spLocks noGrp="1"/>
+          </p:cNvSpPr>
           <p:nvPr>
-            <p:ph idx="100" type="body" hasCustomPrompt="1"/>
+            <p:ph type="body" idx="100" hasCustomPrompt="1"/>
           </p:nvPr>
         </p:nvSpPr>
         <p:spPr>
@@ -5158,7 +3982,7 @@
           <a:bodyPr wrap="square" lIns="0" tIns="0" rIns="0" bIns="0" rtlCol="0" anchor="ctr"/>
           <a:lstStyle/>
           <a:p>
-            <a:pPr indent="0" marL="0">
+            <a:pPr marL="0" indent="0">
               <a:buNone/>
             </a:pPr>
             <a:r>
@@ -5172,7 +3996,7 @@
             <a:endParaRPr lang="en-US" sz="3400" dirty="0"/>
           </a:p>
           <a:p>
-            <a:pPr indent="0" marL="0">
+            <a:pPr marL="0" indent="0">
               <a:buNone/>
             </a:pPr>
             <a:r>
@@ -5207,7 +4031,7 @@
           </a:prstGeom>
           <a:extLst>
             <a:ext uri="{C572A759-6A51-4108-AA02-DFA0A04FC94B}">
-              <ma14:wrappingTextBoxFlag xmlns:ma14="http://schemas.microsoft.com/office/mac/drawingml/2011/main" val="0"/>
+              <ma14:wrappingTextBoxFlag xmlns:ma14="http://schemas.microsoft.com/office/mac/drawingml/2011/main" xmlns="" val="0"/>
             </a:ext>
           </a:extLst>
         </p:spPr>
@@ -5225,8 +4049,8 @@
           <a:p>
             <a:pPr algn="r"/>
             <a:fld id="{F7021451-1387-4CA6-816F-3879F97B5CBC}" type="slidenum">
-              <a:rPr b="0" lang="en-US"/>
-              <a:t>14</a:t>
+              <a:rPr lang="en-US" b="0"/>
+              <a:t>12</a:t>
             </a:fld>
             <a:endParaRPr lang="en-US"/>
           </a:p>
@@ -5240,7 +4064,7 @@
 </p:sld>
 </file>
 
-<file path=ppt/slides/slide15.xml><?xml version="1.0" encoding="utf-8"?>
+<file path=ppt/slides/slide13.xml><?xml version="1.0" encoding="utf-8"?>
 <p:sld xmlns:a="http://schemas.openxmlformats.org/drawingml/2006/main" xmlns:r="http://schemas.openxmlformats.org/officeDocument/2006/relationships" xmlns:p="http://schemas.openxmlformats.org/presentationml/2006/main">
   <p:cSld name="Slide 15">
     <p:spTree>
@@ -5278,7 +4102,7 @@
           <a:bodyPr wrap="square" lIns="0" tIns="0" rIns="0" bIns="0" rtlCol="0" anchor="ctr"/>
           <a:lstStyle/>
           <a:p>
-            <a:pPr indent="0" marL="0">
+            <a:pPr marL="0" indent="0">
               <a:buNone/>
             </a:pPr>
             <a:r>
@@ -5296,9 +4120,11 @@
       <p:sp>
         <p:nvSpPr>
           <p:cNvPr id="3" name="Text 0"/>
-          <p:cNvSpPr/>
+          <p:cNvSpPr>
+            <a:spLocks noGrp="1"/>
+          </p:cNvSpPr>
           <p:nvPr>
-            <p:ph idx="100" type="body" hasCustomPrompt="1"/>
+            <p:ph type="body" idx="100" hasCustomPrompt="1"/>
           </p:nvPr>
         </p:nvSpPr>
         <p:spPr>
@@ -5316,7 +4142,7 @@
           <a:bodyPr wrap="square" lIns="0" tIns="0" rIns="0" bIns="0" rtlCol="0" anchor="ctr"/>
           <a:lstStyle/>
           <a:p>
-            <a:pPr indent="0" marL="0">
+            <a:pPr marL="0" indent="0">
               <a:buNone/>
             </a:pPr>
             <a:r>
@@ -5330,7 +4156,7 @@
             <a:endParaRPr lang="en-US" sz="3400" dirty="0"/>
           </a:p>
           <a:p>
-            <a:pPr indent="0" marL="0">
+            <a:pPr marL="0" indent="0">
               <a:buNone/>
             </a:pPr>
             <a:r>
@@ -5365,7 +4191,7 @@
           </a:prstGeom>
           <a:extLst>
             <a:ext uri="{C572A759-6A51-4108-AA02-DFA0A04FC94B}">
-              <ma14:wrappingTextBoxFlag xmlns:ma14="http://schemas.microsoft.com/office/mac/drawingml/2011/main" val="0"/>
+              <ma14:wrappingTextBoxFlag xmlns:ma14="http://schemas.microsoft.com/office/mac/drawingml/2011/main" xmlns="" val="0"/>
             </a:ext>
           </a:extLst>
         </p:spPr>
@@ -5383,8 +4209,8 @@
           <a:p>
             <a:pPr algn="r"/>
             <a:fld id="{F7021451-1387-4CA6-816F-3879F97B5CBC}" type="slidenum">
-              <a:rPr b="0" lang="en-US"/>
-              <a:t>15</a:t>
+              <a:rPr lang="en-US" b="0"/>
+              <a:t>13</a:t>
             </a:fld>
             <a:endParaRPr lang="en-US"/>
           </a:p>
@@ -5418,9 +4244,11 @@
       <p:sp>
         <p:nvSpPr>
           <p:cNvPr id="2" name="Text 0"/>
-          <p:cNvSpPr/>
+          <p:cNvSpPr>
+            <a:spLocks noGrp="1"/>
+          </p:cNvSpPr>
           <p:nvPr>
-            <p:ph idx="100" type="title" hasCustomPrompt="1"/>
+            <p:ph type="title" idx="100" hasCustomPrompt="1"/>
           </p:nvPr>
         </p:nvSpPr>
         <p:spPr>
@@ -5438,7 +4266,7 @@
           <a:bodyPr wrap="square" lIns="0" tIns="0" rIns="0" bIns="0" rtlCol="0" anchor="ctr"/>
           <a:lstStyle/>
           <a:p>
-            <a:pPr algn="l" indent="0" marL="0">
+            <a:pPr marL="0" indent="0" algn="l">
               <a:buNone/>
             </a:pPr>
             <a:r>
@@ -5517,7 +4345,7 @@
           <a:bodyPr wrap="square" lIns="0" tIns="0" rIns="0" bIns="0" rtlCol="0" anchor="ctr"/>
           <a:lstStyle/>
           <a:p>
-            <a:pPr algn="ctr" indent="0" marL="0">
+            <a:pPr marL="0" indent="0" algn="ctr">
               <a:buNone/>
             </a:pPr>
             <a:r>
@@ -5553,7 +4381,7 @@
           <a:bodyPr wrap="square" lIns="0" tIns="0" rIns="0" bIns="0" rtlCol="0" anchor="t"/>
           <a:lstStyle/>
           <a:p>
-            <a:pPr algn="ctr" indent="0" marL="0">
+            <a:pPr marL="0" indent="0" algn="ctr">
               <a:buNone/>
             </a:pPr>
             <a:r>
@@ -5609,7 +4437,7 @@
           <a:bodyPr wrap="square" lIns="0" tIns="0" rIns="0" bIns="0" rtlCol="0" anchor="ctr"/>
           <a:lstStyle/>
           <a:p>
-            <a:pPr algn="ctr" indent="0" marL="0">
+            <a:pPr marL="0" indent="0" algn="ctr">
               <a:buNone/>
             </a:pPr>
             <a:r>
@@ -5645,7 +4473,7 @@
           <a:bodyPr wrap="square" lIns="0" tIns="0" rIns="0" bIns="0" rtlCol="0" anchor="t"/>
           <a:lstStyle/>
           <a:p>
-            <a:pPr algn="ctr" indent="0" marL="0">
+            <a:pPr marL="0" indent="0" algn="ctr">
               <a:buNone/>
             </a:pPr>
             <a:r>
@@ -5701,7 +4529,7 @@
           <a:bodyPr wrap="square" lIns="0" tIns="0" rIns="0" bIns="0" rtlCol="0" anchor="ctr"/>
           <a:lstStyle/>
           <a:p>
-            <a:pPr algn="ctr" indent="0" marL="0">
+            <a:pPr marL="0" indent="0" algn="ctr">
               <a:buNone/>
             </a:pPr>
             <a:r>
@@ -5737,7 +4565,7 @@
           <a:bodyPr wrap="square" lIns="0" tIns="0" rIns="0" bIns="0" rtlCol="0" anchor="t"/>
           <a:lstStyle/>
           <a:p>
-            <a:pPr algn="ctr" indent="0" marL="0">
+            <a:pPr marL="0" indent="0" algn="ctr">
               <a:buNone/>
             </a:pPr>
             <a:r>
@@ -5793,7 +4621,7 @@
           <a:bodyPr wrap="square" lIns="0" tIns="0" rIns="0" bIns="0" rtlCol="0" anchor="ctr"/>
           <a:lstStyle/>
           <a:p>
-            <a:pPr algn="ctr" indent="0" marL="0">
+            <a:pPr marL="0" indent="0" algn="ctr">
               <a:buNone/>
             </a:pPr>
             <a:r>
@@ -5829,7 +4657,7 @@
           <a:bodyPr wrap="square" lIns="0" tIns="0" rIns="0" bIns="0" rtlCol="0" anchor="t"/>
           <a:lstStyle/>
           <a:p>
-            <a:pPr algn="ctr" indent="0" marL="0">
+            <a:pPr marL="0" indent="0" algn="ctr">
               <a:buNone/>
             </a:pPr>
             <a:r>
@@ -5885,7 +4713,7 @@
           <a:bodyPr wrap="square" lIns="0" tIns="0" rIns="0" bIns="0" rtlCol="0" anchor="ctr"/>
           <a:lstStyle/>
           <a:p>
-            <a:pPr algn="ctr" indent="0" marL="0">
+            <a:pPr marL="0" indent="0" algn="ctr">
               <a:buNone/>
             </a:pPr>
             <a:r>
@@ -5921,7 +4749,7 @@
           <a:bodyPr wrap="square" lIns="0" tIns="0" rIns="0" bIns="0" rtlCol="0" anchor="t"/>
           <a:lstStyle/>
           <a:p>
-            <a:pPr algn="ctr" indent="0" marL="0">
+            <a:pPr marL="0" indent="0" algn="ctr">
               <a:buNone/>
             </a:pPr>
             <a:r>
@@ -5956,7 +4784,7 @@
           </a:prstGeom>
           <a:extLst>
             <a:ext uri="{C572A759-6A51-4108-AA02-DFA0A04FC94B}">
-              <ma14:wrappingTextBoxFlag xmlns:ma14="http://schemas.microsoft.com/office/mac/drawingml/2011/main" val="0"/>
+              <ma14:wrappingTextBoxFlag xmlns:ma14="http://schemas.microsoft.com/office/mac/drawingml/2011/main" xmlns="" val="0"/>
             </a:ext>
           </a:extLst>
         </p:spPr>
@@ -5974,7 +4802,7 @@
           <a:p>
             <a:pPr algn="r"/>
             <a:fld id="{F7021451-1387-4CA6-816F-3879F97B5CBC}" type="slidenum">
-              <a:rPr b="0" lang="en-US"/>
+              <a:rPr lang="en-US" b="0"/>
               <a:t>2</a:t>
             </a:fld>
             <a:endParaRPr lang="en-US"/>
@@ -6009,9 +4837,11 @@
       <p:sp>
         <p:nvSpPr>
           <p:cNvPr id="2" name="Text 0"/>
-          <p:cNvSpPr/>
+          <p:cNvSpPr>
+            <a:spLocks noGrp="1"/>
+          </p:cNvSpPr>
           <p:nvPr>
-            <p:ph idx="100" type="title" hasCustomPrompt="1"/>
+            <p:ph type="title" idx="100" hasCustomPrompt="1"/>
           </p:nvPr>
         </p:nvSpPr>
         <p:spPr>
@@ -6029,7 +4859,7 @@
           <a:bodyPr wrap="square" lIns="0" tIns="0" rIns="0" bIns="0" rtlCol="0" anchor="ctr"/>
           <a:lstStyle/>
           <a:p>
-            <a:pPr algn="l" indent="0" marL="0">
+            <a:pPr marL="0" indent="0" algn="l">
               <a:buNone/>
             </a:pPr>
             <a:r>
@@ -6087,7 +4917,7 @@
           <a:bodyPr wrap="square" lIns="0" tIns="0" rIns="0" bIns="0" rtlCol="0" anchor="ctr"/>
           <a:lstStyle/>
           <a:p>
-            <a:pPr algn="ctr" indent="0" marL="0">
+            <a:pPr marL="0" indent="0" algn="ctr">
               <a:buNone/>
             </a:pPr>
             <a:r>
@@ -6167,7 +4997,7 @@
           <a:bodyPr wrap="square" lIns="0" tIns="0" rIns="0" bIns="0" rtlCol="0" anchor="ctr"/>
           <a:lstStyle/>
           <a:p>
-            <a:pPr algn="ctr" indent="0" marL="0">
+            <a:pPr marL="0" indent="0" algn="ctr">
               <a:buNone/>
             </a:pPr>
             <a:r>
@@ -6203,7 +5033,7 @@
           <a:bodyPr wrap="square" lIns="0" tIns="0" rIns="0" bIns="0" rtlCol="0" anchor="t"/>
           <a:lstStyle/>
           <a:p>
-            <a:pPr indent="0" marL="0">
+            <a:pPr marL="0" indent="0">
               <a:buNone/>
             </a:pPr>
             <a:r>
@@ -6283,7 +5113,7 @@
           <a:bodyPr wrap="square" lIns="0" tIns="0" rIns="0" bIns="0" rtlCol="0" anchor="ctr"/>
           <a:lstStyle/>
           <a:p>
-            <a:pPr algn="ctr" indent="0" marL="0">
+            <a:pPr marL="0" indent="0" algn="ctr">
               <a:buNone/>
             </a:pPr>
             <a:r>
@@ -6319,7 +5149,7 @@
           <a:bodyPr wrap="square" lIns="0" tIns="0" rIns="0" bIns="0" rtlCol="0" anchor="t"/>
           <a:lstStyle/>
           <a:p>
-            <a:pPr indent="0" marL="0">
+            <a:pPr marL="0" indent="0">
               <a:buNone/>
             </a:pPr>
             <a:r>
@@ -6355,7 +5185,7 @@
           <a:bodyPr wrap="square" lIns="0" tIns="0" rIns="0" bIns="0" rtlCol="0" anchor="ctr"/>
           <a:lstStyle/>
           <a:p>
-            <a:pPr indent="0" marL="0">
+            <a:pPr marL="0" indent="0">
               <a:buNone/>
             </a:pPr>
             <a:r>
@@ -6390,7 +5220,7 @@
           </a:prstGeom>
           <a:extLst>
             <a:ext uri="{C572A759-6A51-4108-AA02-DFA0A04FC94B}">
-              <ma14:wrappingTextBoxFlag xmlns:ma14="http://schemas.microsoft.com/office/mac/drawingml/2011/main" val="0"/>
+              <ma14:wrappingTextBoxFlag xmlns:ma14="http://schemas.microsoft.com/office/mac/drawingml/2011/main" xmlns="" val="0"/>
             </a:ext>
           </a:extLst>
         </p:spPr>
@@ -6408,7 +5238,7 @@
           <a:p>
             <a:pPr algn="r"/>
             <a:fld id="{F7021451-1387-4CA6-816F-3879F97B5CBC}" type="slidenum">
-              <a:rPr b="0" lang="en-US"/>
+              <a:rPr lang="en-US" b="0"/>
               <a:t>3</a:t>
             </a:fld>
             <a:endParaRPr lang="en-US"/>
@@ -6443,9 +5273,11 @@
       <p:sp>
         <p:nvSpPr>
           <p:cNvPr id="2" name="Text 0"/>
-          <p:cNvSpPr/>
+          <p:cNvSpPr>
+            <a:spLocks noGrp="1"/>
+          </p:cNvSpPr>
           <p:nvPr>
-            <p:ph idx="100" type="title" hasCustomPrompt="1"/>
+            <p:ph type="title" idx="100" hasCustomPrompt="1"/>
           </p:nvPr>
         </p:nvSpPr>
         <p:spPr>
@@ -6463,7 +5295,7 @@
           <a:bodyPr wrap="square" lIns="0" tIns="0" rIns="0" bIns="0" rtlCol="0" anchor="ctr"/>
           <a:lstStyle/>
           <a:p>
-            <a:pPr algn="l" indent="0" marL="0">
+            <a:pPr marL="0" indent="0" algn="l">
               <a:buNone/>
             </a:pPr>
             <a:r>
@@ -6521,7 +5353,7 @@
           <a:bodyPr wrap="square" lIns="0" tIns="0" rIns="0" bIns="0" rtlCol="0" anchor="ctr"/>
           <a:lstStyle/>
           <a:p>
-            <a:pPr algn="ctr" indent="0" marL="0">
+            <a:pPr marL="0" indent="0" algn="ctr">
               <a:buNone/>
             </a:pPr>
             <a:r>
@@ -6580,245 +5412,7 @@
       </p:sp>
       <p:pic>
         <p:nvPicPr>
-          <p:cNvPr id="7" name="Image 0" descr="La A habla de herramientas y hace afirmaciones sin justificar.">    </p:cNvPr>
-          <p:cNvPicPr>
-            <a:picLocks noChangeAspect="1"/>
-          </p:cNvPicPr>
-          <p:nvPr/>
-        </p:nvPicPr>
-        <p:blipFill>
-          <a:blip r:embed="rId1"/>
-          <a:stretch>
-            <a:fillRect/>
-          </a:stretch>
-        </p:blipFill>
-        <p:spPr>
-          <a:xfrm>
-            <a:off x="941832" y="1810512"/>
-            <a:ext cx="356616" cy="356616"/>
-          </a:xfrm>
-          <a:prstGeom prst="rect">
-            <a:avLst/>
-          </a:prstGeom>
-        </p:spPr>
-      </p:pic>
-      <p:sp>
-        <p:nvSpPr>
-          <p:cNvPr id="8" name="Text 5"/>
-          <p:cNvSpPr txBox="1"/>
-          <p:nvPr/>
-        </p:nvSpPr>
-        <p:spPr>
-          <a:xfrm>
-            <a:off x="1645920" y="1463040"/>
-            <a:ext cx="4061308" cy="1051560"/>
-          </a:xfrm>
-          <a:prstGeom prst="rect">
-            <a:avLst/>
-          </a:prstGeom>
-          <a:noFill/>
-          <a:ln/>
-        </p:spPr>
-        <p:txBody>
-          <a:bodyPr wrap="square" lIns="0" tIns="0" rIns="0" bIns="0" rtlCol="0" anchor="ctr"/>
-          <a:lstStyle/>
-          <a:p>
-            <a:pPr indent="0" marL="0">
-              <a:buNone/>
-            </a:pPr>
-            <a:r>
-              <a:rPr lang="en-US" sz="1800" dirty="0">
-                <a:solidFill>
-                  <a:schemeClr val="tx1"/>
-                </a:solidFill>
-              </a:rPr>
-              <a:t>La A habla de herramientas y hace afirmaciones sin justificar.</a:t>
-            </a:r>
-            <a:endParaRPr lang="en-US" sz="1800" dirty="0"/>
-          </a:p>
-        </p:txBody>
-      </p:sp>
-      <p:sp>
-        <p:nvSpPr>
-          <p:cNvPr id="9" name="Tarjeta"/>
-          <p:cNvSpPr/>
-          <p:nvPr/>
-        </p:nvSpPr>
-        <p:spPr>
-          <a:xfrm>
-            <a:off x="6301588" y="1463040"/>
-            <a:ext cx="5341468" cy="1051560"/>
-          </a:xfrm>
-          <a:prstGeom prst="roundRect">
-            <a:avLst>
-              <a:gd name="adj" fmla="val 13043"/>
-            </a:avLst>
-          </a:prstGeom>
-          <a:solidFill>
-            <a:schemeClr val="bg2"/>
-          </a:solidFill>
-          <a:ln/>
-        </p:spPr>
-      </p:sp>
-      <p:sp>
-        <p:nvSpPr>
-          <p:cNvPr id="10" name="La B parte del problema, explica la solución y dice cómo se medirá."/>
-          <p:cNvSpPr/>
-          <p:nvPr/>
-        </p:nvSpPr>
-        <p:spPr>
-          <a:xfrm>
-            <a:off x="6530188" y="1645920"/>
-            <a:ext cx="685800" cy="685800"/>
-          </a:xfrm>
-          <a:prstGeom prst="ellipse">
-            <a:avLst/>
-          </a:prstGeom>
-          <a:solidFill>
-            <a:schemeClr val="accent2"/>
-          </a:solidFill>
-          <a:ln/>
-        </p:spPr>
-      </p:sp>
-      <p:pic>
-        <p:nvPicPr>
-          <p:cNvPr id="11" name="Image 1" descr="La B parte del problema, explica la solución y dice cómo se medirá.">    </p:cNvPr>
-          <p:cNvPicPr>
-            <a:picLocks noChangeAspect="1"/>
-          </p:cNvPicPr>
-          <p:nvPr/>
-        </p:nvPicPr>
-        <p:blipFill>
-          <a:blip r:embed="rId2"/>
-          <a:stretch>
-            <a:fillRect/>
-          </a:stretch>
-        </p:blipFill>
-        <p:spPr>
-          <a:xfrm>
-            <a:off x="6694780" y="1810512"/>
-            <a:ext cx="356616" cy="356616"/>
-          </a:xfrm>
-          <a:prstGeom prst="rect">
-            <a:avLst/>
-          </a:prstGeom>
-        </p:spPr>
-      </p:pic>
-      <p:sp>
-        <p:nvSpPr>
-          <p:cNvPr id="12" name="Text 8"/>
-          <p:cNvSpPr txBox="1"/>
-          <p:nvPr/>
-        </p:nvSpPr>
-        <p:spPr>
-          <a:xfrm>
-            <a:off x="7398868" y="1463040"/>
-            <a:ext cx="4061308" cy="1051560"/>
-          </a:xfrm>
-          <a:prstGeom prst="rect">
-            <a:avLst/>
-          </a:prstGeom>
-          <a:noFill/>
-          <a:ln/>
-        </p:spPr>
-        <p:txBody>
-          <a:bodyPr wrap="square" lIns="0" tIns="0" rIns="0" bIns="0" rtlCol="0" anchor="ctr"/>
-          <a:lstStyle/>
-          <a:p>
-            <a:pPr indent="0" marL="0">
-              <a:buNone/>
-            </a:pPr>
-            <a:r>
-              <a:rPr lang="en-US" sz="1800" dirty="0">
-                <a:solidFill>
-                  <a:schemeClr val="tx1"/>
-                </a:solidFill>
-              </a:rPr>
-              <a:t>La B parte del problema, explica la solución y dice cómo se medirá.</a:t>
-            </a:r>
-            <a:endParaRPr lang="en-US" sz="1800" dirty="0"/>
-          </a:p>
-        </p:txBody>
-      </p:sp>
-      <p:sp>
-        <p:nvSpPr>
-          <p:cNvPr id="13" name="Paso 1"/>
-          <p:cNvSpPr/>
-          <p:nvPr/>
-        </p:nvSpPr>
-        <p:spPr>
-          <a:xfrm>
-            <a:off x="585216" y="2880360"/>
-            <a:ext cx="2145731" cy="1051560"/>
-          </a:xfrm>
-          <a:prstGeom prst="chevron">
-            <a:avLst/>
-          </a:prstGeom>
-          <a:solidFill>
-            <a:schemeClr val="tx1"/>
-          </a:solidFill>
-          <a:ln/>
-        </p:spPr>
-      </p:sp>
-      <p:sp>
-        <p:nvSpPr>
-          <p:cNvPr id="14" name="Text 10"/>
-          <p:cNvSpPr txBox="1"/>
-          <p:nvPr/>
-        </p:nvSpPr>
-        <p:spPr>
-          <a:xfrm>
-            <a:off x="822960" y="2880360"/>
-            <a:ext cx="1670243" cy="1051560"/>
-          </a:xfrm>
-          <a:prstGeom prst="rect">
-            <a:avLst/>
-          </a:prstGeom>
-          <a:noFill/>
-          <a:ln/>
-        </p:spPr>
-        <p:txBody>
-          <a:bodyPr wrap="square" lIns="0" tIns="0" rIns="0" bIns="0" rtlCol="0" anchor="ctr"/>
-          <a:lstStyle/>
-          <a:p>
-            <a:pPr algn="ctr" indent="0" marL="0">
-              <a:buNone/>
-            </a:pPr>
-            <a:r>
-              <a:rPr lang="en-US" sz="3000" b="1" dirty="0">
-                <a:solidFill>
-                  <a:schemeClr val="accent1"/>
-                </a:solidFill>
-              </a:rPr>
-              <a:t>1</a:t>
-            </a:r>
-            <a:endParaRPr lang="en-US" sz="3000" dirty="0"/>
-          </a:p>
-        </p:txBody>
-      </p:sp>
-      <p:sp>
-        <p:nvSpPr>
-          <p:cNvPr id="15" name="¿Qué problema hemos identificado?"/>
-          <p:cNvSpPr/>
-          <p:nvPr/>
-        </p:nvSpPr>
-        <p:spPr>
-          <a:xfrm>
-            <a:off x="1292322" y="4114800"/>
-            <a:ext cx="731520" cy="731520"/>
-          </a:xfrm>
-          <a:prstGeom prst="ellipse">
-            <a:avLst/>
-          </a:prstGeom>
-          <a:solidFill>
-            <a:schemeClr val="accent1"/>
-          </a:solidFill>
-          <a:ln/>
-        </p:spPr>
-      </p:sp>
-      <p:pic>
-        <p:nvPicPr>
-          <p:cNvPr id="16" name="Image 2" descr="¿Qué problema hemos identificado?">    </p:cNvPr>
+          <p:cNvPr id="7" name="Image 0" descr="La A habla de herramientas y hace afirmaciones sin justificar."/>
           <p:cNvPicPr>
             <a:picLocks noChangeAspect="1"/>
           </p:cNvPicPr>
@@ -6832,8 +5426,8 @@
         </p:blipFill>
         <p:spPr>
           <a:xfrm>
-            <a:off x="1467886" y="4290365"/>
-            <a:ext cx="380390" cy="380390"/>
+            <a:off x="941832" y="1810512"/>
+            <a:ext cx="356616" cy="356616"/>
           </a:xfrm>
           <a:prstGeom prst="rect">
             <a:avLst/>
@@ -6842,119 +5436,85 @@
       </p:pic>
       <p:sp>
         <p:nvSpPr>
-          <p:cNvPr id="17" name="Text 12"/>
+          <p:cNvPr id="8" name="Text 5"/>
           <p:cNvSpPr txBox="1"/>
           <p:nvPr/>
         </p:nvSpPr>
         <p:spPr>
           <a:xfrm>
-            <a:off x="640080" y="4983480"/>
-            <a:ext cx="2036003" cy="1005840"/>
-          </a:xfrm>
-          <a:prstGeom prst="rect">
-            <a:avLst/>
-          </a:prstGeom>
-          <a:noFill/>
-          <a:ln/>
-        </p:spPr>
-        <p:txBody>
-          <a:bodyPr wrap="square" lIns="0" tIns="0" rIns="0" bIns="0" rtlCol="0" anchor="t"/>
-          <a:lstStyle/>
-          <a:p>
-            <a:pPr algn="ctr" indent="0" marL="0">
-              <a:buNone/>
-            </a:pPr>
-            <a:r>
-              <a:rPr lang="en-US" sz="1600" b="1" dirty="0">
+            <a:off x="1645920" y="1463040"/>
+            <a:ext cx="4061308" cy="1051560"/>
+          </a:xfrm>
+          <a:prstGeom prst="rect">
+            <a:avLst/>
+          </a:prstGeom>
+          <a:noFill/>
+          <a:ln/>
+        </p:spPr>
+        <p:txBody>
+          <a:bodyPr wrap="square" lIns="0" tIns="0" rIns="0" bIns="0" rtlCol="0" anchor="ctr"/>
+          <a:lstStyle/>
+          <a:p>
+            <a:pPr marL="0" indent="0">
+              <a:buNone/>
+            </a:pPr>
+            <a:r>
+              <a:rPr lang="en-US" sz="1800" dirty="0">
                 <a:solidFill>
                   <a:schemeClr val="tx1"/>
                 </a:solidFill>
               </a:rPr>
-              <a:t>¿Qué problema hemos identificado?</a:t>
-            </a:r>
-            <a:endParaRPr lang="en-US" sz="1600" dirty="0"/>
-          </a:p>
-        </p:txBody>
-      </p:sp>
-      <p:sp>
-        <p:nvSpPr>
-          <p:cNvPr id="18" name="Paso 2"/>
+              <a:t>La A habla de herramientas y hace afirmaciones sin justificar.</a:t>
+            </a:r>
+            <a:endParaRPr lang="en-US" sz="1800" dirty="0"/>
+          </a:p>
+        </p:txBody>
+      </p:sp>
+      <p:sp>
+        <p:nvSpPr>
+          <p:cNvPr id="9" name="Tarjeta"/>
           <p:cNvSpPr/>
           <p:nvPr/>
         </p:nvSpPr>
         <p:spPr>
           <a:xfrm>
-            <a:off x="2804099" y="2880360"/>
-            <a:ext cx="2145731" cy="1051560"/>
-          </a:xfrm>
-          <a:prstGeom prst="chevron">
-            <a:avLst/>
-          </a:prstGeom>
-          <a:solidFill>
-            <a:schemeClr val="tx2"/>
-          </a:solidFill>
-          <a:ln/>
-        </p:spPr>
-      </p:sp>
-      <p:sp>
-        <p:nvSpPr>
-          <p:cNvPr id="19" name="Text 14"/>
-          <p:cNvSpPr txBox="1"/>
-          <p:nvPr/>
-        </p:nvSpPr>
-        <p:spPr>
-          <a:xfrm>
-            <a:off x="3041843" y="2880360"/>
-            <a:ext cx="1670243" cy="1051560"/>
-          </a:xfrm>
-          <a:prstGeom prst="rect">
-            <a:avLst/>
-          </a:prstGeom>
-          <a:noFill/>
-          <a:ln/>
-        </p:spPr>
-        <p:txBody>
-          <a:bodyPr wrap="square" lIns="0" tIns="0" rIns="0" bIns="0" rtlCol="0" anchor="ctr"/>
-          <a:lstStyle/>
-          <a:p>
-            <a:pPr algn="ctr" indent="0" marL="0">
-              <a:buNone/>
-            </a:pPr>
-            <a:r>
-              <a:rPr lang="en-US" sz="3000" b="1" dirty="0">
-                <a:solidFill>
-                  <a:schemeClr val="accent1"/>
-                </a:solidFill>
-              </a:rPr>
-              <a:t>2</a:t>
-            </a:r>
-            <a:endParaRPr lang="en-US" sz="3000" dirty="0"/>
-          </a:p>
-        </p:txBody>
-      </p:sp>
-      <p:sp>
-        <p:nvSpPr>
-          <p:cNvPr id="20" name="¿Por qué conviene resolverlo?"/>
+            <a:off x="6301588" y="1463040"/>
+            <a:ext cx="5341468" cy="1051560"/>
+          </a:xfrm>
+          <a:prstGeom prst="roundRect">
+            <a:avLst>
+              <a:gd name="adj" fmla="val 13043"/>
+            </a:avLst>
+          </a:prstGeom>
+          <a:solidFill>
+            <a:schemeClr val="bg2"/>
+          </a:solidFill>
+          <a:ln/>
+        </p:spPr>
+      </p:sp>
+      <p:sp>
+        <p:nvSpPr>
+          <p:cNvPr id="10" name="La B parte del problema, explica la solución y dice cómo se medirá."/>
           <p:cNvSpPr/>
           <p:nvPr/>
         </p:nvSpPr>
         <p:spPr>
           <a:xfrm>
-            <a:off x="3511205" y="4114800"/>
-            <a:ext cx="731520" cy="731520"/>
+            <a:off x="6530188" y="1645920"/>
+            <a:ext cx="685800" cy="685800"/>
           </a:xfrm>
           <a:prstGeom prst="ellipse">
             <a:avLst/>
           </a:prstGeom>
           <a:solidFill>
-            <a:schemeClr val="accent1"/>
+            <a:schemeClr val="accent2"/>
           </a:solidFill>
           <a:ln/>
         </p:spPr>
       </p:sp>
       <p:pic>
         <p:nvPicPr>
-          <p:cNvPr id="21" name="Image 3" descr="¿Por qué conviene resolverlo?">    </p:cNvPr>
+          <p:cNvPr id="11" name="Image 1" descr="La B parte del problema, explica la solución y dice cómo se medirá."/>
           <p:cNvPicPr>
             <a:picLocks noChangeAspect="1"/>
           </p:cNvPicPr>
@@ -6968,8 +5528,8 @@
         </p:blipFill>
         <p:spPr>
           <a:xfrm>
-            <a:off x="3686769" y="4290365"/>
-            <a:ext cx="380390" cy="380390"/>
+            <a:off x="6694780" y="1810512"/>
+            <a:ext cx="356616" cy="356616"/>
           </a:xfrm>
           <a:prstGeom prst="rect">
             <a:avLst/>
@@ -6978,49 +5538,49 @@
       </p:pic>
       <p:sp>
         <p:nvSpPr>
-          <p:cNvPr id="22" name="Text 16"/>
+          <p:cNvPr id="12" name="Text 8"/>
           <p:cNvSpPr txBox="1"/>
           <p:nvPr/>
         </p:nvSpPr>
         <p:spPr>
           <a:xfrm>
-            <a:off x="2858963" y="4983480"/>
-            <a:ext cx="2036003" cy="1005840"/>
-          </a:xfrm>
-          <a:prstGeom prst="rect">
-            <a:avLst/>
-          </a:prstGeom>
-          <a:noFill/>
-          <a:ln/>
-        </p:spPr>
-        <p:txBody>
-          <a:bodyPr wrap="square" lIns="0" tIns="0" rIns="0" bIns="0" rtlCol="0" anchor="t"/>
-          <a:lstStyle/>
-          <a:p>
-            <a:pPr algn="ctr" indent="0" marL="0">
-              <a:buNone/>
-            </a:pPr>
-            <a:r>
-              <a:rPr lang="en-US" sz="1600" b="1" dirty="0">
+            <a:off x="7398868" y="1463040"/>
+            <a:ext cx="4061308" cy="1051560"/>
+          </a:xfrm>
+          <a:prstGeom prst="rect">
+            <a:avLst/>
+          </a:prstGeom>
+          <a:noFill/>
+          <a:ln/>
+        </p:spPr>
+        <p:txBody>
+          <a:bodyPr wrap="square" lIns="0" tIns="0" rIns="0" bIns="0" rtlCol="0" anchor="ctr"/>
+          <a:lstStyle/>
+          <a:p>
+            <a:pPr marL="0" indent="0">
+              <a:buNone/>
+            </a:pPr>
+            <a:r>
+              <a:rPr lang="en-US" sz="1800" dirty="0">
                 <a:solidFill>
                   <a:schemeClr val="tx1"/>
                 </a:solidFill>
               </a:rPr>
-              <a:t>¿Por qué conviene resolverlo?</a:t>
-            </a:r>
-            <a:endParaRPr lang="en-US" sz="1600" dirty="0"/>
-          </a:p>
-        </p:txBody>
-      </p:sp>
-      <p:sp>
-        <p:nvSpPr>
-          <p:cNvPr id="23" name="Paso 3"/>
+              <a:t>La B parte del problema, explica la solución y dice cómo se medirá.</a:t>
+            </a:r>
+            <a:endParaRPr lang="en-US" sz="1800" dirty="0"/>
+          </a:p>
+        </p:txBody>
+      </p:sp>
+      <p:sp>
+        <p:nvSpPr>
+          <p:cNvPr id="13" name="Paso 1"/>
           <p:cNvSpPr/>
           <p:nvPr/>
         </p:nvSpPr>
         <p:spPr>
           <a:xfrm>
-            <a:off x="5022982" y="2880360"/>
+            <a:off x="585216" y="2880360"/>
             <a:ext cx="2145731" cy="1051560"/>
           </a:xfrm>
           <a:prstGeom prst="chevron">
@@ -7034,13 +5594,13 @@
       </p:sp>
       <p:sp>
         <p:nvSpPr>
-          <p:cNvPr id="24" name="Text 18"/>
+          <p:cNvPr id="14" name="Text 10"/>
           <p:cNvSpPr txBox="1"/>
           <p:nvPr/>
         </p:nvSpPr>
         <p:spPr>
           <a:xfrm>
-            <a:off x="5260726" y="2880360"/>
+            <a:off x="822960" y="2880360"/>
             <a:ext cx="1670243" cy="1051560"/>
           </a:xfrm>
           <a:prstGeom prst="rect">
@@ -7053,7 +5613,7 @@
           <a:bodyPr wrap="square" lIns="0" tIns="0" rIns="0" bIns="0" rtlCol="0" anchor="ctr"/>
           <a:lstStyle/>
           <a:p>
-            <a:pPr algn="ctr" indent="0" marL="0">
+            <a:pPr marL="0" indent="0" algn="ctr">
               <a:buNone/>
             </a:pPr>
             <a:r>
@@ -7062,7 +5622,7 @@
                   <a:schemeClr val="accent1"/>
                 </a:solidFill>
               </a:rPr>
-              <a:t>3</a:t>
+              <a:t>1</a:t>
             </a:r>
             <a:endParaRPr lang="en-US" sz="3000" dirty="0"/>
           </a:p>
@@ -7070,13 +5630,13 @@
       </p:sp>
       <p:sp>
         <p:nvSpPr>
-          <p:cNvPr id="25" name="¿Qué proponemos?"/>
+          <p:cNvPr id="15" name="¿Qué problema hemos identificado?"/>
           <p:cNvSpPr/>
           <p:nvPr/>
         </p:nvSpPr>
         <p:spPr>
           <a:xfrm>
-            <a:off x="5730088" y="4114800"/>
+            <a:off x="1292322" y="4114800"/>
             <a:ext cx="731520" cy="731520"/>
           </a:xfrm>
           <a:prstGeom prst="ellipse">
@@ -7090,7 +5650,7 @@
       </p:sp>
       <p:pic>
         <p:nvPicPr>
-          <p:cNvPr id="26" name="Image 4" descr="¿Qué proponemos?">    </p:cNvPr>
+          <p:cNvPr id="16" name="Image 2" descr="¿Qué problema hemos identificado?"/>
           <p:cNvPicPr>
             <a:picLocks noChangeAspect="1"/>
           </p:cNvPicPr>
@@ -7104,7 +5664,7 @@
         </p:blipFill>
         <p:spPr>
           <a:xfrm>
-            <a:off x="5905652" y="4290365"/>
+            <a:off x="1467886" y="4290365"/>
             <a:ext cx="380390" cy="380390"/>
           </a:xfrm>
           <a:prstGeom prst="rect">
@@ -7114,13 +5674,13 @@
       </p:pic>
       <p:sp>
         <p:nvSpPr>
-          <p:cNvPr id="27" name="Text 20"/>
+          <p:cNvPr id="17" name="Text 12"/>
           <p:cNvSpPr txBox="1"/>
           <p:nvPr/>
         </p:nvSpPr>
         <p:spPr>
           <a:xfrm>
-            <a:off x="5077846" y="4983480"/>
+            <a:off x="640080" y="4983480"/>
             <a:ext cx="2036003" cy="1005840"/>
           </a:xfrm>
           <a:prstGeom prst="rect">
@@ -7133,7 +5693,7 @@
           <a:bodyPr wrap="square" lIns="0" tIns="0" rIns="0" bIns="0" rtlCol="0" anchor="t"/>
           <a:lstStyle/>
           <a:p>
-            <a:pPr algn="ctr" indent="0" marL="0">
+            <a:pPr marL="0" indent="0" algn="ctr">
               <a:buNone/>
             </a:pPr>
             <a:r>
@@ -7142,7 +5702,7 @@
                   <a:schemeClr val="tx1"/>
                 </a:solidFill>
               </a:rPr>
-              <a:t>¿Qué proponemos?</a:t>
+              <a:t>¿Qué problema hemos identificado?</a:t>
             </a:r>
             <a:endParaRPr lang="en-US" sz="1600" dirty="0"/>
           </a:p>
@@ -7150,13 +5710,13 @@
       </p:sp>
       <p:sp>
         <p:nvSpPr>
-          <p:cNvPr id="28" name="Paso 4"/>
+          <p:cNvPr id="18" name="Paso 2"/>
           <p:cNvSpPr/>
           <p:nvPr/>
         </p:nvSpPr>
         <p:spPr>
           <a:xfrm>
-            <a:off x="7241865" y="2880360"/>
+            <a:off x="2804099" y="2880360"/>
             <a:ext cx="2145731" cy="1051560"/>
           </a:xfrm>
           <a:prstGeom prst="chevron">
@@ -7170,13 +5730,13 @@
       </p:sp>
       <p:sp>
         <p:nvSpPr>
-          <p:cNvPr id="29" name="Text 22"/>
+          <p:cNvPr id="19" name="Text 14"/>
           <p:cNvSpPr txBox="1"/>
           <p:nvPr/>
         </p:nvSpPr>
         <p:spPr>
           <a:xfrm>
-            <a:off x="7479609" y="2880360"/>
+            <a:off x="3041843" y="2880360"/>
             <a:ext cx="1670243" cy="1051560"/>
           </a:xfrm>
           <a:prstGeom prst="rect">
@@ -7189,7 +5749,7 @@
           <a:bodyPr wrap="square" lIns="0" tIns="0" rIns="0" bIns="0" rtlCol="0" anchor="ctr"/>
           <a:lstStyle/>
           <a:p>
-            <a:pPr algn="ctr" indent="0" marL="0">
+            <a:pPr marL="0" indent="0" algn="ctr">
               <a:buNone/>
             </a:pPr>
             <a:r>
@@ -7198,7 +5758,7 @@
                   <a:schemeClr val="accent1"/>
                 </a:solidFill>
               </a:rPr>
-              <a:t>4</a:t>
+              <a:t>2</a:t>
             </a:r>
             <a:endParaRPr lang="en-US" sz="3000" dirty="0"/>
           </a:p>
@@ -7206,13 +5766,13 @@
       </p:sp>
       <p:sp>
         <p:nvSpPr>
-          <p:cNvPr id="30" name="¿Cómo lo pondríamos en práctica?"/>
+          <p:cNvPr id="20" name="¿Por qué conviene resolverlo?"/>
           <p:cNvSpPr/>
           <p:nvPr/>
         </p:nvSpPr>
         <p:spPr>
           <a:xfrm>
-            <a:off x="7948971" y="4114800"/>
+            <a:off x="3511205" y="4114800"/>
             <a:ext cx="731520" cy="731520"/>
           </a:xfrm>
           <a:prstGeom prst="ellipse">
@@ -7226,7 +5786,7 @@
       </p:sp>
       <p:pic>
         <p:nvPicPr>
-          <p:cNvPr id="31" name="Image 5" descr="¿Cómo lo pondríamos en práctica?">    </p:cNvPr>
+          <p:cNvPr id="21" name="Image 3" descr="¿Por qué conviene resolverlo?"/>
           <p:cNvPicPr>
             <a:picLocks noChangeAspect="1"/>
           </p:cNvPicPr>
@@ -7240,7 +5800,7 @@
         </p:blipFill>
         <p:spPr>
           <a:xfrm>
-            <a:off x="8124535" y="4290365"/>
+            <a:off x="3686769" y="4290365"/>
             <a:ext cx="380390" cy="380390"/>
           </a:xfrm>
           <a:prstGeom prst="rect">
@@ -7250,13 +5810,13 @@
       </p:pic>
       <p:sp>
         <p:nvSpPr>
-          <p:cNvPr id="32" name="Text 24"/>
+          <p:cNvPr id="22" name="Text 16"/>
           <p:cNvSpPr txBox="1"/>
           <p:nvPr/>
         </p:nvSpPr>
         <p:spPr>
           <a:xfrm>
-            <a:off x="7296729" y="4983480"/>
+            <a:off x="2858963" y="4983480"/>
             <a:ext cx="2036003" cy="1005840"/>
           </a:xfrm>
           <a:prstGeom prst="rect">
@@ -7269,7 +5829,7 @@
           <a:bodyPr wrap="square" lIns="0" tIns="0" rIns="0" bIns="0" rtlCol="0" anchor="t"/>
           <a:lstStyle/>
           <a:p>
-            <a:pPr algn="ctr" indent="0" marL="0">
+            <a:pPr marL="0" indent="0" algn="ctr">
               <a:buNone/>
             </a:pPr>
             <a:r>
@@ -7278,7 +5838,7 @@
                   <a:schemeClr val="tx1"/>
                 </a:solidFill>
               </a:rPr>
-              <a:t>¿Cómo lo pondríamos en práctica?</a:t>
+              <a:t>¿Por qué conviene resolverlo?</a:t>
             </a:r>
             <a:endParaRPr lang="en-US" sz="1600" dirty="0"/>
           </a:p>
@@ -7286,13 +5846,13 @@
       </p:sp>
       <p:sp>
         <p:nvSpPr>
-          <p:cNvPr id="33" name="Paso 5"/>
+          <p:cNvPr id="23" name="Paso 3"/>
           <p:cNvSpPr/>
           <p:nvPr/>
         </p:nvSpPr>
         <p:spPr>
           <a:xfrm>
-            <a:off x="9460748" y="2880360"/>
+            <a:off x="5022982" y="2880360"/>
             <a:ext cx="2145731" cy="1051560"/>
           </a:xfrm>
           <a:prstGeom prst="chevron">
@@ -7306,13 +5866,13 @@
       </p:sp>
       <p:sp>
         <p:nvSpPr>
-          <p:cNvPr id="34" name="Text 26"/>
+          <p:cNvPr id="24" name="Text 18"/>
           <p:cNvSpPr txBox="1"/>
           <p:nvPr/>
         </p:nvSpPr>
         <p:spPr>
           <a:xfrm>
-            <a:off x="9698492" y="2880360"/>
+            <a:off x="5260726" y="2880360"/>
             <a:ext cx="1670243" cy="1051560"/>
           </a:xfrm>
           <a:prstGeom prst="rect">
@@ -7325,7 +5885,7 @@
           <a:bodyPr wrap="square" lIns="0" tIns="0" rIns="0" bIns="0" rtlCol="0" anchor="ctr"/>
           <a:lstStyle/>
           <a:p>
-            <a:pPr algn="ctr" indent="0" marL="0">
+            <a:pPr marL="0" indent="0" algn="ctr">
               <a:buNone/>
             </a:pPr>
             <a:r>
@@ -7334,7 +5894,7 @@
                   <a:schemeClr val="accent1"/>
                 </a:solidFill>
               </a:rPr>
-              <a:t>5</a:t>
+              <a:t>3</a:t>
             </a:r>
             <a:endParaRPr lang="en-US" sz="3000" dirty="0"/>
           </a:p>
@@ -7342,13 +5902,13 @@
       </p:sp>
       <p:sp>
         <p:nvSpPr>
-          <p:cNvPr id="35" name="¿Qué resultados esperaríamos y cómo los mediríamos?"/>
+          <p:cNvPr id="25" name="¿Qué proponemos?"/>
           <p:cNvSpPr/>
           <p:nvPr/>
         </p:nvSpPr>
         <p:spPr>
           <a:xfrm>
-            <a:off x="10167854" y="4114800"/>
+            <a:off x="5730088" y="4114800"/>
             <a:ext cx="731520" cy="731520"/>
           </a:xfrm>
           <a:prstGeom prst="ellipse">
@@ -7362,7 +5922,7 @@
       </p:sp>
       <p:pic>
         <p:nvPicPr>
-          <p:cNvPr id="36" name="Image 6" descr="¿Qué resultados esperaríamos y cómo los mediríamos?">    </p:cNvPr>
+          <p:cNvPr id="26" name="Image 4" descr="¿Qué proponemos?"/>
           <p:cNvPicPr>
             <a:picLocks noChangeAspect="1"/>
           </p:cNvPicPr>
@@ -7376,6 +5936,278 @@
         </p:blipFill>
         <p:spPr>
           <a:xfrm>
+            <a:off x="5905652" y="4290365"/>
+            <a:ext cx="380390" cy="380390"/>
+          </a:xfrm>
+          <a:prstGeom prst="rect">
+            <a:avLst/>
+          </a:prstGeom>
+        </p:spPr>
+      </p:pic>
+      <p:sp>
+        <p:nvSpPr>
+          <p:cNvPr id="27" name="Text 20"/>
+          <p:cNvSpPr txBox="1"/>
+          <p:nvPr/>
+        </p:nvSpPr>
+        <p:spPr>
+          <a:xfrm>
+            <a:off x="5077846" y="4983480"/>
+            <a:ext cx="2036003" cy="1005840"/>
+          </a:xfrm>
+          <a:prstGeom prst="rect">
+            <a:avLst/>
+          </a:prstGeom>
+          <a:noFill/>
+          <a:ln/>
+        </p:spPr>
+        <p:txBody>
+          <a:bodyPr wrap="square" lIns="0" tIns="0" rIns="0" bIns="0" rtlCol="0" anchor="t"/>
+          <a:lstStyle/>
+          <a:p>
+            <a:pPr marL="0" indent="0" algn="ctr">
+              <a:buNone/>
+            </a:pPr>
+            <a:r>
+              <a:rPr lang="en-US" sz="1600" b="1" dirty="0">
+                <a:solidFill>
+                  <a:schemeClr val="tx1"/>
+                </a:solidFill>
+              </a:rPr>
+              <a:t>¿Qué proponemos?</a:t>
+            </a:r>
+            <a:endParaRPr lang="en-US" sz="1600" dirty="0"/>
+          </a:p>
+        </p:txBody>
+      </p:sp>
+      <p:sp>
+        <p:nvSpPr>
+          <p:cNvPr id="28" name="Paso 4"/>
+          <p:cNvSpPr/>
+          <p:nvPr/>
+        </p:nvSpPr>
+        <p:spPr>
+          <a:xfrm>
+            <a:off x="7241865" y="2880360"/>
+            <a:ext cx="2145731" cy="1051560"/>
+          </a:xfrm>
+          <a:prstGeom prst="chevron">
+            <a:avLst/>
+          </a:prstGeom>
+          <a:solidFill>
+            <a:schemeClr val="tx2"/>
+          </a:solidFill>
+          <a:ln/>
+        </p:spPr>
+      </p:sp>
+      <p:sp>
+        <p:nvSpPr>
+          <p:cNvPr id="29" name="Text 22"/>
+          <p:cNvSpPr txBox="1"/>
+          <p:nvPr/>
+        </p:nvSpPr>
+        <p:spPr>
+          <a:xfrm>
+            <a:off x="7479609" y="2880360"/>
+            <a:ext cx="1670243" cy="1051560"/>
+          </a:xfrm>
+          <a:prstGeom prst="rect">
+            <a:avLst/>
+          </a:prstGeom>
+          <a:noFill/>
+          <a:ln/>
+        </p:spPr>
+        <p:txBody>
+          <a:bodyPr wrap="square" lIns="0" tIns="0" rIns="0" bIns="0" rtlCol="0" anchor="ctr"/>
+          <a:lstStyle/>
+          <a:p>
+            <a:pPr marL="0" indent="0" algn="ctr">
+              <a:buNone/>
+            </a:pPr>
+            <a:r>
+              <a:rPr lang="en-US" sz="3000" b="1" dirty="0">
+                <a:solidFill>
+                  <a:schemeClr val="accent1"/>
+                </a:solidFill>
+              </a:rPr>
+              <a:t>4</a:t>
+            </a:r>
+            <a:endParaRPr lang="en-US" sz="3000" dirty="0"/>
+          </a:p>
+        </p:txBody>
+      </p:sp>
+      <p:sp>
+        <p:nvSpPr>
+          <p:cNvPr id="30" name="¿Cómo lo pondríamos en práctica?"/>
+          <p:cNvSpPr/>
+          <p:nvPr/>
+        </p:nvSpPr>
+        <p:spPr>
+          <a:xfrm>
+            <a:off x="7948971" y="4114800"/>
+            <a:ext cx="731520" cy="731520"/>
+          </a:xfrm>
+          <a:prstGeom prst="ellipse">
+            <a:avLst/>
+          </a:prstGeom>
+          <a:solidFill>
+            <a:schemeClr val="accent1"/>
+          </a:solidFill>
+          <a:ln/>
+        </p:spPr>
+      </p:sp>
+      <p:pic>
+        <p:nvPicPr>
+          <p:cNvPr id="31" name="Image 5" descr="¿Cómo lo pondríamos en práctica?"/>
+          <p:cNvPicPr>
+            <a:picLocks noChangeAspect="1"/>
+          </p:cNvPicPr>
+          <p:nvPr/>
+        </p:nvPicPr>
+        <p:blipFill>
+          <a:blip r:embed="rId8"/>
+          <a:stretch>
+            <a:fillRect/>
+          </a:stretch>
+        </p:blipFill>
+        <p:spPr>
+          <a:xfrm>
+            <a:off x="8124535" y="4290365"/>
+            <a:ext cx="380390" cy="380390"/>
+          </a:xfrm>
+          <a:prstGeom prst="rect">
+            <a:avLst/>
+          </a:prstGeom>
+        </p:spPr>
+      </p:pic>
+      <p:sp>
+        <p:nvSpPr>
+          <p:cNvPr id="32" name="Text 24"/>
+          <p:cNvSpPr txBox="1"/>
+          <p:nvPr/>
+        </p:nvSpPr>
+        <p:spPr>
+          <a:xfrm>
+            <a:off x="7296729" y="4983480"/>
+            <a:ext cx="2036003" cy="1005840"/>
+          </a:xfrm>
+          <a:prstGeom prst="rect">
+            <a:avLst/>
+          </a:prstGeom>
+          <a:noFill/>
+          <a:ln/>
+        </p:spPr>
+        <p:txBody>
+          <a:bodyPr wrap="square" lIns="0" tIns="0" rIns="0" bIns="0" rtlCol="0" anchor="t"/>
+          <a:lstStyle/>
+          <a:p>
+            <a:pPr marL="0" indent="0" algn="ctr">
+              <a:buNone/>
+            </a:pPr>
+            <a:r>
+              <a:rPr lang="en-US" sz="1600" b="1" dirty="0">
+                <a:solidFill>
+                  <a:schemeClr val="tx1"/>
+                </a:solidFill>
+              </a:rPr>
+              <a:t>¿Cómo lo pondríamos en práctica?</a:t>
+            </a:r>
+            <a:endParaRPr lang="en-US" sz="1600" dirty="0"/>
+          </a:p>
+        </p:txBody>
+      </p:sp>
+      <p:sp>
+        <p:nvSpPr>
+          <p:cNvPr id="33" name="Paso 5"/>
+          <p:cNvSpPr/>
+          <p:nvPr/>
+        </p:nvSpPr>
+        <p:spPr>
+          <a:xfrm>
+            <a:off x="9460748" y="2880360"/>
+            <a:ext cx="2145731" cy="1051560"/>
+          </a:xfrm>
+          <a:prstGeom prst="chevron">
+            <a:avLst/>
+          </a:prstGeom>
+          <a:solidFill>
+            <a:schemeClr val="tx1"/>
+          </a:solidFill>
+          <a:ln/>
+        </p:spPr>
+      </p:sp>
+      <p:sp>
+        <p:nvSpPr>
+          <p:cNvPr id="34" name="Text 26"/>
+          <p:cNvSpPr txBox="1"/>
+          <p:nvPr/>
+        </p:nvSpPr>
+        <p:spPr>
+          <a:xfrm>
+            <a:off x="9698492" y="2880360"/>
+            <a:ext cx="1670243" cy="1051560"/>
+          </a:xfrm>
+          <a:prstGeom prst="rect">
+            <a:avLst/>
+          </a:prstGeom>
+          <a:noFill/>
+          <a:ln/>
+        </p:spPr>
+        <p:txBody>
+          <a:bodyPr wrap="square" lIns="0" tIns="0" rIns="0" bIns="0" rtlCol="0" anchor="ctr"/>
+          <a:lstStyle/>
+          <a:p>
+            <a:pPr marL="0" indent="0" algn="ctr">
+              <a:buNone/>
+            </a:pPr>
+            <a:r>
+              <a:rPr lang="en-US" sz="3000" b="1" dirty="0">
+                <a:solidFill>
+                  <a:schemeClr val="accent1"/>
+                </a:solidFill>
+              </a:rPr>
+              <a:t>5</a:t>
+            </a:r>
+            <a:endParaRPr lang="en-US" sz="3000" dirty="0"/>
+          </a:p>
+        </p:txBody>
+      </p:sp>
+      <p:sp>
+        <p:nvSpPr>
+          <p:cNvPr id="35" name="¿Qué resultados esperaríamos y cómo los mediríamos?"/>
+          <p:cNvSpPr/>
+          <p:nvPr/>
+        </p:nvSpPr>
+        <p:spPr>
+          <a:xfrm>
+            <a:off x="10167854" y="4114800"/>
+            <a:ext cx="731520" cy="731520"/>
+          </a:xfrm>
+          <a:prstGeom prst="ellipse">
+            <a:avLst/>
+          </a:prstGeom>
+          <a:solidFill>
+            <a:schemeClr val="accent1"/>
+          </a:solidFill>
+          <a:ln/>
+        </p:spPr>
+      </p:sp>
+      <p:pic>
+        <p:nvPicPr>
+          <p:cNvPr id="36" name="Image 6" descr="¿Qué resultados esperaríamos y cómo los mediríamos?"/>
+          <p:cNvPicPr>
+            <a:picLocks noChangeAspect="1"/>
+          </p:cNvPicPr>
+          <p:nvPr/>
+        </p:nvPicPr>
+        <p:blipFill>
+          <a:blip r:embed="rId9"/>
+          <a:stretch>
+            <a:fillRect/>
+          </a:stretch>
+        </p:blipFill>
+        <p:spPr>
+          <a:xfrm>
             <a:off x="10343418" y="4290365"/>
             <a:ext cx="380390" cy="380390"/>
           </a:xfrm>
@@ -7405,7 +6237,7 @@
           <a:bodyPr wrap="square" lIns="0" tIns="0" rIns="0" bIns="0" rtlCol="0" anchor="t"/>
           <a:lstStyle/>
           <a:p>
-            <a:pPr algn="ctr" indent="0" marL="0">
+            <a:pPr marL="0" indent="0" algn="ctr">
               <a:buNone/>
             </a:pPr>
             <a:r>
@@ -7422,7 +6254,7 @@
       </p:sp>
       <p:sp>
         <p:nvSpPr>
-          <p:cNvPr id="25" name="Slide Number Placeholder 0"/>
+          <p:cNvPr id="38" name="Slide Number Placeholder 0"/>
           <p:cNvSpPr>
             <a:spLocks noGrp="1"/>
           </p:cNvSpPr>
@@ -7440,7 +6272,7 @@
           </a:prstGeom>
           <a:extLst>
             <a:ext uri="{C572A759-6A51-4108-AA02-DFA0A04FC94B}">
-              <ma14:wrappingTextBoxFlag xmlns:ma14="http://schemas.microsoft.com/office/mac/drawingml/2011/main" val="0"/>
+              <ma14:wrappingTextBoxFlag xmlns:ma14="http://schemas.microsoft.com/office/mac/drawingml/2011/main" xmlns="" val="0"/>
             </a:ext>
           </a:extLst>
         </p:spPr>
@@ -7458,7 +6290,7 @@
           <a:p>
             <a:pPr algn="r"/>
             <a:fld id="{F7021451-1387-4CA6-816F-3879F97B5CBC}" type="slidenum">
-              <a:rPr b="0" lang="en-US"/>
+              <a:rPr lang="en-US" b="0"/>
               <a:t>4</a:t>
             </a:fld>
             <a:endParaRPr lang="en-US"/>
@@ -7493,9 +6325,11 @@
       <p:sp>
         <p:nvSpPr>
           <p:cNvPr id="2" name="Text 0"/>
-          <p:cNvSpPr/>
+          <p:cNvSpPr>
+            <a:spLocks noGrp="1"/>
+          </p:cNvSpPr>
           <p:nvPr>
-            <p:ph idx="100" type="title" hasCustomPrompt="1"/>
+            <p:ph type="title" idx="100" hasCustomPrompt="1"/>
           </p:nvPr>
         </p:nvSpPr>
         <p:spPr>
@@ -7513,7 +6347,7 @@
           <a:bodyPr wrap="square" lIns="0" tIns="0" rIns="0" bIns="0" rtlCol="0" anchor="ctr"/>
           <a:lstStyle/>
           <a:p>
-            <a:pPr algn="l" indent="0" marL="0">
+            <a:pPr marL="0" indent="0" algn="l">
               <a:buNone/>
             </a:pPr>
             <a:r>
@@ -7571,7 +6405,7 @@
           <a:bodyPr wrap="square" lIns="0" tIns="0" rIns="0" bIns="0" rtlCol="0" anchor="ctr"/>
           <a:lstStyle/>
           <a:p>
-            <a:pPr algn="ctr" indent="0" marL="0">
+            <a:pPr marL="0" indent="0" algn="ctr">
               <a:buNone/>
             </a:pPr>
             <a:r>
@@ -7607,7 +6441,7 @@
           <a:bodyPr wrap="square" lIns="0" tIns="0" rIns="0" bIns="0" rtlCol="0" anchor="ctr"/>
           <a:lstStyle/>
           <a:p>
-            <a:pPr indent="0" marL="0">
+            <a:pPr marL="0" indent="0">
               <a:buNone/>
             </a:pPr>
             <a:r>
@@ -7666,14 +6500,14 @@
       </p:sp>
       <p:pic>
         <p:nvPicPr>
-          <p:cNvPr id="8" name="Image 0" descr="Modelo">    </p:cNvPr>
+          <p:cNvPr id="8" name="Image 0" descr="Modelo"/>
           <p:cNvPicPr>
             <a:picLocks noChangeAspect="1"/>
           </p:cNvPicPr>
           <p:nvPr/>
         </p:nvPicPr>
         <p:blipFill>
-          <a:blip r:embed="rId1"/>
+          <a:blip r:embed="rId3"/>
           <a:stretch>
             <a:fillRect/>
           </a:stretch>
@@ -7709,7 +6543,7 @@
           <a:bodyPr wrap="square" lIns="0" tIns="0" rIns="0" bIns="0" rtlCol="0" anchor="ctr"/>
           <a:lstStyle/>
           <a:p>
-            <a:pPr indent="0" marL="0">
+            <a:pPr marL="0" indent="0">
               <a:buNone/>
             </a:pPr>
             <a:r>
@@ -7745,7 +6579,7 @@
           <a:bodyPr wrap="square" lIns="0" tIns="0" rIns="0" bIns="0" rtlCol="0" anchor="ctr"/>
           <a:lstStyle/>
           <a:p>
-            <a:pPr indent="0" marL="0">
+            <a:pPr marL="0" indent="0">
               <a:buNone/>
             </a:pPr>
             <a:r>
@@ -7807,7 +6641,7 @@
           </a:prstGeom>
           <a:extLst>
             <a:ext uri="{C572A759-6A51-4108-AA02-DFA0A04FC94B}">
-              <ma14:wrappingTextBoxFlag xmlns:ma14="http://schemas.microsoft.com/office/mac/drawingml/2011/main" val="0"/>
+              <ma14:wrappingTextBoxFlag xmlns:ma14="http://schemas.microsoft.com/office/mac/drawingml/2011/main" xmlns="" val="0"/>
             </a:ext>
           </a:extLst>
         </p:spPr>
@@ -7825,7 +6659,7 @@
           <a:p>
             <a:pPr algn="r"/>
             <a:fld id="{F7021451-1387-4CA6-816F-3879F97B5CBC}" type="slidenum">
-              <a:rPr b="0" lang="en-US"/>
+              <a:rPr lang="en-US" b="0"/>
               <a:t>5</a:t>
             </a:fld>
             <a:endParaRPr lang="en-US"/>
@@ -7860,9 +6694,11 @@
       <p:sp>
         <p:nvSpPr>
           <p:cNvPr id="2" name="Text 0"/>
-          <p:cNvSpPr/>
+          <p:cNvSpPr>
+            <a:spLocks noGrp="1"/>
+          </p:cNvSpPr>
           <p:nvPr>
-            <p:ph idx="100" type="title" hasCustomPrompt="1"/>
+            <p:ph type="title" idx="100" hasCustomPrompt="1"/>
           </p:nvPr>
         </p:nvSpPr>
         <p:spPr>
@@ -7880,7 +6716,7 @@
           <a:bodyPr wrap="square" lIns="0" tIns="0" rIns="0" bIns="0" rtlCol="0" anchor="ctr"/>
           <a:lstStyle/>
           <a:p>
-            <a:pPr algn="l" indent="0" marL="0">
+            <a:pPr marL="0" indent="0" algn="l">
               <a:buNone/>
             </a:pPr>
             <a:r>
@@ -7938,7 +6774,7 @@
           <a:bodyPr wrap="square" lIns="0" tIns="0" rIns="0" bIns="0" rtlCol="0" anchor="ctr"/>
           <a:lstStyle/>
           <a:p>
-            <a:pPr algn="ctr" indent="0" marL="0">
+            <a:pPr marL="0" indent="0" algn="ctr">
               <a:buNone/>
             </a:pPr>
             <a:r>
@@ -7974,7 +6810,7 @@
           <a:bodyPr wrap="square" lIns="0" tIns="0" rIns="0" bIns="0" rtlCol="0" anchor="ctr"/>
           <a:lstStyle/>
           <a:p>
-            <a:pPr indent="0" marL="0">
+            <a:pPr marL="0" indent="0">
               <a:buNone/>
             </a:pPr>
             <a:r>
@@ -8032,7 +6868,7 @@
           <a:bodyPr wrap="square" lIns="0" tIns="0" rIns="0" bIns="0" rtlCol="0" anchor="ctr"/>
           <a:lstStyle/>
           <a:p>
-            <a:pPr algn="ctr" indent="0" marL="0">
+            <a:pPr marL="0" indent="0" algn="ctr">
               <a:buNone/>
             </a:pPr>
             <a:r>
@@ -8041,12 +6877,12 @@
                   <a:schemeClr val="tx1"/>
                 </a:solidFill>
               </a:rPr>
-              <a:t>2</a:t>
+              <a:t>2 a 5</a:t>
             </a:r>
             <a:endParaRPr lang="en-US" sz="9600" dirty="0"/>
           </a:p>
           <a:p>
-            <a:pPr algn="ctr" indent="0" marL="0">
+            <a:pPr marL="0" indent="0" algn="ctr">
               <a:buNone/>
             </a:pPr>
             <a:r>
@@ -8104,7 +6940,7 @@
           <a:bodyPr wrap="square" lIns="0" tIns="0" rIns="0" bIns="0" rtlCol="0" anchor="ctr"/>
           <a:lstStyle/>
           <a:p>
-            <a:pPr algn="ctr" indent="0" marL="0">
+            <a:pPr marL="0" indent="0" algn="ctr">
               <a:buNone/>
             </a:pPr>
             <a:r>
@@ -8113,21 +6949,29 @@
                   <a:schemeClr val="bg1"/>
                 </a:solidFill>
               </a:rPr>
-              <a:t>1</a:t>
+              <a:t>2 a 5</a:t>
             </a:r>
             <a:endParaRPr lang="en-US" sz="9600" dirty="0"/>
           </a:p>
           <a:p>
-            <a:pPr algn="ctr" indent="0" marL="0">
-              <a:buNone/>
-            </a:pPr>
+            <a:pPr marL="0" indent="0" algn="ctr">
+              <a:buNone/>
+            </a:pPr>
+            <a:r>
+              <a:rPr lang="en-US" sz="2400" b="1" dirty="0" err="1">
+                <a:solidFill>
+                  <a:schemeClr val="bg1"/>
+                </a:solidFill>
+              </a:rPr>
+              <a:t>minutos</a:t>
+            </a:r>
             <a:r>
               <a:rPr lang="en-US" sz="2400" b="1" dirty="0">
                 <a:solidFill>
                   <a:schemeClr val="bg1"/>
                 </a:solidFill>
               </a:rPr>
-              <a:t>minuto de preguntas</a:t>
+              <a:t> de preguntas</a:t>
             </a:r>
             <a:endParaRPr lang="en-US" sz="9600" dirty="0"/>
           </a:p>
@@ -8155,14 +6999,14 @@
       </p:sp>
       <p:pic>
         <p:nvPicPr>
-          <p:cNvPr id="11" name="Image 0" descr="Tiempo">    </p:cNvPr>
+          <p:cNvPr id="11" name="Image 0" descr="Tiempo"/>
           <p:cNvPicPr>
             <a:picLocks noChangeAspect="1"/>
           </p:cNvPicPr>
           <p:nvPr/>
         </p:nvPicPr>
         <p:blipFill>
-          <a:blip r:embed="rId1"/>
+          <a:blip r:embed="rId3"/>
           <a:stretch>
             <a:fillRect/>
           </a:stretch>
@@ -8198,7 +7042,7 @@
           <a:bodyPr wrap="square" lIns="0" tIns="0" rIns="0" bIns="0" rtlCol="0" anchor="ctr"/>
           <a:lstStyle/>
           <a:p>
-            <a:pPr indent="0" marL="0">
+            <a:pPr marL="0" indent="0">
               <a:buNone/>
             </a:pPr>
             <a:r>
@@ -8233,7 +7077,7 @@
           </a:prstGeom>
           <a:extLst>
             <a:ext uri="{C572A759-6A51-4108-AA02-DFA0A04FC94B}">
-              <ma14:wrappingTextBoxFlag xmlns:ma14="http://schemas.microsoft.com/office/mac/drawingml/2011/main" val="0"/>
+              <ma14:wrappingTextBoxFlag xmlns:ma14="http://schemas.microsoft.com/office/mac/drawingml/2011/main" xmlns="" val="0"/>
             </a:ext>
           </a:extLst>
         </p:spPr>
@@ -8251,7 +7095,7 @@
           <a:p>
             <a:pPr algn="r"/>
             <a:fld id="{F7021451-1387-4CA6-816F-3879F97B5CBC}" type="slidenum">
-              <a:rPr b="0" lang="en-US"/>
+              <a:rPr lang="en-US" b="0"/>
               <a:t>6</a:t>
             </a:fld>
             <a:endParaRPr lang="en-US"/>
@@ -8286,9 +7130,11 @@
       <p:sp>
         <p:nvSpPr>
           <p:cNvPr id="2" name="Text 0"/>
-          <p:cNvSpPr/>
+          <p:cNvSpPr>
+            <a:spLocks noGrp="1"/>
+          </p:cNvSpPr>
           <p:nvPr>
-            <p:ph idx="100" type="title" hasCustomPrompt="1"/>
+            <p:ph type="title" idx="100" hasCustomPrompt="1"/>
           </p:nvPr>
         </p:nvSpPr>
         <p:spPr>
@@ -8306,7 +7152,7 @@
           <a:bodyPr wrap="square" lIns="0" tIns="0" rIns="0" bIns="0" rtlCol="0" anchor="ctr"/>
           <a:lstStyle/>
           <a:p>
-            <a:pPr algn="l" indent="0" marL="0">
+            <a:pPr marL="0" indent="0" algn="l">
               <a:buNone/>
             </a:pPr>
             <a:r>
@@ -8364,7 +7210,7 @@
           <a:bodyPr wrap="square" lIns="0" tIns="0" rIns="0" bIns="0" rtlCol="0" anchor="ctr"/>
           <a:lstStyle/>
           <a:p>
-            <a:pPr algn="ctr" indent="0" marL="0">
+            <a:pPr marL="0" indent="0" algn="ctr">
               <a:buNone/>
             </a:pPr>
             <a:r>
@@ -8400,7 +7246,7 @@
           <a:bodyPr wrap="square" lIns="0" tIns="0" rIns="0" bIns="0" rtlCol="0" anchor="ctr"/>
           <a:lstStyle/>
           <a:p>
-            <a:pPr indent="0" marL="0">
+            <a:pPr marL="0" indent="0">
               <a:buNone/>
             </a:pPr>
             <a:r>
@@ -8459,211 +7305,7 @@
       </p:sp>
       <p:pic>
         <p:nvPicPr>
-          <p:cNvPr id="8" name="Image 0" descr="Claridad">    </p:cNvPr>
-          <p:cNvPicPr>
-            <a:picLocks noChangeAspect="1"/>
-          </p:cNvPicPr>
-          <p:nvPr/>
-        </p:nvPicPr>
-        <p:blipFill>
-          <a:blip r:embed="rId1"/>
-          <a:stretch>
-            <a:fillRect/>
-          </a:stretch>
-        </p:blipFill>
-        <p:spPr>
-          <a:xfrm>
-            <a:off x="1530134" y="2457907"/>
-            <a:ext cx="570586" cy="570586"/>
-          </a:xfrm>
-          <a:prstGeom prst="rect">
-            <a:avLst/>
-          </a:prstGeom>
-        </p:spPr>
-      </p:pic>
-      <p:sp>
-        <p:nvSpPr>
-          <p:cNvPr id="9" name="Text 6"/>
-          <p:cNvSpPr txBox="1"/>
-          <p:nvPr/>
-        </p:nvSpPr>
-        <p:spPr>
-          <a:xfrm>
-            <a:off x="731520" y="3429000"/>
-            <a:ext cx="2167814" cy="548640"/>
-          </a:xfrm>
-          <a:prstGeom prst="rect">
-            <a:avLst/>
-          </a:prstGeom>
-          <a:noFill/>
-          <a:ln/>
-        </p:spPr>
-        <p:txBody>
-          <a:bodyPr wrap="square" lIns="0" tIns="0" rIns="0" bIns="0" rtlCol="0" anchor="ctr"/>
-          <a:lstStyle/>
-          <a:p>
-            <a:pPr algn="ctr" indent="0" marL="0">
-              <a:buNone/>
-            </a:pPr>
-            <a:r>
-              <a:rPr lang="en-US" sz="2100" b="1" dirty="0">
-                <a:solidFill>
-                  <a:schemeClr val="tx1"/>
-                </a:solidFill>
-              </a:rPr>
-              <a:t>Claridad</a:t>
-            </a:r>
-            <a:endParaRPr lang="en-US" sz="2100" dirty="0"/>
-          </a:p>
-        </p:txBody>
-      </p:sp>
-      <p:sp>
-        <p:nvSpPr>
-          <p:cNvPr id="10" name="Tarjeta"/>
-          <p:cNvSpPr/>
-          <p:nvPr/>
-        </p:nvSpPr>
-        <p:spPr>
-          <a:xfrm>
-            <a:off x="3402254" y="1965960"/>
-            <a:ext cx="2533574" cy="2194560"/>
-          </a:xfrm>
-          <a:prstGeom prst="roundRect">
-            <a:avLst>
-              <a:gd name="adj" fmla="val 6250"/>
-            </a:avLst>
-          </a:prstGeom>
-          <a:solidFill>
-            <a:schemeClr val="bg2"/>
-          </a:solidFill>
-          <a:ln/>
-        </p:spPr>
-      </p:sp>
-      <p:sp>
-        <p:nvSpPr>
-          <p:cNvPr id="11" name="Originalidad"/>
-          <p:cNvSpPr/>
-          <p:nvPr/>
-        </p:nvSpPr>
-        <p:spPr>
-          <a:xfrm>
-            <a:off x="4120401" y="2194560"/>
-            <a:ext cx="1097280" cy="1097280"/>
-          </a:xfrm>
-          <a:prstGeom prst="ellipse">
-            <a:avLst/>
-          </a:prstGeom>
-          <a:solidFill>
-            <a:schemeClr val="tx2"/>
-          </a:solidFill>
-          <a:ln/>
-        </p:spPr>
-      </p:sp>
-      <p:pic>
-        <p:nvPicPr>
-          <p:cNvPr id="12" name="Image 1" descr="Originalidad">    </p:cNvPr>
-          <p:cNvPicPr>
-            <a:picLocks noChangeAspect="1"/>
-          </p:cNvPicPr>
-          <p:nvPr/>
-        </p:nvPicPr>
-        <p:blipFill>
-          <a:blip r:embed="rId2"/>
-          <a:stretch>
-            <a:fillRect/>
-          </a:stretch>
-        </p:blipFill>
-        <p:spPr>
-          <a:xfrm>
-            <a:off x="4383748" y="2457907"/>
-            <a:ext cx="570586" cy="570586"/>
-          </a:xfrm>
-          <a:prstGeom prst="rect">
-            <a:avLst/>
-          </a:prstGeom>
-        </p:spPr>
-      </p:pic>
-      <p:sp>
-        <p:nvSpPr>
-          <p:cNvPr id="13" name="Text 9"/>
-          <p:cNvSpPr txBox="1"/>
-          <p:nvPr/>
-        </p:nvSpPr>
-        <p:spPr>
-          <a:xfrm>
-            <a:off x="3585134" y="3429000"/>
-            <a:ext cx="2167814" cy="548640"/>
-          </a:xfrm>
-          <a:prstGeom prst="rect">
-            <a:avLst/>
-          </a:prstGeom>
-          <a:noFill/>
-          <a:ln/>
-        </p:spPr>
-        <p:txBody>
-          <a:bodyPr wrap="square" lIns="0" tIns="0" rIns="0" bIns="0" rtlCol="0" anchor="ctr"/>
-          <a:lstStyle/>
-          <a:p>
-            <a:pPr algn="ctr" indent="0" marL="0">
-              <a:buNone/>
-            </a:pPr>
-            <a:r>
-              <a:rPr lang="en-US" sz="2100" b="1" dirty="0">
-                <a:solidFill>
-                  <a:schemeClr val="tx1"/>
-                </a:solidFill>
-              </a:rPr>
-              <a:t>Originalidad</a:t>
-            </a:r>
-            <a:endParaRPr lang="en-US" sz="2100" dirty="0"/>
-          </a:p>
-        </p:txBody>
-      </p:sp>
-      <p:sp>
-        <p:nvSpPr>
-          <p:cNvPr id="14" name="Tarjeta"/>
-          <p:cNvSpPr/>
-          <p:nvPr/>
-        </p:nvSpPr>
-        <p:spPr>
-          <a:xfrm>
-            <a:off x="6255868" y="1965960"/>
-            <a:ext cx="2533574" cy="2194560"/>
-          </a:xfrm>
-          <a:prstGeom prst="roundRect">
-            <a:avLst>
-              <a:gd name="adj" fmla="val 6250"/>
-            </a:avLst>
-          </a:prstGeom>
-          <a:solidFill>
-            <a:schemeClr val="bg2"/>
-          </a:solidFill>
-          <a:ln/>
-        </p:spPr>
-      </p:sp>
-      <p:sp>
-        <p:nvSpPr>
-          <p:cNvPr id="15" name="Viabilidad"/>
-          <p:cNvSpPr/>
-          <p:nvPr/>
-        </p:nvSpPr>
-        <p:spPr>
-          <a:xfrm>
-            <a:off x="6974015" y="2194560"/>
-            <a:ext cx="1097280" cy="1097280"/>
-          </a:xfrm>
-          <a:prstGeom prst="ellipse">
-            <a:avLst/>
-          </a:prstGeom>
-          <a:solidFill>
-            <a:schemeClr val="tx2"/>
-          </a:solidFill>
-          <a:ln/>
-        </p:spPr>
-      </p:sp>
-      <p:pic>
-        <p:nvPicPr>
-          <p:cNvPr id="16" name="Image 2" descr="Viabilidad">    </p:cNvPr>
+          <p:cNvPr id="8" name="Image 0" descr="Claridad"/>
           <p:cNvPicPr>
             <a:picLocks noChangeAspect="1"/>
           </p:cNvPicPr>
@@ -8677,7 +7319,7 @@
         </p:blipFill>
         <p:spPr>
           <a:xfrm>
-            <a:off x="7237362" y="2457907"/>
+            <a:off x="1530134" y="2457907"/>
             <a:ext cx="570586" cy="570586"/>
           </a:xfrm>
           <a:prstGeom prst="rect">
@@ -8687,13 +7329,13 @@
       </p:pic>
       <p:sp>
         <p:nvSpPr>
-          <p:cNvPr id="17" name="Text 12"/>
+          <p:cNvPr id="9" name="Text 6"/>
           <p:cNvSpPr txBox="1"/>
           <p:nvPr/>
         </p:nvSpPr>
         <p:spPr>
           <a:xfrm>
-            <a:off x="6438748" y="3429000"/>
+            <a:off x="731520" y="3429000"/>
             <a:ext cx="2167814" cy="548640"/>
           </a:xfrm>
           <a:prstGeom prst="rect">
@@ -8706,7 +7348,7 @@
           <a:bodyPr wrap="square" lIns="0" tIns="0" rIns="0" bIns="0" rtlCol="0" anchor="ctr"/>
           <a:lstStyle/>
           <a:p>
-            <a:pPr algn="ctr" indent="0" marL="0">
+            <a:pPr marL="0" indent="0" algn="ctr">
               <a:buNone/>
             </a:pPr>
             <a:r>
@@ -8715,7 +7357,7 @@
                   <a:schemeClr val="tx1"/>
                 </a:solidFill>
               </a:rPr>
-              <a:t>Viabilidad</a:t>
+              <a:t>Claridad</a:t>
             </a:r>
             <a:endParaRPr lang="en-US" sz="2100" dirty="0"/>
           </a:p>
@@ -8723,13 +7365,13 @@
       </p:sp>
       <p:sp>
         <p:nvSpPr>
-          <p:cNvPr id="18" name="Tarjeta"/>
+          <p:cNvPr id="10" name="Tarjeta"/>
           <p:cNvSpPr/>
           <p:nvPr/>
         </p:nvSpPr>
         <p:spPr>
           <a:xfrm>
-            <a:off x="9109481" y="1965960"/>
+            <a:off x="3402254" y="1965960"/>
             <a:ext cx="2533574" cy="2194560"/>
           </a:xfrm>
           <a:prstGeom prst="roundRect">
@@ -8745,13 +7387,13 @@
       </p:sp>
       <p:sp>
         <p:nvSpPr>
-          <p:cNvPr id="19" name="Posibles riesgos"/>
+          <p:cNvPr id="11" name="Originalidad"/>
           <p:cNvSpPr/>
           <p:nvPr/>
         </p:nvSpPr>
         <p:spPr>
           <a:xfrm>
-            <a:off x="9827628" y="2194560"/>
+            <a:off x="4120401" y="2194560"/>
             <a:ext cx="1097280" cy="1097280"/>
           </a:xfrm>
           <a:prstGeom prst="ellipse">
@@ -8765,7 +7407,7 @@
       </p:sp>
       <p:pic>
         <p:nvPicPr>
-          <p:cNvPr id="20" name="Image 3" descr="Posibles riesgos">    </p:cNvPr>
+          <p:cNvPr id="12" name="Image 1" descr="Originalidad"/>
           <p:cNvPicPr>
             <a:picLocks noChangeAspect="1"/>
           </p:cNvPicPr>
@@ -8779,7 +7421,7 @@
         </p:blipFill>
         <p:spPr>
           <a:xfrm>
-            <a:off x="10090976" y="2457907"/>
+            <a:off x="4383748" y="2457907"/>
             <a:ext cx="570586" cy="570586"/>
           </a:xfrm>
           <a:prstGeom prst="rect">
@@ -8789,13 +7431,13 @@
       </p:pic>
       <p:sp>
         <p:nvSpPr>
-          <p:cNvPr id="21" name="Text 15"/>
+          <p:cNvPr id="13" name="Text 9"/>
           <p:cNvSpPr txBox="1"/>
           <p:nvPr/>
         </p:nvSpPr>
         <p:spPr>
           <a:xfrm>
-            <a:off x="9292361" y="3429000"/>
+            <a:off x="3585134" y="3429000"/>
             <a:ext cx="2167814" cy="548640"/>
           </a:xfrm>
           <a:prstGeom prst="rect">
@@ -8808,7 +7450,7 @@
           <a:bodyPr wrap="square" lIns="0" tIns="0" rIns="0" bIns="0" rtlCol="0" anchor="ctr"/>
           <a:lstStyle/>
           <a:p>
-            <a:pPr algn="ctr" indent="0" marL="0">
+            <a:pPr marL="0" indent="0" algn="ctr">
               <a:buNone/>
             </a:pPr>
             <a:r>
@@ -8817,7 +7459,7 @@
                   <a:schemeClr val="tx1"/>
                 </a:solidFill>
               </a:rPr>
-              <a:t>Posibles riesgos</a:t>
+              <a:t>Originalidad</a:t>
             </a:r>
             <a:endParaRPr lang="en-US" sz="2100" dirty="0"/>
           </a:p>
@@ -8825,49 +7467,49 @@
       </p:sp>
       <p:sp>
         <p:nvSpPr>
-          <p:cNvPr id="22" name="Tarjeta"/>
+          <p:cNvPr id="14" name="Tarjeta"/>
           <p:cNvSpPr/>
           <p:nvPr/>
         </p:nvSpPr>
         <p:spPr>
           <a:xfrm>
-            <a:off x="548640" y="4480560"/>
-            <a:ext cx="11094415" cy="1097280"/>
+            <a:off x="6255868" y="1965960"/>
+            <a:ext cx="2533574" cy="2194560"/>
           </a:xfrm>
           <a:prstGeom prst="roundRect">
             <a:avLst>
-              <a:gd name="adj" fmla="val 12500"/>
+              <a:gd name="adj" fmla="val 6250"/>
             </a:avLst>
           </a:prstGeom>
           <a:solidFill>
-            <a:schemeClr val="accent1"/>
-          </a:solidFill>
-          <a:ln/>
-        </p:spPr>
-      </p:sp>
-      <p:sp>
-        <p:nvSpPr>
-          <p:cNvPr id="23" name="Mejora"/>
+            <a:schemeClr val="bg2"/>
+          </a:solidFill>
+          <a:ln/>
+        </p:spPr>
+      </p:sp>
+      <p:sp>
+        <p:nvSpPr>
+          <p:cNvPr id="15" name="Viabilidad"/>
           <p:cNvSpPr/>
           <p:nvPr/>
         </p:nvSpPr>
         <p:spPr>
           <a:xfrm>
-            <a:off x="822960" y="4663440"/>
-            <a:ext cx="731520" cy="731520"/>
+            <a:off x="6974015" y="2194560"/>
+            <a:ext cx="1097280" cy="1097280"/>
           </a:xfrm>
           <a:prstGeom prst="ellipse">
             <a:avLst/>
           </a:prstGeom>
           <a:solidFill>
-            <a:schemeClr val="tx1"/>
+            <a:schemeClr val="tx2"/>
           </a:solidFill>
           <a:ln/>
         </p:spPr>
       </p:sp>
       <p:pic>
         <p:nvPicPr>
-          <p:cNvPr id="24" name="Image 4" descr="Mejora">    </p:cNvPr>
+          <p:cNvPr id="16" name="Image 2" descr="Viabilidad"/>
           <p:cNvPicPr>
             <a:picLocks noChangeAspect="1"/>
           </p:cNvPicPr>
@@ -8881,6 +7523,210 @@
         </p:blipFill>
         <p:spPr>
           <a:xfrm>
+            <a:off x="7237362" y="2457907"/>
+            <a:ext cx="570586" cy="570586"/>
+          </a:xfrm>
+          <a:prstGeom prst="rect">
+            <a:avLst/>
+          </a:prstGeom>
+        </p:spPr>
+      </p:pic>
+      <p:sp>
+        <p:nvSpPr>
+          <p:cNvPr id="17" name="Text 12"/>
+          <p:cNvSpPr txBox="1"/>
+          <p:nvPr/>
+        </p:nvSpPr>
+        <p:spPr>
+          <a:xfrm>
+            <a:off x="6438748" y="3429000"/>
+            <a:ext cx="2167814" cy="548640"/>
+          </a:xfrm>
+          <a:prstGeom prst="rect">
+            <a:avLst/>
+          </a:prstGeom>
+          <a:noFill/>
+          <a:ln/>
+        </p:spPr>
+        <p:txBody>
+          <a:bodyPr wrap="square" lIns="0" tIns="0" rIns="0" bIns="0" rtlCol="0" anchor="ctr"/>
+          <a:lstStyle/>
+          <a:p>
+            <a:pPr marL="0" indent="0" algn="ctr">
+              <a:buNone/>
+            </a:pPr>
+            <a:r>
+              <a:rPr lang="en-US" sz="2100" b="1" dirty="0">
+                <a:solidFill>
+                  <a:schemeClr val="tx1"/>
+                </a:solidFill>
+              </a:rPr>
+              <a:t>Viabilidad</a:t>
+            </a:r>
+            <a:endParaRPr lang="en-US" sz="2100" dirty="0"/>
+          </a:p>
+        </p:txBody>
+      </p:sp>
+      <p:sp>
+        <p:nvSpPr>
+          <p:cNvPr id="18" name="Tarjeta"/>
+          <p:cNvSpPr/>
+          <p:nvPr/>
+        </p:nvSpPr>
+        <p:spPr>
+          <a:xfrm>
+            <a:off x="9109481" y="1965960"/>
+            <a:ext cx="2533574" cy="2194560"/>
+          </a:xfrm>
+          <a:prstGeom prst="roundRect">
+            <a:avLst>
+              <a:gd name="adj" fmla="val 6250"/>
+            </a:avLst>
+          </a:prstGeom>
+          <a:solidFill>
+            <a:schemeClr val="bg2"/>
+          </a:solidFill>
+          <a:ln/>
+        </p:spPr>
+      </p:sp>
+      <p:sp>
+        <p:nvSpPr>
+          <p:cNvPr id="19" name="Posibles riesgos"/>
+          <p:cNvSpPr/>
+          <p:nvPr/>
+        </p:nvSpPr>
+        <p:spPr>
+          <a:xfrm>
+            <a:off x="9827628" y="2194560"/>
+            <a:ext cx="1097280" cy="1097280"/>
+          </a:xfrm>
+          <a:prstGeom prst="ellipse">
+            <a:avLst/>
+          </a:prstGeom>
+          <a:solidFill>
+            <a:schemeClr val="tx2"/>
+          </a:solidFill>
+          <a:ln/>
+        </p:spPr>
+      </p:sp>
+      <p:pic>
+        <p:nvPicPr>
+          <p:cNvPr id="20" name="Image 3" descr="Posibles riesgos"/>
+          <p:cNvPicPr>
+            <a:picLocks noChangeAspect="1"/>
+          </p:cNvPicPr>
+          <p:nvPr/>
+        </p:nvPicPr>
+        <p:blipFill>
+          <a:blip r:embed="rId6"/>
+          <a:stretch>
+            <a:fillRect/>
+          </a:stretch>
+        </p:blipFill>
+        <p:spPr>
+          <a:xfrm>
+            <a:off x="10090976" y="2457907"/>
+            <a:ext cx="570586" cy="570586"/>
+          </a:xfrm>
+          <a:prstGeom prst="rect">
+            <a:avLst/>
+          </a:prstGeom>
+        </p:spPr>
+      </p:pic>
+      <p:sp>
+        <p:nvSpPr>
+          <p:cNvPr id="21" name="Text 15"/>
+          <p:cNvSpPr txBox="1"/>
+          <p:nvPr/>
+        </p:nvSpPr>
+        <p:spPr>
+          <a:xfrm>
+            <a:off x="9292361" y="3429000"/>
+            <a:ext cx="2167814" cy="548640"/>
+          </a:xfrm>
+          <a:prstGeom prst="rect">
+            <a:avLst/>
+          </a:prstGeom>
+          <a:noFill/>
+          <a:ln/>
+        </p:spPr>
+        <p:txBody>
+          <a:bodyPr wrap="square" lIns="0" tIns="0" rIns="0" bIns="0" rtlCol="0" anchor="ctr"/>
+          <a:lstStyle/>
+          <a:p>
+            <a:pPr marL="0" indent="0" algn="ctr">
+              <a:buNone/>
+            </a:pPr>
+            <a:r>
+              <a:rPr lang="en-US" sz="2100" b="1" dirty="0">
+                <a:solidFill>
+                  <a:schemeClr val="tx1"/>
+                </a:solidFill>
+              </a:rPr>
+              <a:t>Posibles riesgos</a:t>
+            </a:r>
+            <a:endParaRPr lang="en-US" sz="2100" dirty="0"/>
+          </a:p>
+        </p:txBody>
+      </p:sp>
+      <p:sp>
+        <p:nvSpPr>
+          <p:cNvPr id="22" name="Tarjeta"/>
+          <p:cNvSpPr/>
+          <p:nvPr/>
+        </p:nvSpPr>
+        <p:spPr>
+          <a:xfrm>
+            <a:off x="548640" y="4480560"/>
+            <a:ext cx="11094415" cy="1097280"/>
+          </a:xfrm>
+          <a:prstGeom prst="roundRect">
+            <a:avLst>
+              <a:gd name="adj" fmla="val 12500"/>
+            </a:avLst>
+          </a:prstGeom>
+          <a:solidFill>
+            <a:schemeClr val="accent1"/>
+          </a:solidFill>
+          <a:ln/>
+        </p:spPr>
+      </p:sp>
+      <p:sp>
+        <p:nvSpPr>
+          <p:cNvPr id="23" name="Mejora"/>
+          <p:cNvSpPr/>
+          <p:nvPr/>
+        </p:nvSpPr>
+        <p:spPr>
+          <a:xfrm>
+            <a:off x="822960" y="4663440"/>
+            <a:ext cx="731520" cy="731520"/>
+          </a:xfrm>
+          <a:prstGeom prst="ellipse">
+            <a:avLst/>
+          </a:prstGeom>
+          <a:solidFill>
+            <a:schemeClr val="tx1"/>
+          </a:solidFill>
+          <a:ln/>
+        </p:spPr>
+      </p:sp>
+      <p:pic>
+        <p:nvPicPr>
+          <p:cNvPr id="24" name="Image 4" descr="Mejora"/>
+          <p:cNvPicPr>
+            <a:picLocks noChangeAspect="1"/>
+          </p:cNvPicPr>
+          <p:nvPr/>
+        </p:nvPicPr>
+        <p:blipFill>
+          <a:blip r:embed="rId7"/>
+          <a:stretch>
+            <a:fillRect/>
+          </a:stretch>
+        </p:blipFill>
+        <p:spPr>
+          <a:xfrm>
             <a:off x="998525" y="4839005"/>
             <a:ext cx="380390" cy="380390"/>
           </a:xfrm>
@@ -8910,7 +7756,7 @@
           <a:bodyPr wrap="square" lIns="0" tIns="0" rIns="0" bIns="0" rtlCol="0" anchor="ctr"/>
           <a:lstStyle/>
           <a:p>
-            <a:pPr indent="0" marL="0">
+            <a:pPr marL="0" indent="0">
               <a:buNone/>
             </a:pPr>
             <a:r>
@@ -8927,7 +7773,7 @@
       </p:sp>
       <p:sp>
         <p:nvSpPr>
-          <p:cNvPr id="25" name="Slide Number Placeholder 0"/>
+          <p:cNvPr id="26" name="Slide Number Placeholder 0"/>
           <p:cNvSpPr>
             <a:spLocks noGrp="1"/>
           </p:cNvSpPr>
@@ -8945,7 +7791,7 @@
           </a:prstGeom>
           <a:extLst>
             <a:ext uri="{C572A759-6A51-4108-AA02-DFA0A04FC94B}">
-              <ma14:wrappingTextBoxFlag xmlns:ma14="http://schemas.microsoft.com/office/mac/drawingml/2011/main" val="0"/>
+              <ma14:wrappingTextBoxFlag xmlns:ma14="http://schemas.microsoft.com/office/mac/drawingml/2011/main" xmlns="" val="0"/>
             </a:ext>
           </a:extLst>
         </p:spPr>
@@ -8963,7 +7809,7 @@
           <a:p>
             <a:pPr algn="r"/>
             <a:fld id="{F7021451-1387-4CA6-816F-3879F97B5CBC}" type="slidenum">
-              <a:rPr b="0" lang="en-US"/>
+              <a:rPr lang="en-US" b="0"/>
               <a:t>7</a:t>
             </a:fld>
             <a:endParaRPr lang="en-US"/>
@@ -8998,9 +7844,11 @@
       <p:sp>
         <p:nvSpPr>
           <p:cNvPr id="2" name="Text 0"/>
-          <p:cNvSpPr/>
+          <p:cNvSpPr>
+            <a:spLocks noGrp="1"/>
+          </p:cNvSpPr>
           <p:nvPr>
-            <p:ph idx="100" type="title" hasCustomPrompt="1"/>
+            <p:ph type="title" idx="100" hasCustomPrompt="1"/>
           </p:nvPr>
         </p:nvSpPr>
         <p:spPr>
@@ -9018,7 +7866,7 @@
           <a:bodyPr wrap="square" lIns="0" tIns="0" rIns="0" bIns="0" rtlCol="0" anchor="ctr"/>
           <a:lstStyle/>
           <a:p>
-            <a:pPr algn="l" indent="0" marL="0">
+            <a:pPr marL="0" indent="0" algn="l">
               <a:buNone/>
             </a:pPr>
             <a:r>
@@ -9076,7 +7924,7 @@
           <a:bodyPr wrap="square" lIns="0" tIns="0" rIns="0" bIns="0" rtlCol="0" anchor="ctr"/>
           <a:lstStyle/>
           <a:p>
-            <a:pPr algn="ctr" indent="0" marL="0">
+            <a:pPr marL="0" indent="0" algn="ctr">
               <a:buNone/>
             </a:pPr>
             <a:r>
@@ -9112,7 +7960,7 @@
           <a:bodyPr wrap="square" lIns="0" tIns="0" rIns="0" bIns="0" rtlCol="0" anchor="ctr"/>
           <a:lstStyle/>
           <a:p>
-            <a:pPr indent="0" marL="0">
+            <a:pPr marL="0" indent="0">
               <a:buNone/>
             </a:pPr>
             <a:r>
@@ -9170,7 +8018,7 @@
           <a:bodyPr wrap="square" lIns="0" tIns="0" rIns="0" bIns="0" rtlCol="0" anchor="t"/>
           <a:lstStyle/>
           <a:p>
-            <a:pPr indent="0" marL="0">
+            <a:pPr marL="0" indent="0">
               <a:lnSpc>
                 <a:spcPct val="95000"/>
               </a:lnSpc>
@@ -9190,7 +8038,7 @@
             <a:endParaRPr lang="en-US" sz="1900" dirty="0"/>
           </a:p>
           <a:p>
-            <a:pPr indent="0" marL="0">
+            <a:pPr marL="0" indent="0">
               <a:lnSpc>
                 <a:spcPct val="95000"/>
               </a:lnSpc>
@@ -9210,7 +8058,7 @@
             <a:endParaRPr lang="en-US" sz="1900" dirty="0"/>
           </a:p>
           <a:p>
-            <a:pPr indent="0" marL="0">
+            <a:pPr marL="0" indent="0">
               <a:lnSpc>
                 <a:spcPct val="95000"/>
               </a:lnSpc>
@@ -9230,7 +8078,7 @@
             <a:endParaRPr lang="en-US" sz="1900" dirty="0"/>
           </a:p>
           <a:p>
-            <a:pPr indent="0" marL="0">
+            <a:pPr marL="0" indent="0">
               <a:lnSpc>
                 <a:spcPct val="95000"/>
               </a:lnSpc>
@@ -9250,7 +8098,7 @@
             <a:endParaRPr lang="en-US" sz="1900" dirty="0"/>
           </a:p>
           <a:p>
-            <a:pPr indent="0" marL="0">
+            <a:pPr marL="0" indent="0">
               <a:lnSpc>
                 <a:spcPct val="95000"/>
               </a:lnSpc>
@@ -9270,7 +8118,7 @@
             <a:endParaRPr lang="en-US" sz="1900" dirty="0"/>
           </a:p>
           <a:p>
-            <a:pPr indent="0" marL="0">
+            <a:pPr marL="0" indent="0">
               <a:lnSpc>
                 <a:spcPct val="95000"/>
               </a:lnSpc>
@@ -9290,7 +8138,7 @@
             <a:endParaRPr lang="en-US" sz="1900" dirty="0"/>
           </a:p>
           <a:p>
-            <a:pPr indent="0" marL="0">
+            <a:pPr marL="0" indent="0">
               <a:lnSpc>
                 <a:spcPct val="95000"/>
               </a:lnSpc>
@@ -9307,12 +8155,6 @@
               </a:rPr>
               <a:t>Esta es la propuesta: </a:t>
             </a:r>
-            <a:pPr indent="0" marL="0">
-              <a:lnSpc>
-                <a:spcPct val="95000"/>
-              </a:lnSpc>
-              <a:buNone/>
-            </a:pPr>
             <a:r>
               <a:rPr lang="en-US" sz="1900" b="1" dirty="0">
                 <a:solidFill>
@@ -9322,48 +8164,8 @@
                 <a:ea typeface="Courier New" pitchFamily="34" charset="-122"/>
                 <a:cs typeface="Courier New" pitchFamily="34" charset="-120"/>
               </a:rPr>
-              <a:t>[</a:t>
-            </a:r>
-            <a:pPr indent="0" marL="0">
-              <a:lnSpc>
-                <a:spcPct val="95000"/>
-              </a:lnSpc>
-              <a:buNone/>
-            </a:pPr>
-            <a:r>
-              <a:rPr lang="en-US" sz="1900" b="1" dirty="0">
-                <a:solidFill>
-                  <a:schemeClr val="accent1"/>
-                </a:solidFill>
-                <a:latin typeface="Courier New" pitchFamily="34" charset="0"/>
-                <a:ea typeface="Courier New" pitchFamily="34" charset="-122"/>
-                <a:cs typeface="Courier New" pitchFamily="34" charset="-120"/>
-              </a:rPr>
-              <a:t>insertar descripción</a:t>
-            </a:r>
-            <a:pPr indent="0" marL="0">
-              <a:lnSpc>
-                <a:spcPct val="95000"/>
-              </a:lnSpc>
-              <a:buNone/>
-            </a:pPr>
-            <a:r>
-              <a:rPr lang="en-US" sz="1900" b="1" dirty="0">
-                <a:solidFill>
-                  <a:schemeClr val="accent1"/>
-                </a:solidFill>
-                <a:latin typeface="Courier New" pitchFamily="34" charset="0"/>
-                <a:ea typeface="Courier New" pitchFamily="34" charset="-122"/>
-                <a:cs typeface="Courier New" pitchFamily="34" charset="-120"/>
-              </a:rPr>
-              <a:t>]</a:t>
-            </a:r>
-            <a:pPr indent="0" marL="0">
-              <a:lnSpc>
-                <a:spcPct val="95000"/>
-              </a:lnSpc>
-              <a:buNone/>
-            </a:pPr>
+              <a:t>[insertar descripción]</a:t>
+            </a:r>
             <a:r>
               <a:rPr lang="en-US" sz="1900" dirty="0">
                 <a:solidFill>
@@ -9399,7 +8201,7 @@
           </a:prstGeom>
           <a:extLst>
             <a:ext uri="{C572A759-6A51-4108-AA02-DFA0A04FC94B}">
-              <ma14:wrappingTextBoxFlag xmlns:ma14="http://schemas.microsoft.com/office/mac/drawingml/2011/main" val="0"/>
+              <ma14:wrappingTextBoxFlag xmlns:ma14="http://schemas.microsoft.com/office/mac/drawingml/2011/main" xmlns="" val="0"/>
             </a:ext>
           </a:extLst>
         </p:spPr>
@@ -9417,7 +8219,7 @@
           <a:p>
             <a:pPr algn="r"/>
             <a:fld id="{F7021451-1387-4CA6-816F-3879F97B5CBC}" type="slidenum">
-              <a:rPr b="0" lang="en-US"/>
+              <a:rPr lang="en-US" b="0"/>
               <a:t>8</a:t>
             </a:fld>
             <a:endParaRPr lang="en-US"/>
@@ -9452,9 +8254,11 @@
       <p:sp>
         <p:nvSpPr>
           <p:cNvPr id="2" name="Text 0"/>
-          <p:cNvSpPr/>
+          <p:cNvSpPr>
+            <a:spLocks noGrp="1"/>
+          </p:cNvSpPr>
           <p:nvPr>
-            <p:ph idx="100" type="title" hasCustomPrompt="1"/>
+            <p:ph type="title" idx="100" hasCustomPrompt="1"/>
           </p:nvPr>
         </p:nvSpPr>
         <p:spPr>
@@ -9472,7 +8276,7 @@
           <a:bodyPr wrap="square" lIns="0" tIns="0" rIns="0" bIns="0" rtlCol="0" anchor="ctr"/>
           <a:lstStyle/>
           <a:p>
-            <a:pPr algn="l" indent="0" marL="0">
+            <a:pPr marL="0" indent="0" algn="l">
               <a:buNone/>
             </a:pPr>
             <a:r>
@@ -9530,7 +8334,7 @@
           <a:bodyPr wrap="square" lIns="0" tIns="0" rIns="0" bIns="0" rtlCol="0" anchor="ctr"/>
           <a:lstStyle/>
           <a:p>
-            <a:pPr algn="ctr" indent="0" marL="0">
+            <a:pPr marL="0" indent="0" algn="ctr">
               <a:buNone/>
             </a:pPr>
             <a:r>
@@ -9566,7 +8370,7 @@
           <a:bodyPr wrap="square" lIns="0" tIns="0" rIns="0" bIns="0" rtlCol="0" anchor="ctr"/>
           <a:lstStyle/>
           <a:p>
-            <a:pPr indent="0" marL="0">
+            <a:pPr marL="0" indent="0">
               <a:buNone/>
             </a:pPr>
             <a:r>
@@ -9624,7 +8428,7 @@
           <a:bodyPr wrap="square" lIns="0" tIns="0" rIns="0" bIns="0" rtlCol="0" anchor="ctr"/>
           <a:lstStyle/>
           <a:p>
-            <a:pPr algn="ctr" indent="0" marL="0">
+            <a:pPr marL="0" indent="0" algn="ctr">
               <a:buNone/>
             </a:pPr>
             <a:r>
@@ -9709,7 +8513,7 @@
           <a:bodyPr wrap="square" lIns="0" tIns="0" rIns="0" bIns="0" rtlCol="0" anchor="ctr"/>
           <a:lstStyle/>
           <a:p>
-            <a:pPr algn="ctr" indent="0" marL="0">
+            <a:pPr marL="0" indent="0" algn="ctr">
               <a:buNone/>
             </a:pPr>
             <a:r>
@@ -9773,14 +8577,14 @@
       </p:sp>
       <p:pic>
         <p:nvPicPr>
-          <p:cNvPr id="13" name="Image 0" descr="Aviso">    </p:cNvPr>
+          <p:cNvPr id="13" name="Image 0" descr="Aviso"/>
           <p:cNvPicPr>
             <a:picLocks noChangeAspect="1"/>
           </p:cNvPicPr>
           <p:nvPr/>
         </p:nvPicPr>
         <p:blipFill>
-          <a:blip r:embed="rId1"/>
+          <a:blip r:embed="rId3"/>
           <a:stretch>
             <a:fillRect/>
           </a:stretch>
@@ -9816,7 +8620,7 @@
           <a:bodyPr wrap="square" lIns="0" tIns="0" rIns="0" bIns="0" rtlCol="0" anchor="ctr"/>
           <a:lstStyle/>
           <a:p>
-            <a:pPr indent="0" marL="0">
+            <a:pPr marL="0" indent="0">
               <a:buNone/>
             </a:pPr>
             <a:r>
@@ -9851,7 +8655,7 @@
           </a:prstGeom>
           <a:extLst>
             <a:ext uri="{C572A759-6A51-4108-AA02-DFA0A04FC94B}">
-              <ma14:wrappingTextBoxFlag xmlns:ma14="http://schemas.microsoft.com/office/mac/drawingml/2011/main" val="0"/>
+              <ma14:wrappingTextBoxFlag xmlns:ma14="http://schemas.microsoft.com/office/mac/drawingml/2011/main" xmlns="" val="0"/>
             </a:ext>
           </a:extLst>
         </p:spPr>
@@ -9869,7 +8673,7 @@
           <a:p>
             <a:pPr algn="r"/>
             <a:fld id="{F7021451-1387-4CA6-816F-3879F97B5CBC}" type="slidenum">
-              <a:rPr b="0" lang="en-US"/>
+              <a:rPr lang="en-US" b="0"/>
               <a:t>9</a:t>
             </a:fld>
             <a:endParaRPr lang="en-US"/>
@@ -10177,4 +8981,299 @@
     </a:ext>
   </a:extLst>
 </a:theme>
+</file>
+
+<file path=ppt/theme/theme2.xml><?xml version="1.0" encoding="utf-8"?>
+<a:theme xmlns:a="http://schemas.openxmlformats.org/drawingml/2006/main" name="Tema de Office">
+  <a:themeElements>
+    <a:clrScheme name="Office">
+      <a:dk1>
+        <a:sysClr val="windowText" lastClr="000000"/>
+      </a:dk1>
+      <a:lt1>
+        <a:sysClr val="window" lastClr="FFFFFF"/>
+      </a:lt1>
+      <a:dk2>
+        <a:srgbClr val="44546A"/>
+      </a:dk2>
+      <a:lt2>
+        <a:srgbClr val="E7E6E6"/>
+      </a:lt2>
+      <a:accent1>
+        <a:srgbClr val="4472C4"/>
+      </a:accent1>
+      <a:accent2>
+        <a:srgbClr val="ED7D31"/>
+      </a:accent2>
+      <a:accent3>
+        <a:srgbClr val="A5A5A5"/>
+      </a:accent3>
+      <a:accent4>
+        <a:srgbClr val="FFC000"/>
+      </a:accent4>
+      <a:accent5>
+        <a:srgbClr val="5B9BD5"/>
+      </a:accent5>
+      <a:accent6>
+        <a:srgbClr val="70AD47"/>
+      </a:accent6>
+      <a:hlink>
+        <a:srgbClr val="0563C1"/>
+      </a:hlink>
+      <a:folHlink>
+        <a:srgbClr val="954F72"/>
+      </a:folHlink>
+    </a:clrScheme>
+    <a:fontScheme name="Office">
+      <a:majorFont>
+        <a:latin typeface="Calibri Light" panose="020F0302020204030204"/>
+        <a:ea typeface=""/>
+        <a:cs typeface=""/>
+        <a:font script="Jpan" typeface="游ゴシック Light"/>
+        <a:font script="Hang" typeface="맑은 고딕"/>
+        <a:font script="Hans" typeface="等线 Light"/>
+        <a:font script="Hant" typeface="新細明體"/>
+        <a:font script="Arab" typeface="Times New Roman"/>
+        <a:font script="Hebr" typeface="Times New Roman"/>
+        <a:font script="Thai" typeface="Angsana New"/>
+        <a:font script="Ethi" typeface="Nyala"/>
+        <a:font script="Beng" typeface="Vrinda"/>
+        <a:font script="Gujr" typeface="Shruti"/>
+        <a:font script="Khmr" typeface="MoolBoran"/>
+        <a:font script="Knda" typeface="Tunga"/>
+        <a:font script="Guru" typeface="Raavi"/>
+        <a:font script="Cans" typeface="Euphemia"/>
+        <a:font script="Cher" typeface="Plantagenet Cherokee"/>
+        <a:font script="Yiii" typeface="Microsoft Yi Baiti"/>
+        <a:font script="Tibt" typeface="Microsoft Himalaya"/>
+        <a:font script="Thaa" typeface="MV Boli"/>
+        <a:font script="Deva" typeface="Mangal"/>
+        <a:font script="Telu" typeface="Gautami"/>
+        <a:font script="Taml" typeface="Latha"/>
+        <a:font script="Syrc" typeface="Estrangelo Edessa"/>
+        <a:font script="Orya" typeface="Kalinga"/>
+        <a:font script="Mlym" typeface="Kartika"/>
+        <a:font script="Laoo" typeface="DokChampa"/>
+        <a:font script="Sinh" typeface="Iskoola Pota"/>
+        <a:font script="Mong" typeface="Mongolian Baiti"/>
+        <a:font script="Viet" typeface="Times New Roman"/>
+        <a:font script="Uigh" typeface="Microsoft Uighur"/>
+        <a:font script="Geor" typeface="Sylfaen"/>
+        <a:font script="Armn" typeface="Arial"/>
+        <a:font script="Bugi" typeface="Leelawadee UI"/>
+        <a:font script="Bopo" typeface="Microsoft JhengHei"/>
+        <a:font script="Java" typeface="Javanese Text"/>
+        <a:font script="Lisu" typeface="Segoe UI"/>
+        <a:font script="Mymr" typeface="Myanmar Text"/>
+        <a:font script="Nkoo" typeface="Ebrima"/>
+        <a:font script="Olck" typeface="Nirmala UI"/>
+        <a:font script="Osma" typeface="Ebrima"/>
+        <a:font script="Phag" typeface="Phagspa"/>
+        <a:font script="Syrn" typeface="Estrangelo Edessa"/>
+        <a:font script="Syrj" typeface="Estrangelo Edessa"/>
+        <a:font script="Syre" typeface="Estrangelo Edessa"/>
+        <a:font script="Sora" typeface="Nirmala UI"/>
+        <a:font script="Tale" typeface="Microsoft Tai Le"/>
+        <a:font script="Talu" typeface="Microsoft New Tai Lue"/>
+        <a:font script="Tfng" typeface="Ebrima"/>
+      </a:majorFont>
+      <a:minorFont>
+        <a:latin typeface="Calibri" panose="020F0502020204030204"/>
+        <a:ea typeface=""/>
+        <a:cs typeface=""/>
+        <a:font script="Jpan" typeface="游ゴシック"/>
+        <a:font script="Hang" typeface="맑은 고딕"/>
+        <a:font script="Hans" typeface="等线"/>
+        <a:font script="Hant" typeface="新細明體"/>
+        <a:font script="Arab" typeface="Arial"/>
+        <a:font script="Hebr" typeface="Arial"/>
+        <a:font script="Thai" typeface="Cordia New"/>
+        <a:font script="Ethi" typeface="Nyala"/>
+        <a:font script="Beng" typeface="Vrinda"/>
+        <a:font script="Gujr" typeface="Shruti"/>
+        <a:font script="Khmr" typeface="DaunPenh"/>
+        <a:font script="Knda" typeface="Tunga"/>
+        <a:font script="Guru" typeface="Raavi"/>
+        <a:font script="Cans" typeface="Euphemia"/>
+        <a:font script="Cher" typeface="Plantagenet Cherokee"/>
+        <a:font script="Yiii" typeface="Microsoft Yi Baiti"/>
+        <a:font script="Tibt" typeface="Microsoft Himalaya"/>
+        <a:font script="Thaa" typeface="MV Boli"/>
+        <a:font script="Deva" typeface="Mangal"/>
+        <a:font script="Telu" typeface="Gautami"/>
+        <a:font script="Taml" typeface="Latha"/>
+        <a:font script="Syrc" typeface="Estrangelo Edessa"/>
+        <a:font script="Orya" typeface="Kalinga"/>
+        <a:font script="Mlym" typeface="Kartika"/>
+        <a:font script="Laoo" typeface="DokChampa"/>
+        <a:font script="Sinh" typeface="Iskoola Pota"/>
+        <a:font script="Mong" typeface="Mongolian Baiti"/>
+        <a:font script="Viet" typeface="Arial"/>
+        <a:font script="Uigh" typeface="Microsoft Uighur"/>
+        <a:font script="Geor" typeface="Sylfaen"/>
+        <a:font script="Armn" typeface="Arial"/>
+        <a:font script="Bugi" typeface="Leelawadee UI"/>
+        <a:font script="Bopo" typeface="Microsoft JhengHei"/>
+        <a:font script="Java" typeface="Javanese Text"/>
+        <a:font script="Lisu" typeface="Segoe UI"/>
+        <a:font script="Mymr" typeface="Myanmar Text"/>
+        <a:font script="Nkoo" typeface="Ebrima"/>
+        <a:font script="Olck" typeface="Nirmala UI"/>
+        <a:font script="Osma" typeface="Ebrima"/>
+        <a:font script="Phag" typeface="Phagspa"/>
+        <a:font script="Syrn" typeface="Estrangelo Edessa"/>
+        <a:font script="Syrj" typeface="Estrangelo Edessa"/>
+        <a:font script="Syre" typeface="Estrangelo Edessa"/>
+        <a:font script="Sora" typeface="Nirmala UI"/>
+        <a:font script="Tale" typeface="Microsoft Tai Le"/>
+        <a:font script="Talu" typeface="Microsoft New Tai Lue"/>
+        <a:font script="Tfng" typeface="Ebrima"/>
+      </a:minorFont>
+    </a:fontScheme>
+    <a:fmtScheme name="Office">
+      <a:fillStyleLst>
+        <a:solidFill>
+          <a:schemeClr val="phClr"/>
+        </a:solidFill>
+        <a:gradFill rotWithShape="1">
+          <a:gsLst>
+            <a:gs pos="0">
+              <a:schemeClr val="phClr">
+                <a:lumMod val="110000"/>
+                <a:satMod val="105000"/>
+                <a:tint val="67000"/>
+              </a:schemeClr>
+            </a:gs>
+            <a:gs pos="50000">
+              <a:schemeClr val="phClr">
+                <a:lumMod val="105000"/>
+                <a:satMod val="103000"/>
+                <a:tint val="73000"/>
+              </a:schemeClr>
+            </a:gs>
+            <a:gs pos="100000">
+              <a:schemeClr val="phClr">
+                <a:lumMod val="105000"/>
+                <a:satMod val="109000"/>
+                <a:tint val="81000"/>
+              </a:schemeClr>
+            </a:gs>
+          </a:gsLst>
+          <a:lin ang="5400000" scaled="0"/>
+        </a:gradFill>
+        <a:gradFill rotWithShape="1">
+          <a:gsLst>
+            <a:gs pos="0">
+              <a:schemeClr val="phClr">
+                <a:satMod val="103000"/>
+                <a:lumMod val="102000"/>
+                <a:tint val="94000"/>
+              </a:schemeClr>
+            </a:gs>
+            <a:gs pos="50000">
+              <a:schemeClr val="phClr">
+                <a:satMod val="110000"/>
+                <a:lumMod val="100000"/>
+                <a:shade val="100000"/>
+              </a:schemeClr>
+            </a:gs>
+            <a:gs pos="100000">
+              <a:schemeClr val="phClr">
+                <a:lumMod val="99000"/>
+                <a:satMod val="120000"/>
+                <a:shade val="78000"/>
+              </a:schemeClr>
+            </a:gs>
+          </a:gsLst>
+          <a:lin ang="5400000" scaled="0"/>
+        </a:gradFill>
+      </a:fillStyleLst>
+      <a:lnStyleLst>
+        <a:ln w="6350" cap="flat" cmpd="sng" algn="ctr">
+          <a:solidFill>
+            <a:schemeClr val="phClr"/>
+          </a:solidFill>
+          <a:prstDash val="solid"/>
+          <a:miter lim="800000"/>
+        </a:ln>
+        <a:ln w="12700" cap="flat" cmpd="sng" algn="ctr">
+          <a:solidFill>
+            <a:schemeClr val="phClr"/>
+          </a:solidFill>
+          <a:prstDash val="solid"/>
+          <a:miter lim="800000"/>
+        </a:ln>
+        <a:ln w="19050" cap="flat" cmpd="sng" algn="ctr">
+          <a:solidFill>
+            <a:schemeClr val="phClr"/>
+          </a:solidFill>
+          <a:prstDash val="solid"/>
+          <a:miter lim="800000"/>
+        </a:ln>
+      </a:lnStyleLst>
+      <a:effectStyleLst>
+        <a:effectStyle>
+          <a:effectLst/>
+        </a:effectStyle>
+        <a:effectStyle>
+          <a:effectLst/>
+        </a:effectStyle>
+        <a:effectStyle>
+          <a:effectLst>
+            <a:outerShdw blurRad="57150" dist="19050" dir="5400000" algn="ctr" rotWithShape="0">
+              <a:srgbClr val="000000">
+                <a:alpha val="63000"/>
+              </a:srgbClr>
+            </a:outerShdw>
+          </a:effectLst>
+        </a:effectStyle>
+      </a:effectStyleLst>
+      <a:bgFillStyleLst>
+        <a:solidFill>
+          <a:schemeClr val="phClr"/>
+        </a:solidFill>
+        <a:solidFill>
+          <a:schemeClr val="phClr">
+            <a:tint val="95000"/>
+            <a:satMod val="170000"/>
+          </a:schemeClr>
+        </a:solidFill>
+        <a:gradFill rotWithShape="1">
+          <a:gsLst>
+            <a:gs pos="0">
+              <a:schemeClr val="phClr">
+                <a:tint val="93000"/>
+                <a:satMod val="150000"/>
+                <a:shade val="98000"/>
+                <a:lumMod val="102000"/>
+              </a:schemeClr>
+            </a:gs>
+            <a:gs pos="50000">
+              <a:schemeClr val="phClr">
+                <a:tint val="98000"/>
+                <a:satMod val="130000"/>
+                <a:shade val="90000"/>
+                <a:lumMod val="103000"/>
+              </a:schemeClr>
+            </a:gs>
+            <a:gs pos="100000">
+              <a:schemeClr val="phClr">
+                <a:shade val="63000"/>
+                <a:satMod val="120000"/>
+              </a:schemeClr>
+            </a:gs>
+          </a:gsLst>
+          <a:lin ang="5400000" scaled="0"/>
+        </a:gradFill>
+      </a:bgFillStyleLst>
+    </a:fmtScheme>
+  </a:themeElements>
+  <a:objectDefaults/>
+  <a:extraClrSchemeLst/>
+  <a:extLst>
+    <a:ext uri="{05A4C25C-085E-4340-85A3-A5531E510DB2}">
+      <thm15:themeFamily xmlns:thm15="http://schemas.microsoft.com/office/thememl/2012/main" name="Office Theme" id="{62F939B6-93AF-4DB8-9C6B-D6C7DFDC589F}" vid="{4A3C46E8-61CC-4603-A589-7422A47A8E4A}"/>
+    </a:ext>
+  </a:extLst>
+</a:theme>
 </file>